--- a/ppt/HrishikeshSajeev_X25132377_wildlife-conservation-monitoring.pptx
+++ b/ppt/HrishikeshSajeev_X25132377_wildlife-conservation-monitoring.pptx
@@ -1150,20 +1150,59 @@
         </p:nvSpPr>
         <p:spPr>
           <a:xfrm>
-            <a:off x="640080" y="914400"/>
-            <a:ext cx="10972800" cy="1280160"/>
-          </a:xfrm>
-          <a:prstGeom prst="rect">
-            <a:avLst/>
-          </a:prstGeom>
-          <a:noFill/>
-          <a:ln/>
-        </p:spPr>
-        <p:txBody>
-          <a:bodyPr wrap="square" rtlCol="0" anchor="t"/>
-          <a:lstStyle/>
-          <a:p>
-            <a:pPr algn="l" indent="0" marL="0">
+            <a:off x="658368" y="640080"/>
+            <a:ext cx="10972800" cy="365760"/>
+          </a:xfrm>
+          <a:prstGeom prst="rect">
+            <a:avLst/>
+          </a:prstGeom>
+          <a:noFill/>
+          <a:ln/>
+        </p:spPr>
+        <p:txBody>
+          <a:bodyPr wrap="square" rtlCol="0" anchor="ctr"/>
+          <a:lstStyle/>
+          <a:p>
+            <a:pPr indent="0" marL="0">
+              <a:buNone/>
+            </a:pPr>
+            <a:r>
+              <a:rPr lang="en-US" sz="1400" b="1" spc="300" kern="0" dirty="0">
+                <a:solidFill>
+                  <a:srgbClr val="D9A62E"/>
+                </a:solidFill>
+                <a:latin typeface="Calibri" pitchFamily="34" charset="0"/>
+                <a:ea typeface="Calibri" pitchFamily="34" charset="-122"/>
+                <a:cs typeface="Calibri" pitchFamily="34" charset="-120"/>
+              </a:rPr>
+              <a:t>WILDLIFE CONSERVATION HABITAT MONITORING</a:t>
+            </a:r>
+            <a:endParaRPr lang="en-US" sz="1400" dirty="0"/>
+          </a:p>
+        </p:txBody>
+      </p:sp>
+      <p:sp>
+        <p:nvSpPr>
+          <p:cNvPr id="3" name="Text 1"/>
+          <p:cNvSpPr/>
+          <p:nvPr/>
+        </p:nvSpPr>
+        <p:spPr>
+          <a:xfrm>
+            <a:off x="640080" y="2514600"/>
+            <a:ext cx="10972800" cy="1188720"/>
+          </a:xfrm>
+          <a:prstGeom prst="rect">
+            <a:avLst/>
+          </a:prstGeom>
+          <a:noFill/>
+          <a:ln/>
+        </p:spPr>
+        <p:txBody>
+          <a:bodyPr wrap="square" rtlCol="0" anchor="ctr"/>
+          <a:lstStyle/>
+          <a:p>
+            <a:pPr indent="0" marL="0">
               <a:buNone/>
             </a:pPr>
             <a:r>
@@ -1183,13 +1222,13 @@
       </p:sp>
       <p:sp>
         <p:nvSpPr>
-          <p:cNvPr id="3" name="Text 1"/>
-          <p:cNvSpPr/>
-          <p:nvPr/>
-        </p:nvSpPr>
-        <p:spPr>
-          <a:xfrm>
-            <a:off x="658368" y="2148840"/>
+          <p:cNvPr id="4" name="Text 2"/>
+          <p:cNvSpPr/>
+          <p:nvPr/>
+        </p:nvSpPr>
+        <p:spPr>
+          <a:xfrm>
+            <a:off x="658368" y="3703320"/>
             <a:ext cx="10972800" cy="365760"/>
           </a:xfrm>
           <a:prstGeom prst="rect">
@@ -1222,14 +1261,14 @@
       </p:sp>
       <p:sp>
         <p:nvSpPr>
-          <p:cNvPr id="4" name="Text 2"/>
-          <p:cNvSpPr/>
-          <p:nvPr/>
-        </p:nvSpPr>
-        <p:spPr>
-          <a:xfrm>
-            <a:off x="658368" y="2697480"/>
-            <a:ext cx="10424160" cy="1371600"/>
+          <p:cNvPr id="5" name="Text 3"/>
+          <p:cNvSpPr/>
+          <p:nvPr/>
+        </p:nvSpPr>
+        <p:spPr>
+          <a:xfrm>
+            <a:off x="658368" y="4251960"/>
+            <a:ext cx="10424160" cy="1188720"/>
           </a:xfrm>
           <a:prstGeom prst="rect">
             <a:avLst/>
@@ -1243,12 +1282,12 @@
           <a:p>
             <a:pPr indent="0" marL="0">
               <a:lnSpc>
-                <a:spcPct val="110000"/>
+                <a:spcPct val="108000"/>
               </a:lnSpc>
               <a:buNone/>
             </a:pPr>
             <a:r>
-              <a:rPr lang="en-US" sz="2000" dirty="0">
+              <a:rPr lang="en-US" sz="1800" dirty="0">
                 <a:solidFill>
                   <a:srgbClr val="D6E2C6"/>
                 </a:solidFill>
@@ -1258,19 +1297,19 @@
               </a:rPr>
               <a:t>A gunshot-like acoustic spike lasts moments, a waterhole dries over days — fixed patrols learn of an event only when a ranger reaches the spot, not when it starts.</a:t>
             </a:r>
-            <a:endParaRPr lang="en-US" sz="2000" dirty="0"/>
-          </a:p>
-        </p:txBody>
-      </p:sp>
-      <p:sp>
-        <p:nvSpPr>
-          <p:cNvPr id="5" name="Shape 3"/>
-          <p:cNvSpPr/>
-          <p:nvPr/>
-        </p:nvSpPr>
-        <p:spPr>
-          <a:xfrm>
-            <a:off x="658368" y="4206240"/>
+            <a:endParaRPr lang="en-US" sz="1800" dirty="0"/>
+          </a:p>
+        </p:txBody>
+      </p:sp>
+      <p:sp>
+        <p:nvSpPr>
+          <p:cNvPr id="6" name="Shape 4"/>
+          <p:cNvSpPr/>
+          <p:nvPr/>
+        </p:nvSpPr>
+        <p:spPr>
+          <a:xfrm>
+            <a:off x="658368" y="5623560"/>
             <a:ext cx="2651760" cy="566928"/>
           </a:xfrm>
           <a:prstGeom prst="roundRect">
@@ -1291,13 +1330,13 @@
       </p:sp>
       <p:sp>
         <p:nvSpPr>
-          <p:cNvPr id="6" name="Text 4"/>
-          <p:cNvSpPr/>
-          <p:nvPr/>
-        </p:nvSpPr>
-        <p:spPr>
-          <a:xfrm>
-            <a:off x="658368" y="4206240"/>
+          <p:cNvPr id="7" name="Text 5"/>
+          <p:cNvSpPr/>
+          <p:nvPr/>
+        </p:nvSpPr>
+        <p:spPr>
+          <a:xfrm>
+            <a:off x="658368" y="5623560"/>
             <a:ext cx="2651760" cy="566928"/>
           </a:xfrm>
           <a:prstGeom prst="rect">
@@ -1314,7 +1353,7 @@
               <a:buNone/>
             </a:pPr>
             <a:r>
-              <a:rPr lang="en-US" sz="1400" b="1" dirty="0">
+              <a:rPr lang="en-US" sz="1350" b="1" dirty="0">
                 <a:solidFill>
                   <a:srgbClr val="D9A62E"/>
                 </a:solidFill>
@@ -1324,19 +1363,19 @@
               </a:rPr>
               <a:t>Acoustic &gt; 75 dB</a:t>
             </a:r>
-            <a:endParaRPr lang="en-US" sz="1400" dirty="0"/>
-          </a:p>
-        </p:txBody>
-      </p:sp>
-      <p:sp>
-        <p:nvSpPr>
-          <p:cNvPr id="7" name="Shape 5"/>
-          <p:cNvSpPr/>
-          <p:nvPr/>
-        </p:nvSpPr>
-        <p:spPr>
-          <a:xfrm>
-            <a:off x="3538728" y="4206240"/>
+            <a:endParaRPr lang="en-US" sz="1350" dirty="0"/>
+          </a:p>
+        </p:txBody>
+      </p:sp>
+      <p:sp>
+        <p:nvSpPr>
+          <p:cNvPr id="8" name="Shape 6"/>
+          <p:cNvSpPr/>
+          <p:nvPr/>
+        </p:nvSpPr>
+        <p:spPr>
+          <a:xfrm>
+            <a:off x="3538728" y="5623560"/>
             <a:ext cx="2651760" cy="566928"/>
           </a:xfrm>
           <a:prstGeom prst="roundRect">
@@ -1357,13 +1396,13 @@
       </p:sp>
       <p:sp>
         <p:nvSpPr>
-          <p:cNvPr id="8" name="Text 6"/>
-          <p:cNvSpPr/>
-          <p:nvPr/>
-        </p:nvSpPr>
-        <p:spPr>
-          <a:xfrm>
-            <a:off x="3538728" y="4206240"/>
+          <p:cNvPr id="9" name="Text 7"/>
+          <p:cNvSpPr/>
+          <p:nvPr/>
+        </p:nvSpPr>
+        <p:spPr>
+          <a:xfrm>
+            <a:off x="3538728" y="5623560"/>
             <a:ext cx="2651760" cy="566928"/>
           </a:xfrm>
           <a:prstGeom prst="rect">
@@ -1380,7 +1419,7 @@
               <a:buNone/>
             </a:pPr>
             <a:r>
-              <a:rPr lang="en-US" sz="1400" b="1" dirty="0">
+              <a:rPr lang="en-US" sz="1350" b="1" dirty="0">
                 <a:solidFill>
                   <a:srgbClr val="D9A62E"/>
                 </a:solidFill>
@@ -1390,19 +1429,19 @@
               </a:rPr>
               <a:t>Waterhole &lt; 20 cm</a:t>
             </a:r>
-            <a:endParaRPr lang="en-US" sz="1400" dirty="0"/>
-          </a:p>
-        </p:txBody>
-      </p:sp>
-      <p:sp>
-        <p:nvSpPr>
-          <p:cNvPr id="9" name="Shape 7"/>
-          <p:cNvSpPr/>
-          <p:nvPr/>
-        </p:nvSpPr>
-        <p:spPr>
-          <a:xfrm>
-            <a:off x="6419088" y="4206240"/>
+            <a:endParaRPr lang="en-US" sz="1350" dirty="0"/>
+          </a:p>
+        </p:txBody>
+      </p:sp>
+      <p:sp>
+        <p:nvSpPr>
+          <p:cNvPr id="10" name="Shape 8"/>
+          <p:cNvSpPr/>
+          <p:nvPr/>
+        </p:nvSpPr>
+        <p:spPr>
+          <a:xfrm>
+            <a:off x="6419088" y="5623560"/>
             <a:ext cx="2651760" cy="566928"/>
           </a:xfrm>
           <a:prstGeom prst="roundRect">
@@ -1423,13 +1462,13 @@
       </p:sp>
       <p:sp>
         <p:nvSpPr>
-          <p:cNvPr id="10" name="Text 8"/>
-          <p:cNvSpPr/>
-          <p:nvPr/>
-        </p:nvSpPr>
-        <p:spPr>
-          <a:xfrm>
-            <a:off x="6419088" y="4206240"/>
+          <p:cNvPr id="11" name="Text 9"/>
+          <p:cNvSpPr/>
+          <p:nvPr/>
+        </p:nvSpPr>
+        <p:spPr>
+          <a:xfrm>
+            <a:off x="6419088" y="5623560"/>
             <a:ext cx="2651760" cy="566928"/>
           </a:xfrm>
           <a:prstGeom prst="rect">
@@ -1446,7 +1485,7 @@
               <a:buNone/>
             </a:pPr>
             <a:r>
-              <a:rPr lang="en-US" sz="1400" b="1" dirty="0">
+              <a:rPr lang="en-US" sz="1350" b="1" dirty="0">
                 <a:solidFill>
                   <a:srgbClr val="D9A62E"/>
                 </a:solidFill>
@@ -1456,20 +1495,20 @@
               </a:rPr>
               <a:t>4 rules at the edge</a:t>
             </a:r>
-            <a:endParaRPr lang="en-US" sz="1400" dirty="0"/>
-          </a:p>
-        </p:txBody>
-      </p:sp>
-      <p:sp>
-        <p:nvSpPr>
-          <p:cNvPr id="11" name="Text 9"/>
-          <p:cNvSpPr/>
-          <p:nvPr/>
-        </p:nvSpPr>
-        <p:spPr>
-          <a:xfrm>
-            <a:off x="658368" y="6126480"/>
-            <a:ext cx="10972800" cy="365760"/>
+            <a:endParaRPr lang="en-US" sz="1350" dirty="0"/>
+          </a:p>
+        </p:txBody>
+      </p:sp>
+      <p:sp>
+        <p:nvSpPr>
+          <p:cNvPr id="12" name="Text 10"/>
+          <p:cNvSpPr/>
+          <p:nvPr/>
+        </p:nvSpPr>
+        <p:spPr>
+          <a:xfrm>
+            <a:off x="658368" y="6400800"/>
+            <a:ext cx="10972800" cy="320040"/>
           </a:xfrm>
           <a:prstGeom prst="rect">
             <a:avLst/>
@@ -1485,7 +1524,7 @@
               <a:buNone/>
             </a:pPr>
             <a:r>
-              <a:rPr lang="en-US" sz="1300" dirty="0">
+              <a:rPr lang="en-US" sz="1250" dirty="0">
                 <a:solidFill>
                   <a:srgbClr val="606E50"/>
                 </a:solidFill>
@@ -1495,7 +1534,7 @@
               </a:rPr>
               <a:t>Fog &amp; Edge Computing (H9FECC)   ·   deployed live on AWS</a:t>
             </a:r>
-            <a:endParaRPr lang="en-US" sz="1300" dirty="0"/>
+            <a:endParaRPr lang="en-US" sz="1250" dirty="0"/>
           </a:p>
         </p:txBody>
       </p:sp>
@@ -1578,12 +1617,12 @@
         </p:nvSpPr>
         <p:spPr>
           <a:xfrm>
-            <a:off x="640080" y="2468880"/>
-            <a:ext cx="1572768" cy="1371600"/>
+            <a:off x="640080" y="1874520"/>
+            <a:ext cx="2286000" cy="1280160"/>
           </a:xfrm>
           <a:prstGeom prst="roundRect">
             <a:avLst>
-              <a:gd name="adj" fmla="val 6667"/>
+              <a:gd name="adj" fmla="val 7143"/>
             </a:avLst>
           </a:prstGeom>
           <a:solidFill>
@@ -1605,8 +1644,8 @@
         </p:nvSpPr>
         <p:spPr>
           <a:xfrm>
-            <a:off x="1325880" y="2670048"/>
-            <a:ext cx="201168" cy="201168"/>
+            <a:off x="1691640" y="2039112"/>
+            <a:ext cx="182880" cy="182880"/>
           </a:xfrm>
           <a:prstGeom prst="ellipse">
             <a:avLst/>
@@ -1625,8 +1664,8 @@
         </p:nvSpPr>
         <p:spPr>
           <a:xfrm>
-            <a:off x="594360" y="2926080"/>
-            <a:ext cx="1664208" cy="411480"/>
+            <a:off x="612648" y="2258568"/>
+            <a:ext cx="2340864" cy="365760"/>
           </a:xfrm>
           <a:prstGeom prst="rect">
             <a:avLst/>
@@ -1664,8 +1703,8 @@
         </p:nvSpPr>
         <p:spPr>
           <a:xfrm>
-            <a:off x="621792" y="3310128"/>
-            <a:ext cx="1609344" cy="457200"/>
+            <a:off x="640080" y="2606040"/>
+            <a:ext cx="2286000" cy="411480"/>
           </a:xfrm>
           <a:prstGeom prst="rect">
             <a:avLst/>
@@ -1703,8 +1742,733 @@
         </p:nvSpPr>
         <p:spPr>
           <a:xfrm>
-            <a:off x="2231136" y="3154680"/>
-            <a:ext cx="258409" cy="0"/>
+            <a:off x="2944368" y="2514600"/>
+            <a:ext cx="1975104" cy="0"/>
+          </a:xfrm>
+          <a:prstGeom prst="line">
+            <a:avLst/>
+          </a:prstGeom>
+          <a:noFill/>
+          <a:ln w="25400">
+            <a:solidFill>
+              <a:srgbClr val="8CA85E"/>
+            </a:solidFill>
+            <a:prstDash val="solid"/>
+            <a:headEnd type="none"/>
+            <a:tailEnd type="triangle"/>
+          </a:ln>
+        </p:spPr>
+      </p:sp>
+      <p:sp>
+        <p:nvSpPr>
+          <p:cNvPr id="8" name="Shape 6"/>
+          <p:cNvSpPr/>
+          <p:nvPr/>
+        </p:nvSpPr>
+        <p:spPr>
+          <a:xfrm>
+            <a:off x="4937760" y="1874520"/>
+            <a:ext cx="2286000" cy="1280160"/>
+          </a:xfrm>
+          <a:prstGeom prst="roundRect">
+            <a:avLst>
+              <a:gd name="adj" fmla="val 7143"/>
+            </a:avLst>
+          </a:prstGeom>
+          <a:solidFill>
+            <a:srgbClr val="EFF3E9"/>
+          </a:solidFill>
+          <a:ln w="19050">
+            <a:solidFill>
+              <a:srgbClr val="8CA85E"/>
+            </a:solidFill>
+            <a:prstDash val="solid"/>
+          </a:ln>
+        </p:spPr>
+      </p:sp>
+      <p:sp>
+        <p:nvSpPr>
+          <p:cNvPr id="9" name="Shape 7"/>
+          <p:cNvSpPr/>
+          <p:nvPr/>
+        </p:nvSpPr>
+        <p:spPr>
+          <a:xfrm>
+            <a:off x="5989320" y="2039112"/>
+            <a:ext cx="182880" cy="182880"/>
+          </a:xfrm>
+          <a:prstGeom prst="ellipse">
+            <a:avLst/>
+          </a:prstGeom>
+          <a:solidFill>
+            <a:srgbClr val="8CA85E"/>
+          </a:solidFill>
+          <a:ln/>
+        </p:spPr>
+      </p:sp>
+      <p:sp>
+        <p:nvSpPr>
+          <p:cNvPr id="10" name="Text 8"/>
+          <p:cNvSpPr/>
+          <p:nvPr/>
+        </p:nvSpPr>
+        <p:spPr>
+          <a:xfrm>
+            <a:off x="4910328" y="2258568"/>
+            <a:ext cx="2340864" cy="365760"/>
+          </a:xfrm>
+          <a:prstGeom prst="rect">
+            <a:avLst/>
+          </a:prstGeom>
+          <a:noFill/>
+          <a:ln/>
+        </p:spPr>
+        <p:txBody>
+          <a:bodyPr wrap="square" lIns="0" tIns="0" rIns="0" bIns="0" rtlCol="0" anchor="ctr"/>
+          <a:lstStyle/>
+          <a:p>
+            <a:pPr algn="ctr" indent="0" marL="0">
+              <a:buNone/>
+            </a:pPr>
+            <a:r>
+              <a:rPr lang="en-US" sz="1450" b="1" dirty="0">
+                <a:solidFill>
+                  <a:srgbClr val="1C2617"/>
+                </a:solidFill>
+                <a:latin typeface="Calibri" pitchFamily="34" charset="0"/>
+                <a:ea typeface="Calibri" pitchFamily="34" charset="-122"/>
+                <a:cs typeface="Calibri" pitchFamily="34" charset="-120"/>
+              </a:rPr>
+              <a:t>Fog node (EC2)</a:t>
+            </a:r>
+            <a:endParaRPr lang="en-US" sz="1450" dirty="0"/>
+          </a:p>
+        </p:txBody>
+      </p:sp>
+      <p:sp>
+        <p:nvSpPr>
+          <p:cNvPr id="11" name="Text 9"/>
+          <p:cNvSpPr/>
+          <p:nvPr/>
+        </p:nvSpPr>
+        <p:spPr>
+          <a:xfrm>
+            <a:off x="4937760" y="2606040"/>
+            <a:ext cx="2286000" cy="411480"/>
+          </a:xfrm>
+          <a:prstGeom prst="rect">
+            <a:avLst/>
+          </a:prstGeom>
+          <a:noFill/>
+          <a:ln/>
+        </p:spPr>
+        <p:txBody>
+          <a:bodyPr wrap="square" lIns="0" tIns="0" rIns="0" bIns="0" rtlCol="0" anchor="t"/>
+          <a:lstStyle/>
+          <a:p>
+            <a:pPr algn="ctr" indent="0" marL="0">
+              <a:buNone/>
+            </a:pPr>
+            <a:r>
+              <a:rPr lang="en-US" sz="1050" dirty="0">
+                <a:solidFill>
+                  <a:srgbClr val="606E50"/>
+                </a:solidFill>
+                <a:latin typeface="Calibri" pitchFamily="34" charset="0"/>
+                <a:ea typeface="Calibri" pitchFamily="34" charset="-122"/>
+                <a:cs typeface="Calibri" pitchFamily="34" charset="-120"/>
+              </a:rPr>
+              <a:t>window · aggregate · alert</a:t>
+            </a:r>
+            <a:endParaRPr lang="en-US" sz="1050" dirty="0"/>
+          </a:p>
+        </p:txBody>
+      </p:sp>
+      <p:sp>
+        <p:nvSpPr>
+          <p:cNvPr id="12" name="Shape 10"/>
+          <p:cNvSpPr/>
+          <p:nvPr/>
+        </p:nvSpPr>
+        <p:spPr>
+          <a:xfrm>
+            <a:off x="7242048" y="2514600"/>
+            <a:ext cx="1975104" cy="0"/>
+          </a:xfrm>
+          <a:prstGeom prst="line">
+            <a:avLst/>
+          </a:prstGeom>
+          <a:noFill/>
+          <a:ln w="25400">
+            <a:solidFill>
+              <a:srgbClr val="8CA85E"/>
+            </a:solidFill>
+            <a:prstDash val="solid"/>
+            <a:headEnd type="none"/>
+            <a:tailEnd type="triangle"/>
+          </a:ln>
+        </p:spPr>
+      </p:sp>
+      <p:sp>
+        <p:nvSpPr>
+          <p:cNvPr id="13" name="Shape 11"/>
+          <p:cNvSpPr/>
+          <p:nvPr/>
+        </p:nvSpPr>
+        <p:spPr>
+          <a:xfrm>
+            <a:off x="9235440" y="1874520"/>
+            <a:ext cx="2286000" cy="1280160"/>
+          </a:xfrm>
+          <a:prstGeom prst="roundRect">
+            <a:avLst>
+              <a:gd name="adj" fmla="val 7143"/>
+            </a:avLst>
+          </a:prstGeom>
+          <a:solidFill>
+            <a:srgbClr val="EFF3E9"/>
+          </a:solidFill>
+          <a:ln w="19050">
+            <a:solidFill>
+              <a:srgbClr val="4B6B2A"/>
+            </a:solidFill>
+            <a:prstDash val="solid"/>
+          </a:ln>
+        </p:spPr>
+      </p:sp>
+      <p:sp>
+        <p:nvSpPr>
+          <p:cNvPr id="14" name="Shape 12"/>
+          <p:cNvSpPr/>
+          <p:nvPr/>
+        </p:nvSpPr>
+        <p:spPr>
+          <a:xfrm>
+            <a:off x="10287000" y="2039112"/>
+            <a:ext cx="182880" cy="182880"/>
+          </a:xfrm>
+          <a:prstGeom prst="ellipse">
+            <a:avLst/>
+          </a:prstGeom>
+          <a:solidFill>
+            <a:srgbClr val="4B6B2A"/>
+          </a:solidFill>
+          <a:ln/>
+        </p:spPr>
+      </p:sp>
+      <p:sp>
+        <p:nvSpPr>
+          <p:cNvPr id="15" name="Text 13"/>
+          <p:cNvSpPr/>
+          <p:nvPr/>
+        </p:nvSpPr>
+        <p:spPr>
+          <a:xfrm>
+            <a:off x="9208008" y="2258568"/>
+            <a:ext cx="2340864" cy="365760"/>
+          </a:xfrm>
+          <a:prstGeom prst="rect">
+            <a:avLst/>
+          </a:prstGeom>
+          <a:noFill/>
+          <a:ln/>
+        </p:spPr>
+        <p:txBody>
+          <a:bodyPr wrap="square" lIns="0" tIns="0" rIns="0" bIns="0" rtlCol="0" anchor="ctr"/>
+          <a:lstStyle/>
+          <a:p>
+            <a:pPr algn="ctr" indent="0" marL="0">
+              <a:buNone/>
+            </a:pPr>
+            <a:r>
+              <a:rPr lang="en-US" sz="1450" b="1" dirty="0">
+                <a:solidFill>
+                  <a:srgbClr val="1C2617"/>
+                </a:solidFill>
+                <a:latin typeface="Calibri" pitchFamily="34" charset="0"/>
+                <a:ea typeface="Calibri" pitchFamily="34" charset="-122"/>
+                <a:cs typeface="Calibri" pitchFamily="34" charset="-120"/>
+              </a:rPr>
+              <a:t>Amazon SQS</a:t>
+            </a:r>
+            <a:endParaRPr lang="en-US" sz="1450" dirty="0"/>
+          </a:p>
+        </p:txBody>
+      </p:sp>
+      <p:sp>
+        <p:nvSpPr>
+          <p:cNvPr id="16" name="Text 14"/>
+          <p:cNvSpPr/>
+          <p:nvPr/>
+        </p:nvSpPr>
+        <p:spPr>
+          <a:xfrm>
+            <a:off x="9235440" y="2606040"/>
+            <a:ext cx="2286000" cy="411480"/>
+          </a:xfrm>
+          <a:prstGeom prst="rect">
+            <a:avLst/>
+          </a:prstGeom>
+          <a:noFill/>
+          <a:ln/>
+        </p:spPr>
+        <p:txBody>
+          <a:bodyPr wrap="square" lIns="0" tIns="0" rIns="0" bIns="0" rtlCol="0" anchor="t"/>
+          <a:lstStyle/>
+          <a:p>
+            <a:pPr algn="ctr" indent="0" marL="0">
+              <a:buNone/>
+            </a:pPr>
+            <a:r>
+              <a:rPr lang="en-US" sz="1050" dirty="0">
+                <a:solidFill>
+                  <a:srgbClr val="606E50"/>
+                </a:solidFill>
+                <a:latin typeface="Calibri" pitchFamily="34" charset="0"/>
+                <a:ea typeface="Calibri" pitchFamily="34" charset="-122"/>
+                <a:cs typeface="Calibri" pitchFamily="34" charset="-120"/>
+              </a:rPr>
+              <a:t>aggregate queue</a:t>
+            </a:r>
+            <a:endParaRPr lang="en-US" sz="1050" dirty="0"/>
+          </a:p>
+        </p:txBody>
+      </p:sp>
+      <p:sp>
+        <p:nvSpPr>
+          <p:cNvPr id="17" name="Shape 15"/>
+          <p:cNvSpPr/>
+          <p:nvPr/>
+        </p:nvSpPr>
+        <p:spPr>
+          <a:xfrm>
+            <a:off x="9235440" y="3520440"/>
+            <a:ext cx="2286000" cy="1280160"/>
+          </a:xfrm>
+          <a:prstGeom prst="roundRect">
+            <a:avLst>
+              <a:gd name="adj" fmla="val 7143"/>
+            </a:avLst>
+          </a:prstGeom>
+          <a:solidFill>
+            <a:srgbClr val="EFF3E9"/>
+          </a:solidFill>
+          <a:ln w="19050">
+            <a:solidFill>
+              <a:srgbClr val="4B6B2A"/>
+            </a:solidFill>
+            <a:prstDash val="solid"/>
+          </a:ln>
+        </p:spPr>
+      </p:sp>
+      <p:sp>
+        <p:nvSpPr>
+          <p:cNvPr id="18" name="Shape 16"/>
+          <p:cNvSpPr/>
+          <p:nvPr/>
+        </p:nvSpPr>
+        <p:spPr>
+          <a:xfrm>
+            <a:off x="10287000" y="3685032"/>
+            <a:ext cx="182880" cy="182880"/>
+          </a:xfrm>
+          <a:prstGeom prst="ellipse">
+            <a:avLst/>
+          </a:prstGeom>
+          <a:solidFill>
+            <a:srgbClr val="4B6B2A"/>
+          </a:solidFill>
+          <a:ln/>
+        </p:spPr>
+      </p:sp>
+      <p:sp>
+        <p:nvSpPr>
+          <p:cNvPr id="19" name="Text 17"/>
+          <p:cNvSpPr/>
+          <p:nvPr/>
+        </p:nvSpPr>
+        <p:spPr>
+          <a:xfrm>
+            <a:off x="9208008" y="3904488"/>
+            <a:ext cx="2340864" cy="365760"/>
+          </a:xfrm>
+          <a:prstGeom prst="rect">
+            <a:avLst/>
+          </a:prstGeom>
+          <a:noFill/>
+          <a:ln/>
+        </p:spPr>
+        <p:txBody>
+          <a:bodyPr wrap="square" lIns="0" tIns="0" rIns="0" bIns="0" rtlCol="0" anchor="ctr"/>
+          <a:lstStyle/>
+          <a:p>
+            <a:pPr algn="ctr" indent="0" marL="0">
+              <a:buNone/>
+            </a:pPr>
+            <a:r>
+              <a:rPr lang="en-US" sz="1450" b="1" dirty="0">
+                <a:solidFill>
+                  <a:srgbClr val="1C2617"/>
+                </a:solidFill>
+                <a:latin typeface="Calibri" pitchFamily="34" charset="0"/>
+                <a:ea typeface="Calibri" pitchFamily="34" charset="-122"/>
+                <a:cs typeface="Calibri" pitchFamily="34" charset="-120"/>
+              </a:rPr>
+              <a:t>AWS Lambda</a:t>
+            </a:r>
+            <a:endParaRPr lang="en-US" sz="1450" dirty="0"/>
+          </a:p>
+        </p:txBody>
+      </p:sp>
+      <p:sp>
+        <p:nvSpPr>
+          <p:cNvPr id="20" name="Text 18"/>
+          <p:cNvSpPr/>
+          <p:nvPr/>
+        </p:nvSpPr>
+        <p:spPr>
+          <a:xfrm>
+            <a:off x="9235440" y="4251960"/>
+            <a:ext cx="2286000" cy="411480"/>
+          </a:xfrm>
+          <a:prstGeom prst="rect">
+            <a:avLst/>
+          </a:prstGeom>
+          <a:noFill/>
+          <a:ln/>
+        </p:spPr>
+        <p:txBody>
+          <a:bodyPr wrap="square" lIns="0" tIns="0" rIns="0" bIns="0" rtlCol="0" anchor="t"/>
+          <a:lstStyle/>
+          <a:p>
+            <a:pPr algn="ctr" indent="0" marL="0">
+              <a:buNone/>
+            </a:pPr>
+            <a:r>
+              <a:rPr lang="en-US" sz="1050" dirty="0">
+                <a:solidFill>
+                  <a:srgbClr val="606E50"/>
+                </a:solidFill>
+                <a:latin typeface="Calibri" pitchFamily="34" charset="0"/>
+                <a:ea typeface="Calibri" pitchFamily="34" charset="-122"/>
+                <a:cs typeface="Calibri" pitchFamily="34" charset="-120"/>
+              </a:rPr>
+              <a:t>java17 ingest</a:t>
+            </a:r>
+            <a:endParaRPr lang="en-US" sz="1050" dirty="0"/>
+          </a:p>
+        </p:txBody>
+      </p:sp>
+      <p:sp>
+        <p:nvSpPr>
+          <p:cNvPr id="21" name="Shape 19"/>
+          <p:cNvSpPr/>
+          <p:nvPr/>
+        </p:nvSpPr>
+        <p:spPr>
+          <a:xfrm>
+            <a:off x="7242048" y="4160520"/>
+            <a:ext cx="1975104" cy="0"/>
+          </a:xfrm>
+          <a:prstGeom prst="line">
+            <a:avLst/>
+          </a:prstGeom>
+          <a:noFill/>
+          <a:ln w="25400">
+            <a:solidFill>
+              <a:srgbClr val="8CA85E"/>
+            </a:solidFill>
+            <a:prstDash val="solid"/>
+            <a:headEnd type="triangle"/>
+            <a:tailEnd type="oval"/>
+          </a:ln>
+        </p:spPr>
+      </p:sp>
+      <p:sp>
+        <p:nvSpPr>
+          <p:cNvPr id="22" name="Shape 20"/>
+          <p:cNvSpPr/>
+          <p:nvPr/>
+        </p:nvSpPr>
+        <p:spPr>
+          <a:xfrm>
+            <a:off x="4937760" y="3520440"/>
+            <a:ext cx="2286000" cy="1280160"/>
+          </a:xfrm>
+          <a:prstGeom prst="roundRect">
+            <a:avLst>
+              <a:gd name="adj" fmla="val 7143"/>
+            </a:avLst>
+          </a:prstGeom>
+          <a:solidFill>
+            <a:srgbClr val="EFF3E9"/>
+          </a:solidFill>
+          <a:ln w="19050">
+            <a:solidFill>
+              <a:srgbClr val="4B6B2A"/>
+            </a:solidFill>
+            <a:prstDash val="solid"/>
+          </a:ln>
+        </p:spPr>
+      </p:sp>
+      <p:sp>
+        <p:nvSpPr>
+          <p:cNvPr id="23" name="Shape 21"/>
+          <p:cNvSpPr/>
+          <p:nvPr/>
+        </p:nvSpPr>
+        <p:spPr>
+          <a:xfrm>
+            <a:off x="5989320" y="3685032"/>
+            <a:ext cx="182880" cy="182880"/>
+          </a:xfrm>
+          <a:prstGeom prst="ellipse">
+            <a:avLst/>
+          </a:prstGeom>
+          <a:solidFill>
+            <a:srgbClr val="4B6B2A"/>
+          </a:solidFill>
+          <a:ln/>
+        </p:spPr>
+      </p:sp>
+      <p:sp>
+        <p:nvSpPr>
+          <p:cNvPr id="24" name="Text 22"/>
+          <p:cNvSpPr/>
+          <p:nvPr/>
+        </p:nvSpPr>
+        <p:spPr>
+          <a:xfrm>
+            <a:off x="4910328" y="3904488"/>
+            <a:ext cx="2340864" cy="365760"/>
+          </a:xfrm>
+          <a:prstGeom prst="rect">
+            <a:avLst/>
+          </a:prstGeom>
+          <a:noFill/>
+          <a:ln/>
+        </p:spPr>
+        <p:txBody>
+          <a:bodyPr wrap="square" lIns="0" tIns="0" rIns="0" bIns="0" rtlCol="0" anchor="ctr"/>
+          <a:lstStyle/>
+          <a:p>
+            <a:pPr algn="ctr" indent="0" marL="0">
+              <a:buNone/>
+            </a:pPr>
+            <a:r>
+              <a:rPr lang="en-US" sz="1450" b="1" dirty="0">
+                <a:solidFill>
+                  <a:srgbClr val="1C2617"/>
+                </a:solidFill>
+                <a:latin typeface="Calibri" pitchFamily="34" charset="0"/>
+                <a:ea typeface="Calibri" pitchFamily="34" charset="-122"/>
+                <a:cs typeface="Calibri" pitchFamily="34" charset="-120"/>
+              </a:rPr>
+              <a:t>DynamoDB</a:t>
+            </a:r>
+            <a:endParaRPr lang="en-US" sz="1450" dirty="0"/>
+          </a:p>
+        </p:txBody>
+      </p:sp>
+      <p:sp>
+        <p:nvSpPr>
+          <p:cNvPr id="25" name="Text 23"/>
+          <p:cNvSpPr/>
+          <p:nvPr/>
+        </p:nvSpPr>
+        <p:spPr>
+          <a:xfrm>
+            <a:off x="4937760" y="4251960"/>
+            <a:ext cx="2286000" cy="411480"/>
+          </a:xfrm>
+          <a:prstGeom prst="rect">
+            <a:avLst/>
+          </a:prstGeom>
+          <a:noFill/>
+          <a:ln/>
+        </p:spPr>
+        <p:txBody>
+          <a:bodyPr wrap="square" lIns="0" tIns="0" rIns="0" bIns="0" rtlCol="0" anchor="t"/>
+          <a:lstStyle/>
+          <a:p>
+            <a:pPr algn="ctr" indent="0" marL="0">
+              <a:buNone/>
+            </a:pPr>
+            <a:r>
+              <a:rPr lang="en-US" sz="1050" dirty="0">
+                <a:solidFill>
+                  <a:srgbClr val="606E50"/>
+                </a:solidFill>
+                <a:latin typeface="Calibri" pitchFamily="34" charset="0"/>
+                <a:ea typeface="Calibri" pitchFamily="34" charset="-122"/>
+                <a:cs typeface="Calibri" pitchFamily="34" charset="-120"/>
+              </a:rPr>
+              <a:t>readings store</a:t>
+            </a:r>
+            <a:endParaRPr lang="en-US" sz="1050" dirty="0"/>
+          </a:p>
+        </p:txBody>
+      </p:sp>
+      <p:sp>
+        <p:nvSpPr>
+          <p:cNvPr id="26" name="Shape 24"/>
+          <p:cNvSpPr/>
+          <p:nvPr/>
+        </p:nvSpPr>
+        <p:spPr>
+          <a:xfrm>
+            <a:off x="2944368" y="4160520"/>
+            <a:ext cx="1975104" cy="0"/>
+          </a:xfrm>
+          <a:prstGeom prst="line">
+            <a:avLst/>
+          </a:prstGeom>
+          <a:noFill/>
+          <a:ln w="25400">
+            <a:solidFill>
+              <a:srgbClr val="8CA85E"/>
+            </a:solidFill>
+            <a:prstDash val="solid"/>
+            <a:headEnd type="triangle"/>
+            <a:tailEnd type="oval"/>
+          </a:ln>
+        </p:spPr>
+      </p:sp>
+      <p:sp>
+        <p:nvSpPr>
+          <p:cNvPr id="27" name="Shape 25"/>
+          <p:cNvSpPr/>
+          <p:nvPr/>
+        </p:nvSpPr>
+        <p:spPr>
+          <a:xfrm>
+            <a:off x="640080" y="3520440"/>
+            <a:ext cx="2286000" cy="1280160"/>
+          </a:xfrm>
+          <a:prstGeom prst="roundRect">
+            <a:avLst>
+              <a:gd name="adj" fmla="val 7143"/>
+            </a:avLst>
+          </a:prstGeom>
+          <a:solidFill>
+            <a:srgbClr val="EFF3E9"/>
+          </a:solidFill>
+          <a:ln w="19050">
+            <a:solidFill>
+              <a:srgbClr val="6A8F3C"/>
+            </a:solidFill>
+            <a:prstDash val="solid"/>
+          </a:ln>
+        </p:spPr>
+      </p:sp>
+      <p:sp>
+        <p:nvSpPr>
+          <p:cNvPr id="28" name="Shape 26"/>
+          <p:cNvSpPr/>
+          <p:nvPr/>
+        </p:nvSpPr>
+        <p:spPr>
+          <a:xfrm>
+            <a:off x="1691640" y="3685032"/>
+            <a:ext cx="182880" cy="182880"/>
+          </a:xfrm>
+          <a:prstGeom prst="ellipse">
+            <a:avLst/>
+          </a:prstGeom>
+          <a:solidFill>
+            <a:srgbClr val="6A8F3C"/>
+          </a:solidFill>
+          <a:ln/>
+        </p:spPr>
+      </p:sp>
+      <p:sp>
+        <p:nvSpPr>
+          <p:cNvPr id="29" name="Text 27"/>
+          <p:cNvSpPr/>
+          <p:nvPr/>
+        </p:nvSpPr>
+        <p:spPr>
+          <a:xfrm>
+            <a:off x="612648" y="3904488"/>
+            <a:ext cx="2340864" cy="365760"/>
+          </a:xfrm>
+          <a:prstGeom prst="rect">
+            <a:avLst/>
+          </a:prstGeom>
+          <a:noFill/>
+          <a:ln/>
+        </p:spPr>
+        <p:txBody>
+          <a:bodyPr wrap="square" lIns="0" tIns="0" rIns="0" bIns="0" rtlCol="0" anchor="ctr"/>
+          <a:lstStyle/>
+          <a:p>
+            <a:pPr algn="ctr" indent="0" marL="0">
+              <a:buNone/>
+            </a:pPr>
+            <a:r>
+              <a:rPr lang="en-US" sz="1450" b="1" dirty="0">
+                <a:solidFill>
+                  <a:srgbClr val="1C2617"/>
+                </a:solidFill>
+                <a:latin typeface="Calibri" pitchFamily="34" charset="0"/>
+                <a:ea typeface="Calibri" pitchFamily="34" charset="-122"/>
+                <a:cs typeface="Calibri" pitchFamily="34" charset="-120"/>
+              </a:rPr>
+              <a:t>API GW + S3</a:t>
+            </a:r>
+            <a:endParaRPr lang="en-US" sz="1450" dirty="0"/>
+          </a:p>
+        </p:txBody>
+      </p:sp>
+      <p:sp>
+        <p:nvSpPr>
+          <p:cNvPr id="30" name="Text 28"/>
+          <p:cNvSpPr/>
+          <p:nvPr/>
+        </p:nvSpPr>
+        <p:spPr>
+          <a:xfrm>
+            <a:off x="640080" y="4251960"/>
+            <a:ext cx="2286000" cy="411480"/>
+          </a:xfrm>
+          <a:prstGeom prst="rect">
+            <a:avLst/>
+          </a:prstGeom>
+          <a:noFill/>
+          <a:ln/>
+        </p:spPr>
+        <p:txBody>
+          <a:bodyPr wrap="square" lIns="0" tIns="0" rIns="0" bIns="0" rtlCol="0" anchor="t"/>
+          <a:lstStyle/>
+          <a:p>
+            <a:pPr algn="ctr" indent="0" marL="0">
+              <a:buNone/>
+            </a:pPr>
+            <a:r>
+              <a:rPr lang="en-US" sz="1050" dirty="0">
+                <a:solidFill>
+                  <a:srgbClr val="606E50"/>
+                </a:solidFill>
+                <a:latin typeface="Calibri" pitchFamily="34" charset="0"/>
+                <a:ea typeface="Calibri" pitchFamily="34" charset="-122"/>
+                <a:cs typeface="Calibri" pitchFamily="34" charset="-120"/>
+              </a:rPr>
+              <a:t>reserve dashboard</a:t>
+            </a:r>
+            <a:endParaRPr lang="en-US" sz="1050" dirty="0"/>
+          </a:p>
+        </p:txBody>
+      </p:sp>
+      <p:sp>
+        <p:nvSpPr>
+          <p:cNvPr id="31" name="Shape 29"/>
+          <p:cNvSpPr/>
+          <p:nvPr/>
+        </p:nvSpPr>
+        <p:spPr>
+          <a:xfrm>
+            <a:off x="10378440" y="3154680"/>
+            <a:ext cx="0" cy="365760"/>
           </a:xfrm>
           <a:prstGeom prst="line">
             <a:avLst/>
@@ -1721,813 +2485,14 @@
       </p:sp>
       <p:sp>
         <p:nvSpPr>
-          <p:cNvPr id="8" name="Shape 6"/>
-          <p:cNvSpPr/>
-          <p:nvPr/>
-        </p:nvSpPr>
-        <p:spPr>
-          <a:xfrm>
-            <a:off x="2507833" y="2468880"/>
-            <a:ext cx="1572768" cy="1371600"/>
-          </a:xfrm>
-          <a:prstGeom prst="roundRect">
-            <a:avLst>
-              <a:gd name="adj" fmla="val 6667"/>
-            </a:avLst>
-          </a:prstGeom>
-          <a:solidFill>
-            <a:srgbClr val="EFF3E9"/>
-          </a:solidFill>
-          <a:ln w="19050">
-            <a:solidFill>
-              <a:srgbClr val="8CA85E"/>
-            </a:solidFill>
-            <a:prstDash val="solid"/>
-          </a:ln>
-        </p:spPr>
-      </p:sp>
-      <p:sp>
-        <p:nvSpPr>
-          <p:cNvPr id="9" name="Shape 7"/>
-          <p:cNvSpPr/>
-          <p:nvPr/>
-        </p:nvSpPr>
-        <p:spPr>
-          <a:xfrm>
-            <a:off x="3193633" y="2670048"/>
-            <a:ext cx="201168" cy="201168"/>
-          </a:xfrm>
-          <a:prstGeom prst="ellipse">
-            <a:avLst/>
-          </a:prstGeom>
-          <a:solidFill>
-            <a:srgbClr val="8CA85E"/>
-          </a:solidFill>
-          <a:ln/>
-        </p:spPr>
-      </p:sp>
-      <p:sp>
-        <p:nvSpPr>
-          <p:cNvPr id="10" name="Text 8"/>
-          <p:cNvSpPr/>
-          <p:nvPr/>
-        </p:nvSpPr>
-        <p:spPr>
-          <a:xfrm>
-            <a:off x="2462113" y="2926080"/>
-            <a:ext cx="1664208" cy="411480"/>
-          </a:xfrm>
-          <a:prstGeom prst="rect">
-            <a:avLst/>
-          </a:prstGeom>
-          <a:noFill/>
-          <a:ln/>
-        </p:spPr>
-        <p:txBody>
-          <a:bodyPr wrap="square" lIns="0" tIns="0" rIns="0" bIns="0" rtlCol="0" anchor="ctr"/>
-          <a:lstStyle/>
-          <a:p>
-            <a:pPr algn="ctr" indent="0" marL="0">
-              <a:buNone/>
-            </a:pPr>
-            <a:r>
-              <a:rPr lang="en-US" sz="1450" b="1" dirty="0">
-                <a:solidFill>
-                  <a:srgbClr val="1C2617"/>
-                </a:solidFill>
-                <a:latin typeface="Calibri" pitchFamily="34" charset="0"/>
-                <a:ea typeface="Calibri" pitchFamily="34" charset="-122"/>
-                <a:cs typeface="Calibri" pitchFamily="34" charset="-120"/>
-              </a:rPr>
-              <a:t>Fog node (EC2)</a:t>
-            </a:r>
-            <a:endParaRPr lang="en-US" sz="1450" dirty="0"/>
-          </a:p>
-        </p:txBody>
-      </p:sp>
-      <p:sp>
-        <p:nvSpPr>
-          <p:cNvPr id="11" name="Text 9"/>
-          <p:cNvSpPr/>
-          <p:nvPr/>
-        </p:nvSpPr>
-        <p:spPr>
-          <a:xfrm>
-            <a:off x="2489545" y="3310128"/>
-            <a:ext cx="1609344" cy="457200"/>
-          </a:xfrm>
-          <a:prstGeom prst="rect">
-            <a:avLst/>
-          </a:prstGeom>
-          <a:noFill/>
-          <a:ln/>
-        </p:spPr>
-        <p:txBody>
-          <a:bodyPr wrap="square" lIns="0" tIns="0" rIns="0" bIns="0" rtlCol="0" anchor="t"/>
-          <a:lstStyle/>
-          <a:p>
-            <a:pPr algn="ctr" indent="0" marL="0">
-              <a:buNone/>
-            </a:pPr>
-            <a:r>
-              <a:rPr lang="en-US" sz="1050" dirty="0">
-                <a:solidFill>
-                  <a:srgbClr val="606E50"/>
-                </a:solidFill>
-                <a:latin typeface="Calibri" pitchFamily="34" charset="0"/>
-                <a:ea typeface="Calibri" pitchFamily="34" charset="-122"/>
-                <a:cs typeface="Calibri" pitchFamily="34" charset="-120"/>
-              </a:rPr>
-              <a:t>window · aggregate · alert</a:t>
-            </a:r>
-            <a:endParaRPr lang="en-US" sz="1050" dirty="0"/>
-          </a:p>
-        </p:txBody>
-      </p:sp>
-      <p:sp>
-        <p:nvSpPr>
-          <p:cNvPr id="12" name="Shape 10"/>
-          <p:cNvSpPr/>
-          <p:nvPr/>
-        </p:nvSpPr>
-        <p:spPr>
-          <a:xfrm>
-            <a:off x="4098889" y="3154680"/>
-            <a:ext cx="258409" cy="0"/>
-          </a:xfrm>
-          <a:prstGeom prst="line">
-            <a:avLst/>
-          </a:prstGeom>
-          <a:noFill/>
-          <a:ln w="25400">
-            <a:solidFill>
-              <a:srgbClr val="8CA85E"/>
-            </a:solidFill>
-            <a:prstDash val="solid"/>
-            <a:tailEnd type="triangle"/>
-          </a:ln>
-        </p:spPr>
-      </p:sp>
-      <p:sp>
-        <p:nvSpPr>
-          <p:cNvPr id="13" name="Shape 11"/>
-          <p:cNvSpPr/>
-          <p:nvPr/>
-        </p:nvSpPr>
-        <p:spPr>
-          <a:xfrm>
-            <a:off x="4375587" y="2468880"/>
-            <a:ext cx="1572768" cy="1371600"/>
-          </a:xfrm>
-          <a:prstGeom prst="roundRect">
-            <a:avLst>
-              <a:gd name="adj" fmla="val 6667"/>
-            </a:avLst>
-          </a:prstGeom>
-          <a:solidFill>
-            <a:srgbClr val="EFF3E9"/>
-          </a:solidFill>
-          <a:ln w="19050">
-            <a:solidFill>
-              <a:srgbClr val="4B6B2A"/>
-            </a:solidFill>
-            <a:prstDash val="solid"/>
-          </a:ln>
-        </p:spPr>
-      </p:sp>
-      <p:sp>
-        <p:nvSpPr>
-          <p:cNvPr id="14" name="Shape 12"/>
-          <p:cNvSpPr/>
-          <p:nvPr/>
-        </p:nvSpPr>
-        <p:spPr>
-          <a:xfrm>
-            <a:off x="5061387" y="2670048"/>
-            <a:ext cx="201168" cy="201168"/>
-          </a:xfrm>
-          <a:prstGeom prst="ellipse">
-            <a:avLst/>
-          </a:prstGeom>
-          <a:solidFill>
-            <a:srgbClr val="4B6B2A"/>
-          </a:solidFill>
-          <a:ln/>
-        </p:spPr>
-      </p:sp>
-      <p:sp>
-        <p:nvSpPr>
-          <p:cNvPr id="15" name="Text 13"/>
-          <p:cNvSpPr/>
-          <p:nvPr/>
-        </p:nvSpPr>
-        <p:spPr>
-          <a:xfrm>
-            <a:off x="4329867" y="2926080"/>
-            <a:ext cx="1664208" cy="411480"/>
-          </a:xfrm>
-          <a:prstGeom prst="rect">
-            <a:avLst/>
-          </a:prstGeom>
-          <a:noFill/>
-          <a:ln/>
-        </p:spPr>
-        <p:txBody>
-          <a:bodyPr wrap="square" lIns="0" tIns="0" rIns="0" bIns="0" rtlCol="0" anchor="ctr"/>
-          <a:lstStyle/>
-          <a:p>
-            <a:pPr algn="ctr" indent="0" marL="0">
-              <a:buNone/>
-            </a:pPr>
-            <a:r>
-              <a:rPr lang="en-US" sz="1450" b="1" dirty="0">
-                <a:solidFill>
-                  <a:srgbClr val="1C2617"/>
-                </a:solidFill>
-                <a:latin typeface="Calibri" pitchFamily="34" charset="0"/>
-                <a:ea typeface="Calibri" pitchFamily="34" charset="-122"/>
-                <a:cs typeface="Calibri" pitchFamily="34" charset="-120"/>
-              </a:rPr>
-              <a:t>Amazon SQS</a:t>
-            </a:r>
-            <a:endParaRPr lang="en-US" sz="1450" dirty="0"/>
-          </a:p>
-        </p:txBody>
-      </p:sp>
-      <p:sp>
-        <p:nvSpPr>
-          <p:cNvPr id="16" name="Text 14"/>
-          <p:cNvSpPr/>
-          <p:nvPr/>
-        </p:nvSpPr>
-        <p:spPr>
-          <a:xfrm>
-            <a:off x="4357299" y="3310128"/>
-            <a:ext cx="1609344" cy="457200"/>
-          </a:xfrm>
-          <a:prstGeom prst="rect">
-            <a:avLst/>
-          </a:prstGeom>
-          <a:noFill/>
-          <a:ln/>
-        </p:spPr>
-        <p:txBody>
-          <a:bodyPr wrap="square" lIns="0" tIns="0" rIns="0" bIns="0" rtlCol="0" anchor="t"/>
-          <a:lstStyle/>
-          <a:p>
-            <a:pPr algn="ctr" indent="0" marL="0">
-              <a:buNone/>
-            </a:pPr>
-            <a:r>
-              <a:rPr lang="en-US" sz="1050" dirty="0">
-                <a:solidFill>
-                  <a:srgbClr val="606E50"/>
-                </a:solidFill>
-                <a:latin typeface="Calibri" pitchFamily="34" charset="0"/>
-                <a:ea typeface="Calibri" pitchFamily="34" charset="-122"/>
-                <a:cs typeface="Calibri" pitchFamily="34" charset="-120"/>
-              </a:rPr>
-              <a:t>aggregate queue</a:t>
-            </a:r>
-            <a:endParaRPr lang="en-US" sz="1050" dirty="0"/>
-          </a:p>
-        </p:txBody>
-      </p:sp>
-      <p:sp>
-        <p:nvSpPr>
-          <p:cNvPr id="17" name="Shape 15"/>
-          <p:cNvSpPr/>
-          <p:nvPr/>
-        </p:nvSpPr>
-        <p:spPr>
-          <a:xfrm>
-            <a:off x="5966643" y="3154680"/>
-            <a:ext cx="258409" cy="0"/>
-          </a:xfrm>
-          <a:prstGeom prst="line">
-            <a:avLst/>
-          </a:prstGeom>
-          <a:noFill/>
-          <a:ln w="25400">
-            <a:solidFill>
-              <a:srgbClr val="8CA85E"/>
-            </a:solidFill>
-            <a:prstDash val="solid"/>
-            <a:tailEnd type="triangle"/>
-          </a:ln>
-        </p:spPr>
-      </p:sp>
-      <p:sp>
-        <p:nvSpPr>
-          <p:cNvPr id="18" name="Shape 16"/>
-          <p:cNvSpPr/>
-          <p:nvPr/>
-        </p:nvSpPr>
-        <p:spPr>
-          <a:xfrm>
-            <a:off x="6243340" y="2468880"/>
-            <a:ext cx="1572768" cy="1371600"/>
-          </a:xfrm>
-          <a:prstGeom prst="roundRect">
-            <a:avLst>
-              <a:gd name="adj" fmla="val 6667"/>
-            </a:avLst>
-          </a:prstGeom>
-          <a:solidFill>
-            <a:srgbClr val="EFF3E9"/>
-          </a:solidFill>
-          <a:ln w="19050">
-            <a:solidFill>
-              <a:srgbClr val="4B6B2A"/>
-            </a:solidFill>
-            <a:prstDash val="solid"/>
-          </a:ln>
-        </p:spPr>
-      </p:sp>
-      <p:sp>
-        <p:nvSpPr>
-          <p:cNvPr id="19" name="Shape 17"/>
-          <p:cNvSpPr/>
-          <p:nvPr/>
-        </p:nvSpPr>
-        <p:spPr>
-          <a:xfrm>
-            <a:off x="6929140" y="2670048"/>
-            <a:ext cx="201168" cy="201168"/>
-          </a:xfrm>
-          <a:prstGeom prst="ellipse">
-            <a:avLst/>
-          </a:prstGeom>
-          <a:solidFill>
-            <a:srgbClr val="4B6B2A"/>
-          </a:solidFill>
-          <a:ln/>
-        </p:spPr>
-      </p:sp>
-      <p:sp>
-        <p:nvSpPr>
-          <p:cNvPr id="20" name="Text 18"/>
-          <p:cNvSpPr/>
-          <p:nvPr/>
-        </p:nvSpPr>
-        <p:spPr>
-          <a:xfrm>
-            <a:off x="6197620" y="2926080"/>
-            <a:ext cx="1664208" cy="411480"/>
-          </a:xfrm>
-          <a:prstGeom prst="rect">
-            <a:avLst/>
-          </a:prstGeom>
-          <a:noFill/>
-          <a:ln/>
-        </p:spPr>
-        <p:txBody>
-          <a:bodyPr wrap="square" lIns="0" tIns="0" rIns="0" bIns="0" rtlCol="0" anchor="ctr"/>
-          <a:lstStyle/>
-          <a:p>
-            <a:pPr algn="ctr" indent="0" marL="0">
-              <a:buNone/>
-            </a:pPr>
-            <a:r>
-              <a:rPr lang="en-US" sz="1450" b="1" dirty="0">
-                <a:solidFill>
-                  <a:srgbClr val="1C2617"/>
-                </a:solidFill>
-                <a:latin typeface="Calibri" pitchFamily="34" charset="0"/>
-                <a:ea typeface="Calibri" pitchFamily="34" charset="-122"/>
-                <a:cs typeface="Calibri" pitchFamily="34" charset="-120"/>
-              </a:rPr>
-              <a:t>AWS Lambda</a:t>
-            </a:r>
-            <a:endParaRPr lang="en-US" sz="1450" dirty="0"/>
-          </a:p>
-        </p:txBody>
-      </p:sp>
-      <p:sp>
-        <p:nvSpPr>
-          <p:cNvPr id="21" name="Text 19"/>
-          <p:cNvSpPr/>
-          <p:nvPr/>
-        </p:nvSpPr>
-        <p:spPr>
-          <a:xfrm>
-            <a:off x="6225052" y="3310128"/>
-            <a:ext cx="1609344" cy="457200"/>
-          </a:xfrm>
-          <a:prstGeom prst="rect">
-            <a:avLst/>
-          </a:prstGeom>
-          <a:noFill/>
-          <a:ln/>
-        </p:spPr>
-        <p:txBody>
-          <a:bodyPr wrap="square" lIns="0" tIns="0" rIns="0" bIns="0" rtlCol="0" anchor="t"/>
-          <a:lstStyle/>
-          <a:p>
-            <a:pPr algn="ctr" indent="0" marL="0">
-              <a:buNone/>
-            </a:pPr>
-            <a:r>
-              <a:rPr lang="en-US" sz="1050" dirty="0">
-                <a:solidFill>
-                  <a:srgbClr val="606E50"/>
-                </a:solidFill>
-                <a:latin typeface="Calibri" pitchFamily="34" charset="0"/>
-                <a:ea typeface="Calibri" pitchFamily="34" charset="-122"/>
-                <a:cs typeface="Calibri" pitchFamily="34" charset="-120"/>
-              </a:rPr>
-              <a:t>java17 ingest</a:t>
-            </a:r>
-            <a:endParaRPr lang="en-US" sz="1050" dirty="0"/>
-          </a:p>
-        </p:txBody>
-      </p:sp>
-      <p:sp>
-        <p:nvSpPr>
-          <p:cNvPr id="22" name="Shape 20"/>
-          <p:cNvSpPr/>
-          <p:nvPr/>
-        </p:nvSpPr>
-        <p:spPr>
-          <a:xfrm>
-            <a:off x="7834396" y="3154680"/>
-            <a:ext cx="258409" cy="0"/>
-          </a:xfrm>
-          <a:prstGeom prst="line">
-            <a:avLst/>
-          </a:prstGeom>
-          <a:noFill/>
-          <a:ln w="25400">
-            <a:solidFill>
-              <a:srgbClr val="8CA85E"/>
-            </a:solidFill>
-            <a:prstDash val="solid"/>
-            <a:tailEnd type="triangle"/>
-          </a:ln>
-        </p:spPr>
-      </p:sp>
-      <p:sp>
-        <p:nvSpPr>
-          <p:cNvPr id="23" name="Shape 21"/>
-          <p:cNvSpPr/>
-          <p:nvPr/>
-        </p:nvSpPr>
-        <p:spPr>
-          <a:xfrm>
-            <a:off x="8111094" y="2468880"/>
-            <a:ext cx="1572768" cy="1371600"/>
-          </a:xfrm>
-          <a:prstGeom prst="roundRect">
-            <a:avLst>
-              <a:gd name="adj" fmla="val 6667"/>
-            </a:avLst>
-          </a:prstGeom>
-          <a:solidFill>
-            <a:srgbClr val="EFF3E9"/>
-          </a:solidFill>
-          <a:ln w="19050">
-            <a:solidFill>
-              <a:srgbClr val="4B6B2A"/>
-            </a:solidFill>
-            <a:prstDash val="solid"/>
-          </a:ln>
-        </p:spPr>
-      </p:sp>
-      <p:sp>
-        <p:nvSpPr>
-          <p:cNvPr id="24" name="Shape 22"/>
-          <p:cNvSpPr/>
-          <p:nvPr/>
-        </p:nvSpPr>
-        <p:spPr>
-          <a:xfrm>
-            <a:off x="8796894" y="2670048"/>
-            <a:ext cx="201168" cy="201168"/>
-          </a:xfrm>
-          <a:prstGeom prst="ellipse">
-            <a:avLst/>
-          </a:prstGeom>
-          <a:solidFill>
-            <a:srgbClr val="4B6B2A"/>
-          </a:solidFill>
-          <a:ln/>
-        </p:spPr>
-      </p:sp>
-      <p:sp>
-        <p:nvSpPr>
-          <p:cNvPr id="25" name="Text 23"/>
-          <p:cNvSpPr/>
-          <p:nvPr/>
-        </p:nvSpPr>
-        <p:spPr>
-          <a:xfrm>
-            <a:off x="8065374" y="2926080"/>
-            <a:ext cx="1664208" cy="411480"/>
-          </a:xfrm>
-          <a:prstGeom prst="rect">
-            <a:avLst/>
-          </a:prstGeom>
-          <a:noFill/>
-          <a:ln/>
-        </p:spPr>
-        <p:txBody>
-          <a:bodyPr wrap="square" lIns="0" tIns="0" rIns="0" bIns="0" rtlCol="0" anchor="ctr"/>
-          <a:lstStyle/>
-          <a:p>
-            <a:pPr algn="ctr" indent="0" marL="0">
-              <a:buNone/>
-            </a:pPr>
-            <a:r>
-              <a:rPr lang="en-US" sz="1450" b="1" dirty="0">
-                <a:solidFill>
-                  <a:srgbClr val="1C2617"/>
-                </a:solidFill>
-                <a:latin typeface="Calibri" pitchFamily="34" charset="0"/>
-                <a:ea typeface="Calibri" pitchFamily="34" charset="-122"/>
-                <a:cs typeface="Calibri" pitchFamily="34" charset="-120"/>
-              </a:rPr>
-              <a:t>DynamoDB</a:t>
-            </a:r>
-            <a:endParaRPr lang="en-US" sz="1450" dirty="0"/>
-          </a:p>
-        </p:txBody>
-      </p:sp>
-      <p:sp>
-        <p:nvSpPr>
-          <p:cNvPr id="26" name="Text 24"/>
-          <p:cNvSpPr/>
-          <p:nvPr/>
-        </p:nvSpPr>
-        <p:spPr>
-          <a:xfrm>
-            <a:off x="8092806" y="3310128"/>
-            <a:ext cx="1609344" cy="457200"/>
-          </a:xfrm>
-          <a:prstGeom prst="rect">
-            <a:avLst/>
-          </a:prstGeom>
-          <a:noFill/>
-          <a:ln/>
-        </p:spPr>
-        <p:txBody>
-          <a:bodyPr wrap="square" lIns="0" tIns="0" rIns="0" bIns="0" rtlCol="0" anchor="t"/>
-          <a:lstStyle/>
-          <a:p>
-            <a:pPr algn="ctr" indent="0" marL="0">
-              <a:buNone/>
-            </a:pPr>
-            <a:r>
-              <a:rPr lang="en-US" sz="1050" dirty="0">
-                <a:solidFill>
-                  <a:srgbClr val="606E50"/>
-                </a:solidFill>
-                <a:latin typeface="Calibri" pitchFamily="34" charset="0"/>
-                <a:ea typeface="Calibri" pitchFamily="34" charset="-122"/>
-                <a:cs typeface="Calibri" pitchFamily="34" charset="-120"/>
-              </a:rPr>
-              <a:t>readings store</a:t>
-            </a:r>
-            <a:endParaRPr lang="en-US" sz="1050" dirty="0"/>
-          </a:p>
-        </p:txBody>
-      </p:sp>
-      <p:sp>
-        <p:nvSpPr>
-          <p:cNvPr id="27" name="Shape 25"/>
-          <p:cNvSpPr/>
-          <p:nvPr/>
-        </p:nvSpPr>
-        <p:spPr>
-          <a:xfrm>
-            <a:off x="9702150" y="3154680"/>
-            <a:ext cx="258409" cy="0"/>
-          </a:xfrm>
-          <a:prstGeom prst="line">
-            <a:avLst/>
-          </a:prstGeom>
-          <a:noFill/>
-          <a:ln w="25400">
-            <a:solidFill>
-              <a:srgbClr val="8CA85E"/>
-            </a:solidFill>
-            <a:prstDash val="solid"/>
-            <a:tailEnd type="triangle"/>
-          </a:ln>
-        </p:spPr>
-      </p:sp>
-      <p:sp>
-        <p:nvSpPr>
-          <p:cNvPr id="28" name="Shape 26"/>
-          <p:cNvSpPr/>
-          <p:nvPr/>
-        </p:nvSpPr>
-        <p:spPr>
-          <a:xfrm>
-            <a:off x="9978847" y="2468880"/>
-            <a:ext cx="1572768" cy="1371600"/>
-          </a:xfrm>
-          <a:prstGeom prst="roundRect">
-            <a:avLst>
-              <a:gd name="adj" fmla="val 6667"/>
-            </a:avLst>
-          </a:prstGeom>
-          <a:solidFill>
-            <a:srgbClr val="EFF3E9"/>
-          </a:solidFill>
-          <a:ln w="19050">
-            <a:solidFill>
-              <a:srgbClr val="6A8F3C"/>
-            </a:solidFill>
-            <a:prstDash val="solid"/>
-          </a:ln>
-        </p:spPr>
-      </p:sp>
-      <p:sp>
-        <p:nvSpPr>
-          <p:cNvPr id="29" name="Shape 27"/>
-          <p:cNvSpPr/>
-          <p:nvPr/>
-        </p:nvSpPr>
-        <p:spPr>
-          <a:xfrm>
-            <a:off x="10664647" y="2670048"/>
-            <a:ext cx="201168" cy="201168"/>
-          </a:xfrm>
-          <a:prstGeom prst="ellipse">
-            <a:avLst/>
-          </a:prstGeom>
-          <a:solidFill>
-            <a:srgbClr val="6A8F3C"/>
-          </a:solidFill>
-          <a:ln/>
-        </p:spPr>
-      </p:sp>
-      <p:sp>
-        <p:nvSpPr>
-          <p:cNvPr id="30" name="Text 28"/>
-          <p:cNvSpPr/>
-          <p:nvPr/>
-        </p:nvSpPr>
-        <p:spPr>
-          <a:xfrm>
-            <a:off x="9933127" y="2926080"/>
-            <a:ext cx="1664208" cy="411480"/>
-          </a:xfrm>
-          <a:prstGeom prst="rect">
-            <a:avLst/>
-          </a:prstGeom>
-          <a:noFill/>
-          <a:ln/>
-        </p:spPr>
-        <p:txBody>
-          <a:bodyPr wrap="square" lIns="0" tIns="0" rIns="0" bIns="0" rtlCol="0" anchor="ctr"/>
-          <a:lstStyle/>
-          <a:p>
-            <a:pPr algn="ctr" indent="0" marL="0">
-              <a:buNone/>
-            </a:pPr>
-            <a:r>
-              <a:rPr lang="en-US" sz="1450" b="1" dirty="0">
-                <a:solidFill>
-                  <a:srgbClr val="1C2617"/>
-                </a:solidFill>
-                <a:latin typeface="Calibri" pitchFamily="34" charset="0"/>
-                <a:ea typeface="Calibri" pitchFamily="34" charset="-122"/>
-                <a:cs typeface="Calibri" pitchFamily="34" charset="-120"/>
-              </a:rPr>
-              <a:t>API GW + S3</a:t>
-            </a:r>
-            <a:endParaRPr lang="en-US" sz="1450" dirty="0"/>
-          </a:p>
-        </p:txBody>
-      </p:sp>
-      <p:sp>
-        <p:nvSpPr>
-          <p:cNvPr id="31" name="Text 29"/>
-          <p:cNvSpPr/>
-          <p:nvPr/>
-        </p:nvSpPr>
-        <p:spPr>
-          <a:xfrm>
-            <a:off x="9960559" y="3310128"/>
-            <a:ext cx="1609344" cy="457200"/>
-          </a:xfrm>
-          <a:prstGeom prst="rect">
-            <a:avLst/>
-          </a:prstGeom>
-          <a:noFill/>
-          <a:ln/>
-        </p:spPr>
-        <p:txBody>
-          <a:bodyPr wrap="square" lIns="0" tIns="0" rIns="0" bIns="0" rtlCol="0" anchor="t"/>
-          <a:lstStyle/>
-          <a:p>
-            <a:pPr algn="ctr" indent="0" marL="0">
-              <a:buNone/>
-            </a:pPr>
-            <a:r>
-              <a:rPr lang="en-US" sz="1050" dirty="0">
-                <a:solidFill>
-                  <a:srgbClr val="606E50"/>
-                </a:solidFill>
-                <a:latin typeface="Calibri" pitchFamily="34" charset="0"/>
-                <a:ea typeface="Calibri" pitchFamily="34" charset="-122"/>
-                <a:cs typeface="Calibri" pitchFamily="34" charset="-120"/>
-              </a:rPr>
-              <a:t>reserve dashboard</a:t>
-            </a:r>
-            <a:endParaRPr lang="en-US" sz="1050" dirty="0"/>
-          </a:p>
-        </p:txBody>
-      </p:sp>
-      <p:sp>
-        <p:nvSpPr>
           <p:cNvPr id="32" name="Text 30"/>
           <p:cNvSpPr/>
           <p:nvPr/>
         </p:nvSpPr>
         <p:spPr>
           <a:xfrm>
-            <a:off x="640080" y="3977640"/>
-            <a:ext cx="3440521" cy="274320"/>
-          </a:xfrm>
-          <a:prstGeom prst="rect">
-            <a:avLst/>
-          </a:prstGeom>
-          <a:noFill/>
-          <a:ln/>
-        </p:spPr>
-        <p:txBody>
-          <a:bodyPr wrap="square" rtlCol="0" anchor="ctr"/>
-          <a:lstStyle/>
-          <a:p>
-            <a:pPr algn="ctr" indent="0" marL="0">
-              <a:buNone/>
-            </a:pPr>
-            <a:r>
-              <a:rPr lang="en-US" sz="1100" b="1" spc="200" kern="0" dirty="0">
-                <a:solidFill>
-                  <a:srgbClr val="8CA85E"/>
-                </a:solidFill>
-                <a:latin typeface="Calibri" pitchFamily="34" charset="0"/>
-                <a:ea typeface="Calibri" pitchFamily="34" charset="-122"/>
-                <a:cs typeface="Calibri" pitchFamily="34" charset="-120"/>
-              </a:rPr>
-              <a:t>EDGE</a:t>
-            </a:r>
-            <a:endParaRPr lang="en-US" sz="1100" dirty="0"/>
-          </a:p>
-        </p:txBody>
-      </p:sp>
-      <p:sp>
-        <p:nvSpPr>
-          <p:cNvPr id="33" name="Text 31"/>
-          <p:cNvSpPr/>
-          <p:nvPr/>
-        </p:nvSpPr>
-        <p:spPr>
-          <a:xfrm>
-            <a:off x="4375587" y="3977640"/>
-            <a:ext cx="7176028" cy="274320"/>
-          </a:xfrm>
-          <a:prstGeom prst="rect">
-            <a:avLst/>
-          </a:prstGeom>
-          <a:noFill/>
-          <a:ln/>
-        </p:spPr>
-        <p:txBody>
-          <a:bodyPr wrap="square" rtlCol="0" anchor="ctr"/>
-          <a:lstStyle/>
-          <a:p>
-            <a:pPr algn="ctr" indent="0" marL="0">
-              <a:buNone/>
-            </a:pPr>
-            <a:r>
-              <a:rPr lang="en-US" sz="1100" b="1" spc="200" kern="0" dirty="0">
-                <a:solidFill>
-                  <a:srgbClr val="4B6B2A"/>
-                </a:solidFill>
-                <a:latin typeface="Calibri" pitchFamily="34" charset="0"/>
-                <a:ea typeface="Calibri" pitchFamily="34" charset="-122"/>
-                <a:cs typeface="Calibri" pitchFamily="34" charset="-120"/>
-              </a:rPr>
-              <a:t>CLOUD</a:t>
-            </a:r>
-            <a:endParaRPr lang="en-US" sz="1100" dirty="0"/>
-          </a:p>
-        </p:txBody>
-      </p:sp>
-      <p:sp>
-        <p:nvSpPr>
-          <p:cNvPr id="34" name="Text 32"/>
-          <p:cNvSpPr/>
-          <p:nvPr/>
-        </p:nvSpPr>
-        <p:spPr>
-          <a:xfrm>
-            <a:off x="640080" y="5212080"/>
-            <a:ext cx="10972800" cy="640080"/>
+            <a:off x="640080" y="5257800"/>
+            <a:ext cx="10972800" cy="731520"/>
           </a:xfrm>
           <a:prstGeom prst="rect">
             <a:avLst/>
@@ -2675,8 +2640,35 @@
         </p:nvSpPr>
         <p:spPr>
           <a:xfrm>
-            <a:off x="731520" y="1965960"/>
-            <a:ext cx="685800" cy="685800"/>
+            <a:off x="640080" y="1874520"/>
+            <a:ext cx="3502152" cy="3657600"/>
+          </a:xfrm>
+          <a:prstGeom prst="roundRect">
+            <a:avLst>
+              <a:gd name="adj" fmla="val 2611"/>
+            </a:avLst>
+          </a:prstGeom>
+          <a:solidFill>
+            <a:srgbClr val="EFF3E9"/>
+          </a:solidFill>
+          <a:ln w="15240">
+            <a:solidFill>
+              <a:srgbClr val="6A8F3C"/>
+            </a:solidFill>
+            <a:prstDash val="solid"/>
+          </a:ln>
+        </p:spPr>
+      </p:sp>
+      <p:sp>
+        <p:nvSpPr>
+          <p:cNvPr id="5" name="Shape 3"/>
+          <p:cNvSpPr/>
+          <p:nvPr/>
+        </p:nvSpPr>
+        <p:spPr>
+          <a:xfrm>
+            <a:off x="914400" y="2194560"/>
+            <a:ext cx="640080" cy="640080"/>
           </a:xfrm>
           <a:prstGeom prst="ellipse">
             <a:avLst/>
@@ -2689,14 +2681,14 @@
       </p:sp>
       <p:sp>
         <p:nvSpPr>
-          <p:cNvPr id="5" name="Text 3"/>
-          <p:cNvSpPr/>
-          <p:nvPr/>
-        </p:nvSpPr>
-        <p:spPr>
-          <a:xfrm>
-            <a:off x="731520" y="1965960"/>
-            <a:ext cx="685800" cy="685800"/>
+          <p:cNvPr id="6" name="Text 4"/>
+          <p:cNvSpPr/>
+          <p:nvPr/>
+        </p:nvSpPr>
+        <p:spPr>
+          <a:xfrm>
+            <a:off x="914400" y="2194560"/>
+            <a:ext cx="640080" cy="640080"/>
           </a:xfrm>
           <a:prstGeom prst="rect">
             <a:avLst/>
@@ -2712,7 +2704,7 @@
               <a:buNone/>
             </a:pPr>
             <a:r>
-              <a:rPr lang="en-US" sz="2600" b="1" dirty="0">
+              <a:rPr lang="en-US" sz="2400" b="1" dirty="0">
                 <a:solidFill>
                   <a:srgbClr val="FFFFFF"/>
                 </a:solidFill>
@@ -2722,20 +2714,20 @@
               </a:rPr>
               <a:t>1</a:t>
             </a:r>
-            <a:endParaRPr lang="en-US" sz="2600" dirty="0"/>
-          </a:p>
-        </p:txBody>
-      </p:sp>
-      <p:sp>
-        <p:nvSpPr>
-          <p:cNvPr id="6" name="Text 4"/>
-          <p:cNvSpPr/>
-          <p:nvPr/>
-        </p:nvSpPr>
-        <p:spPr>
-          <a:xfrm>
-            <a:off x="1691640" y="1920240"/>
-            <a:ext cx="9875520" cy="411480"/>
+            <a:endParaRPr lang="en-US" sz="2400" dirty="0"/>
+          </a:p>
+        </p:txBody>
+      </p:sp>
+      <p:sp>
+        <p:nvSpPr>
+          <p:cNvPr id="7" name="Text 5"/>
+          <p:cNvSpPr/>
+          <p:nvPr/>
+        </p:nvSpPr>
+        <p:spPr>
+          <a:xfrm>
+            <a:off x="914400" y="3017520"/>
+            <a:ext cx="2953512" cy="822960"/>
           </a:xfrm>
           <a:prstGeom prst="rect">
             <a:avLst/>
@@ -2751,7 +2743,7 @@
               <a:buNone/>
             </a:pPr>
             <a:r>
-              <a:rPr lang="en-US" sz="1800" b="1" dirty="0">
+              <a:rPr lang="en-US" sz="1700" b="1" dirty="0">
                 <a:solidFill>
                   <a:srgbClr val="1C2617"/>
                 </a:solidFill>
@@ -2759,22 +2751,22 @@
                 <a:ea typeface="Calibri" pitchFamily="34" charset="-122"/>
                 <a:cs typeface="Calibri" pitchFamily="34" charset="-120"/>
               </a:rPr>
-              <a:t>Pipeline health, all green</a:t>
-            </a:r>
-            <a:endParaRPr lang="en-US" sz="1800" dirty="0"/>
-          </a:p>
-        </p:txBody>
-      </p:sp>
-      <p:sp>
-        <p:nvSpPr>
-          <p:cNvPr id="7" name="Text 5"/>
-          <p:cNvSpPr/>
-          <p:nvPr/>
-        </p:nvSpPr>
-        <p:spPr>
-          <a:xfrm>
-            <a:off x="1691640" y="2340864"/>
-            <a:ext cx="9875520" cy="640080"/>
+              <a:t>Two reserves, side by side</a:t>
+            </a:r>
+            <a:endParaRPr lang="en-US" sz="1700" dirty="0"/>
+          </a:p>
+        </p:txBody>
+      </p:sp>
+      <p:sp>
+        <p:nvSpPr>
+          <p:cNvPr id="8" name="Text 6"/>
+          <p:cNvSpPr/>
+          <p:nvPr/>
+        </p:nvSpPr>
+        <p:spPr>
+          <a:xfrm>
+            <a:off x="914400" y="3794760"/>
+            <a:ext cx="2953512" cy="1554480"/>
           </a:xfrm>
           <a:prstGeom prst="rect">
             <a:avLst/>
@@ -2787,10 +2779,13 @@
           <a:lstStyle/>
           <a:p>
             <a:pPr indent="0" marL="0">
-              <a:buNone/>
-            </a:pPr>
-            <a:r>
-              <a:rPr lang="en-US" sz="1350" dirty="0">
+              <a:lnSpc>
+                <a:spcPct val="105000"/>
+              </a:lnSpc>
+              <a:buNone/>
+            </a:pPr>
+            <a:r>
+              <a:rPr lang="en-US" sz="1300" dirty="0">
                 <a:solidFill>
                   <a:srgbClr val="606E50"/>
                 </a:solidFill>
@@ -2798,22 +2793,49 @@
                 <a:ea typeface="Calibri" pitchFamily="34" charset="-122"/>
                 <a:cs typeface="Calibri" pitchFamily="34" charset="-120"/>
               </a:rPr>
-              <a:t>Four of four checks true: gateway, queue, Lambda, pipeline, freshest reading under six seconds old.</a:t>
-            </a:r>
-            <a:endParaRPr lang="en-US" sz="1350" dirty="0"/>
-          </a:p>
-        </p:txBody>
-      </p:sp>
-      <p:sp>
-        <p:nvSpPr>
-          <p:cNvPr id="8" name="Shape 6"/>
-          <p:cNvSpPr/>
-          <p:nvPr/>
-        </p:nvSpPr>
-        <p:spPr>
-          <a:xfrm>
-            <a:off x="731520" y="3383280"/>
-            <a:ext cx="685800" cy="685800"/>
+              <a:t>Motion, acoustics, waterhole level, temperature and soil moisture live for both reserves, with a field-station log.</a:t>
+            </a:r>
+            <a:endParaRPr lang="en-US" sz="1300" dirty="0"/>
+          </a:p>
+        </p:txBody>
+      </p:sp>
+      <p:sp>
+        <p:nvSpPr>
+          <p:cNvPr id="9" name="Shape 7"/>
+          <p:cNvSpPr/>
+          <p:nvPr/>
+        </p:nvSpPr>
+        <p:spPr>
+          <a:xfrm>
+            <a:off x="4416552" y="1874520"/>
+            <a:ext cx="3502152" cy="3657600"/>
+          </a:xfrm>
+          <a:prstGeom prst="roundRect">
+            <a:avLst>
+              <a:gd name="adj" fmla="val 2611"/>
+            </a:avLst>
+          </a:prstGeom>
+          <a:solidFill>
+            <a:srgbClr val="EFF3E9"/>
+          </a:solidFill>
+          <a:ln w="15240">
+            <a:solidFill>
+              <a:srgbClr val="6A8F3C"/>
+            </a:solidFill>
+            <a:prstDash val="solid"/>
+          </a:ln>
+        </p:spPr>
+      </p:sp>
+      <p:sp>
+        <p:nvSpPr>
+          <p:cNvPr id="10" name="Shape 8"/>
+          <p:cNvSpPr/>
+          <p:nvPr/>
+        </p:nvSpPr>
+        <p:spPr>
+          <a:xfrm>
+            <a:off x="4690872" y="2194560"/>
+            <a:ext cx="640080" cy="640080"/>
           </a:xfrm>
           <a:prstGeom prst="ellipse">
             <a:avLst/>
@@ -2826,14 +2848,14 @@
       </p:sp>
       <p:sp>
         <p:nvSpPr>
-          <p:cNvPr id="9" name="Text 7"/>
-          <p:cNvSpPr/>
-          <p:nvPr/>
-        </p:nvSpPr>
-        <p:spPr>
-          <a:xfrm>
-            <a:off x="731520" y="3383280"/>
-            <a:ext cx="685800" cy="685800"/>
+          <p:cNvPr id="11" name="Text 9"/>
+          <p:cNvSpPr/>
+          <p:nvPr/>
+        </p:nvSpPr>
+        <p:spPr>
+          <a:xfrm>
+            <a:off x="4690872" y="2194560"/>
+            <a:ext cx="640080" cy="640080"/>
           </a:xfrm>
           <a:prstGeom prst="rect">
             <a:avLst/>
@@ -2849,7 +2871,7 @@
               <a:buNone/>
             </a:pPr>
             <a:r>
-              <a:rPr lang="en-US" sz="2600" b="1" dirty="0">
+              <a:rPr lang="en-US" sz="2400" b="1" dirty="0">
                 <a:solidFill>
                   <a:srgbClr val="FFFFFF"/>
                 </a:solidFill>
@@ -2859,20 +2881,20 @@
               </a:rPr>
               <a:t>2</a:t>
             </a:r>
-            <a:endParaRPr lang="en-US" sz="2600" dirty="0"/>
-          </a:p>
-        </p:txBody>
-      </p:sp>
-      <p:sp>
-        <p:nvSpPr>
-          <p:cNvPr id="10" name="Text 8"/>
-          <p:cNvSpPr/>
-          <p:nvPr/>
-        </p:nvSpPr>
-        <p:spPr>
-          <a:xfrm>
-            <a:off x="1691640" y="3337560"/>
-            <a:ext cx="9875520" cy="411480"/>
+            <a:endParaRPr lang="en-US" sz="2400" dirty="0"/>
+          </a:p>
+        </p:txBody>
+      </p:sp>
+      <p:sp>
+        <p:nvSpPr>
+          <p:cNvPr id="12" name="Text 10"/>
+          <p:cNvSpPr/>
+          <p:nvPr/>
+        </p:nvSpPr>
+        <p:spPr>
+          <a:xfrm>
+            <a:off x="4690872" y="3017520"/>
+            <a:ext cx="2953512" cy="822960"/>
           </a:xfrm>
           <a:prstGeom prst="rect">
             <a:avLst/>
@@ -2888,7 +2910,7 @@
               <a:buNone/>
             </a:pPr>
             <a:r>
-              <a:rPr lang="en-US" sz="1800" b="1" dirty="0">
+              <a:rPr lang="en-US" sz="1700" b="1" dirty="0">
                 <a:solidFill>
                   <a:srgbClr val="1C2617"/>
                 </a:solidFill>
@@ -2896,22 +2918,22 @@
                 <a:ea typeface="Calibri" pitchFamily="34" charset="-122"/>
                 <a:cs typeface="Calibri" pitchFamily="34" charset="-120"/>
               </a:rPr>
-              <a:t>Two reserves, live</a:t>
-            </a:r>
-            <a:endParaRPr lang="en-US" sz="1800" dirty="0"/>
-          </a:p>
-        </p:txBody>
-      </p:sp>
-      <p:sp>
-        <p:nvSpPr>
-          <p:cNvPr id="11" name="Text 9"/>
-          <p:cNvSpPr/>
-          <p:nvPr/>
-        </p:nvSpPr>
-        <p:spPr>
-          <a:xfrm>
-            <a:off x="1691640" y="3758184"/>
-            <a:ext cx="9875520" cy="640080"/>
+              <a:t>Short-lived events caught at the edge</a:t>
+            </a:r>
+            <a:endParaRPr lang="en-US" sz="1700" dirty="0"/>
+          </a:p>
+        </p:txBody>
+      </p:sp>
+      <p:sp>
+        <p:nvSpPr>
+          <p:cNvPr id="13" name="Text 11"/>
+          <p:cNvSpPr/>
+          <p:nvPr/>
+        </p:nvSpPr>
+        <p:spPr>
+          <a:xfrm>
+            <a:off x="4690872" y="3794760"/>
+            <a:ext cx="2953512" cy="1554480"/>
           </a:xfrm>
           <a:prstGeom prst="rect">
             <a:avLst/>
@@ -2924,10 +2946,13 @@
           <a:lstStyle/>
           <a:p>
             <a:pPr indent="0" marL="0">
-              <a:buNone/>
-            </a:pPr>
-            <a:r>
-              <a:rPr lang="en-US" sz="1350" dirty="0">
+              <a:lnSpc>
+                <a:spcPct val="105000"/>
+              </a:lnSpc>
+              <a:buNone/>
+            </a:pPr>
+            <a:r>
+              <a:rPr lang="en-US" sz="1300" dirty="0">
                 <a:solidFill>
                   <a:srgbClr val="606E50"/>
                 </a:solidFill>
@@ -2935,22 +2960,49 @@
                 <a:ea typeface="Calibri" pitchFamily="34" charset="-122"/>
                 <a:cs typeface="Calibri" pitchFamily="34" charset="-120"/>
               </a:rPr>
-              <a:t>Both reserves side by side with a field-station log, and alert flags tripping on real thresholds.</a:t>
-            </a:r>
-            <a:endParaRPr lang="en-US" sz="1350" dirty="0"/>
-          </a:p>
-        </p:txBody>
-      </p:sp>
-      <p:sp>
-        <p:nvSpPr>
-          <p:cNvPr id="12" name="Shape 10"/>
-          <p:cNvSpPr/>
-          <p:nvPr/>
-        </p:nvSpPr>
-        <p:spPr>
-          <a:xfrm>
-            <a:off x="731520" y="4800600"/>
-            <a:ext cx="685800" cy="685800"/>
+              <a:t>A gunshot-like acoustic spike over 75 dB or a waterhole below 20 cm raises as the window closes, while a ranger can still respond.</a:t>
+            </a:r>
+            <a:endParaRPr lang="en-US" sz="1300" dirty="0"/>
+          </a:p>
+        </p:txBody>
+      </p:sp>
+      <p:sp>
+        <p:nvSpPr>
+          <p:cNvPr id="14" name="Shape 12"/>
+          <p:cNvSpPr/>
+          <p:nvPr/>
+        </p:nvSpPr>
+        <p:spPr>
+          <a:xfrm>
+            <a:off x="8193024" y="1874520"/>
+            <a:ext cx="3502152" cy="3657600"/>
+          </a:xfrm>
+          <a:prstGeom prst="roundRect">
+            <a:avLst>
+              <a:gd name="adj" fmla="val 2611"/>
+            </a:avLst>
+          </a:prstGeom>
+          <a:solidFill>
+            <a:srgbClr val="EFF3E9"/>
+          </a:solidFill>
+          <a:ln w="15240">
+            <a:solidFill>
+              <a:srgbClr val="6A8F3C"/>
+            </a:solidFill>
+            <a:prstDash val="solid"/>
+          </a:ln>
+        </p:spPr>
+      </p:sp>
+      <p:sp>
+        <p:nvSpPr>
+          <p:cNvPr id="15" name="Shape 13"/>
+          <p:cNvSpPr/>
+          <p:nvPr/>
+        </p:nvSpPr>
+        <p:spPr>
+          <a:xfrm>
+            <a:off x="8467344" y="2194560"/>
+            <a:ext cx="640080" cy="640080"/>
           </a:xfrm>
           <a:prstGeom prst="ellipse">
             <a:avLst/>
@@ -2963,14 +3015,14 @@
       </p:sp>
       <p:sp>
         <p:nvSpPr>
-          <p:cNvPr id="13" name="Text 11"/>
-          <p:cNvSpPr/>
-          <p:nvPr/>
-        </p:nvSpPr>
-        <p:spPr>
-          <a:xfrm>
-            <a:off x="731520" y="4800600"/>
-            <a:ext cx="685800" cy="685800"/>
+          <p:cNvPr id="16" name="Text 14"/>
+          <p:cNvSpPr/>
+          <p:nvPr/>
+        </p:nvSpPr>
+        <p:spPr>
+          <a:xfrm>
+            <a:off x="8467344" y="2194560"/>
+            <a:ext cx="640080" cy="640080"/>
           </a:xfrm>
           <a:prstGeom prst="rect">
             <a:avLst/>
@@ -2986,7 +3038,7 @@
               <a:buNone/>
             </a:pPr>
             <a:r>
-              <a:rPr lang="en-US" sz="2600" b="1" dirty="0">
+              <a:rPr lang="en-US" sz="2400" b="1" dirty="0">
                 <a:solidFill>
                   <a:srgbClr val="FFFFFF"/>
                 </a:solidFill>
@@ -2996,20 +3048,20 @@
               </a:rPr>
               <a:t>3</a:t>
             </a:r>
-            <a:endParaRPr lang="en-US" sz="2600" dirty="0"/>
-          </a:p>
-        </p:txBody>
-      </p:sp>
-      <p:sp>
-        <p:nvSpPr>
-          <p:cNvPr id="14" name="Text 12"/>
-          <p:cNvSpPr/>
-          <p:nvPr/>
-        </p:nvSpPr>
-        <p:spPr>
-          <a:xfrm>
-            <a:off x="1691640" y="4754880"/>
-            <a:ext cx="9875520" cy="411480"/>
+            <a:endParaRPr lang="en-US" sz="2400" dirty="0"/>
+          </a:p>
+        </p:txBody>
+      </p:sp>
+      <p:sp>
+        <p:nvSpPr>
+          <p:cNvPr id="17" name="Text 15"/>
+          <p:cNvSpPr/>
+          <p:nvPr/>
+        </p:nvSpPr>
+        <p:spPr>
+          <a:xfrm>
+            <a:off x="8467344" y="3017520"/>
+            <a:ext cx="2953512" cy="822960"/>
           </a:xfrm>
           <a:prstGeom prst="rect">
             <a:avLst/>
@@ -3025,7 +3077,7 @@
               <a:buNone/>
             </a:pPr>
             <a:r>
-              <a:rPr lang="en-US" sz="1800" b="1" dirty="0">
+              <a:rPr lang="en-US" sz="1700" b="1" dirty="0">
                 <a:solidFill>
                   <a:srgbClr val="1C2617"/>
                 </a:solidFill>
@@ -3033,22 +3085,22 @@
                 <a:ea typeface="Calibri" pitchFamily="34" charset="-122"/>
                 <a:cs typeface="Calibri" pitchFamily="34" charset="-120"/>
               </a:rPr>
-              <a:t>Tested end to end</a:t>
-            </a:r>
-            <a:endParaRPr lang="en-US" sz="1800" dirty="0"/>
-          </a:p>
-        </p:txBody>
-      </p:sp>
-      <p:sp>
-        <p:nvSpPr>
-          <p:cNvPr id="15" name="Text 13"/>
-          <p:cNvSpPr/>
-          <p:nvPr/>
-        </p:nvSpPr>
-        <p:spPr>
-          <a:xfrm>
-            <a:off x="1691640" y="5175504"/>
-            <a:ext cx="9875520" cy="640080"/>
+              <a:t>Alert flags on real thresholds</a:t>
+            </a:r>
+            <a:endParaRPr lang="en-US" sz="1700" dirty="0"/>
+          </a:p>
+        </p:txBody>
+      </p:sp>
+      <p:sp>
+        <p:nvSpPr>
+          <p:cNvPr id="18" name="Text 16"/>
+          <p:cNvSpPr/>
+          <p:nvPr/>
+        </p:nvSpPr>
+        <p:spPr>
+          <a:xfrm>
+            <a:off x="8467344" y="3794760"/>
+            <a:ext cx="2953512" cy="1554480"/>
           </a:xfrm>
           <a:prstGeom prst="rect">
             <a:avLst/>
@@ -3061,10 +3113,13 @@
           <a:lstStyle/>
           <a:p>
             <a:pPr indent="0" marL="0">
-              <a:buNone/>
-            </a:pPr>
-            <a:r>
-              <a:rPr lang="en-US" sz="1350" dirty="0">
+              <a:lnSpc>
+                <a:spcPct val="105000"/>
+              </a:lnSpc>
+              <a:buNone/>
+            </a:pPr>
+            <a:r>
+              <a:rPr lang="en-US" sz="1300" dirty="0">
                 <a:solidFill>
                   <a:srgbClr val="606E50"/>
                 </a:solidFill>
@@ -3072,15 +3127,15 @@
                 <a:ea typeface="Calibri" pitchFamily="34" charset="-122"/>
                 <a:cs typeface="Calibri" pitchFamily="34" charset="-120"/>
               </a:rPr>
-              <a:t>82 automated tests pass across sensors, fog, backend processor and dashboard.</a:t>
-            </a:r>
-            <a:endParaRPr lang="en-US" sz="1350" dirty="0"/>
-          </a:p>
-        </p:txBody>
-      </p:sp>
-      <p:sp>
-        <p:nvSpPr>
-          <p:cNvPr id="16" name="Text 14"/>
+              <a:t>The flags trip on genuine breaches, and the stored count climbs 362 to 378 in fifteen seconds during the check.</a:t>
+            </a:r>
+            <a:endParaRPr lang="en-US" sz="1300" dirty="0"/>
+          </a:p>
+        </p:txBody>
+      </p:sp>
+      <p:sp>
+        <p:nvSpPr>
+          <p:cNvPr id="19" name="Text 17"/>
           <p:cNvSpPr/>
           <p:nvPr/>
         </p:nvSpPr>
@@ -3157,24 +3212,24 @@
         </p:nvSpPr>
         <p:spPr>
           <a:xfrm>
-            <a:off x="640080" y="640080"/>
-            <a:ext cx="10972800" cy="640080"/>
-          </a:xfrm>
-          <a:prstGeom prst="rect">
-            <a:avLst/>
-          </a:prstGeom>
-          <a:noFill/>
-          <a:ln/>
-        </p:spPr>
-        <p:txBody>
-          <a:bodyPr wrap="square" rtlCol="0" anchor="ctr"/>
+            <a:off x="640080" y="594360"/>
+            <a:ext cx="10972800" cy="822960"/>
+          </a:xfrm>
+          <a:prstGeom prst="rect">
+            <a:avLst/>
+          </a:prstGeom>
+          <a:noFill/>
+          <a:ln/>
+        </p:spPr>
+        <p:txBody>
+          <a:bodyPr wrap="square" rtlCol="0" anchor="t"/>
           <a:lstStyle/>
           <a:p>
             <a:pPr indent="0" marL="0">
               <a:buNone/>
             </a:pPr>
             <a:r>
-              <a:rPr lang="en-US" sz="3000" b="1" dirty="0">
+              <a:rPr lang="en-US" sz="2800" b="1" dirty="0">
                 <a:solidFill>
                   <a:srgbClr val="FFFFFF"/>
                 </a:solidFill>
@@ -3184,7 +3239,7 @@
               </a:rPr>
               <a:t>Hardest Part — a silent DynamoDB undercount</a:t>
             </a:r>
-            <a:endParaRPr lang="en-US" sz="3000" dirty="0"/>
+            <a:endParaRPr lang="en-US" sz="2800" dirty="0"/>
           </a:p>
         </p:txBody>
       </p:sp>

--- a/ppt/HrishikeshSajeev_X25132377_wildlife-conservation-monitoring.pptx
+++ b/ppt/HrishikeshSajeev_X25132377_wildlife-conservation-monitoring.pptx
@@ -3186,7 +3186,7 @@
     <p:bg>
       <p:bgPr>
         <a:solidFill>
-          <a:srgbClr val="1C2618"/>
+          <a:srgbClr val="FFFFFF"/>
         </a:solidFill>
       </p:bgPr>
     </p:bg>
@@ -3212,7 +3212,7 @@
         </p:nvSpPr>
         <p:spPr>
           <a:xfrm>
-            <a:off x="640080" y="594360"/>
+            <a:off x="640080" y="502920"/>
             <a:ext cx="10972800" cy="822960"/>
           </a:xfrm>
           <a:prstGeom prst="rect">
@@ -3231,7 +3231,7 @@
             <a:r>
               <a:rPr lang="en-US" sz="2800" b="1" dirty="0">
                 <a:solidFill>
-                  <a:srgbClr val="FFFFFF"/>
+                  <a:srgbClr val="1C2617"/>
                 </a:solidFill>
                 <a:latin typeface="Cambria" pitchFamily="34" charset="0"/>
                 <a:ea typeface="Cambria" pitchFamily="34" charset="-122"/>
@@ -3260,9 +3260,9 @@
             </a:avLst>
           </a:prstGeom>
           <a:solidFill>
-            <a:srgbClr val="2A3A1E"/>
-          </a:solidFill>
-          <a:ln w="15875">
+            <a:srgbClr val="EFF3E9"/>
+          </a:solidFill>
+          <a:ln w="19050">
             <a:solidFill>
               <a:srgbClr val="D9A62E"/>
             </a:solidFill>
@@ -3339,7 +3339,7 @@
             <a:r>
               <a:rPr lang="en-US" sz="1300" dirty="0">
                 <a:solidFill>
-                  <a:srgbClr val="D6E2C6"/>
+                  <a:srgbClr val="1C2617"/>
                 </a:solidFill>
                 <a:latin typeface="Calibri" pitchFamily="34" charset="0"/>
                 <a:ea typeface="Calibri" pitchFamily="34" charset="-122"/>
@@ -3368,11 +3368,11 @@
             </a:avLst>
           </a:prstGeom>
           <a:solidFill>
-            <a:srgbClr val="2A3A1E"/>
-          </a:solidFill>
-          <a:ln w="15875">
+            <a:srgbClr val="EFF3E9"/>
+          </a:solidFill>
+          <a:ln w="19050">
             <a:solidFill>
-              <a:srgbClr val="8CA85E"/>
+              <a:srgbClr val="6A8F3C"/>
             </a:solidFill>
             <a:prstDash val="solid"/>
           </a:ln>
@@ -3405,7 +3405,7 @@
             <a:r>
               <a:rPr lang="en-US" sz="1900" b="1" dirty="0">
                 <a:solidFill>
-                  <a:srgbClr val="8CA85E"/>
+                  <a:srgbClr val="6A8F3C"/>
                 </a:solidFill>
                 <a:latin typeface="Cambria" pitchFamily="34" charset="0"/>
                 <a:ea typeface="Cambria" pitchFamily="34" charset="-122"/>
@@ -3447,7 +3447,7 @@
             <a:r>
               <a:rPr lang="en-US" sz="1300" dirty="0">
                 <a:solidFill>
-                  <a:srgbClr val="D6E2C6"/>
+                  <a:srgbClr val="1C2617"/>
                 </a:solidFill>
                 <a:latin typeface="Calibri" pitchFamily="34" charset="0"/>
                 <a:ea typeface="Calibri" pitchFamily="34" charset="-122"/>

--- a/ppt/HrishikeshSajeev_X25132377_wildlife-conservation-monitoring.pptx
+++ b/ppt/HrishikeshSajeev_X25132377_wildlife-conservation-monitoring.pptx
@@ -1144,14 +1144,73 @@
       </p:grpSpPr>
       <p:sp>
         <p:nvSpPr>
-          <p:cNvPr id="2" name="Text 0"/>
-          <p:cNvSpPr/>
-          <p:nvPr/>
-        </p:nvSpPr>
-        <p:spPr>
-          <a:xfrm>
-            <a:off x="658368" y="640080"/>
-            <a:ext cx="10972800" cy="365760"/>
+          <p:cNvPr id="2" name="Shape 0"/>
+          <p:cNvSpPr/>
+          <p:nvPr/>
+        </p:nvSpPr>
+        <p:spPr>
+          <a:xfrm>
+            <a:off x="0" y="0"/>
+            <a:ext cx="12191695" cy="3931920"/>
+          </a:xfrm>
+          <a:prstGeom prst="rect">
+            <a:avLst/>
+          </a:prstGeom>
+          <a:solidFill>
+            <a:srgbClr val="4B6B2A"/>
+          </a:solidFill>
+          <a:ln/>
+        </p:spPr>
+      </p:sp>
+      <p:sp>
+        <p:nvSpPr>
+          <p:cNvPr id="3" name="Text 1"/>
+          <p:cNvSpPr/>
+          <p:nvPr/>
+        </p:nvSpPr>
+        <p:spPr>
+          <a:xfrm>
+            <a:off x="640080" y="1005840"/>
+            <a:ext cx="10972800" cy="1554480"/>
+          </a:xfrm>
+          <a:prstGeom prst="rect">
+            <a:avLst/>
+          </a:prstGeom>
+          <a:noFill/>
+          <a:ln/>
+        </p:spPr>
+        <p:txBody>
+          <a:bodyPr wrap="square" rtlCol="0" anchor="t"/>
+          <a:lstStyle/>
+          <a:p>
+            <a:pPr indent="0" marL="0">
+              <a:buNone/>
+            </a:pPr>
+            <a:r>
+              <a:rPr lang="en-US" sz="3400" b="1" dirty="0">
+                <a:solidFill>
+                  <a:srgbClr val="FFFFFF"/>
+                </a:solidFill>
+                <a:latin typeface="Cambria" pitchFamily="34" charset="0"/>
+                <a:ea typeface="Cambria" pitchFamily="34" charset="-122"/>
+                <a:cs typeface="Cambria" pitchFamily="34" charset="-120"/>
+              </a:rPr>
+              <a:t>Wildlife Conservation Habitat Monitoring</a:t>
+            </a:r>
+            <a:endParaRPr lang="en-US" sz="3400" dirty="0"/>
+          </a:p>
+        </p:txBody>
+      </p:sp>
+      <p:sp>
+        <p:nvSpPr>
+          <p:cNvPr id="4" name="Text 2"/>
+          <p:cNvSpPr/>
+          <p:nvPr/>
+        </p:nvSpPr>
+        <p:spPr>
+          <a:xfrm>
+            <a:off x="658368" y="2880360"/>
+            <a:ext cx="10972800" cy="457200"/>
           </a:xfrm>
           <a:prstGeom prst="rect">
             <a:avLst/>
@@ -1167,92 +1226,14 @@
               <a:buNone/>
             </a:pPr>
             <a:r>
-              <a:rPr lang="en-US" sz="1400" b="1" spc="300" kern="0" dirty="0">
-                <a:solidFill>
-                  <a:srgbClr val="D9A62E"/>
+              <a:rPr lang="en-US" sz="1600" dirty="0">
+                <a:solidFill>
+                  <a:srgbClr val="D6E2C6"/>
                 </a:solidFill>
                 <a:latin typeface="Calibri" pitchFamily="34" charset="0"/>
                 <a:ea typeface="Calibri" pitchFamily="34" charset="-122"/>
                 <a:cs typeface="Calibri" pitchFamily="34" charset="-120"/>
               </a:rPr>
-              <a:t>WILDLIFE CONSERVATION HABITAT MONITORING</a:t>
-            </a:r>
-            <a:endParaRPr lang="en-US" sz="1400" dirty="0"/>
-          </a:p>
-        </p:txBody>
-      </p:sp>
-      <p:sp>
-        <p:nvSpPr>
-          <p:cNvPr id="3" name="Text 1"/>
-          <p:cNvSpPr/>
-          <p:nvPr/>
-        </p:nvSpPr>
-        <p:spPr>
-          <a:xfrm>
-            <a:off x="640080" y="2514600"/>
-            <a:ext cx="10972800" cy="1188720"/>
-          </a:xfrm>
-          <a:prstGeom prst="rect">
-            <a:avLst/>
-          </a:prstGeom>
-          <a:noFill/>
-          <a:ln/>
-        </p:spPr>
-        <p:txBody>
-          <a:bodyPr wrap="square" rtlCol="0" anchor="ctr"/>
-          <a:lstStyle/>
-          <a:p>
-            <a:pPr indent="0" marL="0">
-              <a:buNone/>
-            </a:pPr>
-            <a:r>
-              <a:rPr lang="en-US" sz="3400" b="1" dirty="0">
-                <a:solidFill>
-                  <a:srgbClr val="FFFFFF"/>
-                </a:solidFill>
-                <a:latin typeface="Cambria" pitchFamily="34" charset="0"/>
-                <a:ea typeface="Cambria" pitchFamily="34" charset="-122"/>
-                <a:cs typeface="Cambria" pitchFamily="34" charset="-120"/>
-              </a:rPr>
-              <a:t>Wildlife Conservation Habitat Monitoring</a:t>
-            </a:r>
-            <a:endParaRPr lang="en-US" sz="3400" dirty="0"/>
-          </a:p>
-        </p:txBody>
-      </p:sp>
-      <p:sp>
-        <p:nvSpPr>
-          <p:cNvPr id="4" name="Text 2"/>
-          <p:cNvSpPr/>
-          <p:nvPr/>
-        </p:nvSpPr>
-        <p:spPr>
-          <a:xfrm>
-            <a:off x="658368" y="3703320"/>
-            <a:ext cx="10972800" cy="365760"/>
-          </a:xfrm>
-          <a:prstGeom prst="rect">
-            <a:avLst/>
-          </a:prstGeom>
-          <a:noFill/>
-          <a:ln/>
-        </p:spPr>
-        <p:txBody>
-          <a:bodyPr wrap="square" rtlCol="0" anchor="ctr"/>
-          <a:lstStyle/>
-          <a:p>
-            <a:pPr indent="0" marL="0">
-              <a:buNone/>
-            </a:pPr>
-            <a:r>
-              <a:rPr lang="en-US" sz="1600" dirty="0">
-                <a:solidFill>
-                  <a:srgbClr val="8CA85E"/>
-                </a:solidFill>
-                <a:latin typeface="Calibri" pitchFamily="34" charset="0"/>
-                <a:ea typeface="Calibri" pitchFamily="34" charset="-122"/>
-                <a:cs typeface="Calibri" pitchFamily="34" charset="-120"/>
-              </a:rPr>
               <a:t>Hrishikesh Sajeev   ·   X25132377</a:t>
             </a:r>
             <a:endParaRPr lang="en-US" sz="1600" dirty="0"/>
@@ -1267,8 +1248,8 @@
         </p:nvSpPr>
         <p:spPr>
           <a:xfrm>
-            <a:off x="658368" y="4251960"/>
-            <a:ext cx="10424160" cy="1188720"/>
+            <a:off x="658368" y="4206240"/>
+            <a:ext cx="10424160" cy="1280160"/>
           </a:xfrm>
           <a:prstGeom prst="rect">
             <a:avLst/>
@@ -1309,7 +1290,7 @@
         </p:nvSpPr>
         <p:spPr>
           <a:xfrm>
-            <a:off x="658368" y="5623560"/>
+            <a:off x="658368" y="5577840"/>
             <a:ext cx="2651760" cy="566928"/>
           </a:xfrm>
           <a:prstGeom prst="roundRect">
@@ -1336,7 +1317,7 @@
         </p:nvSpPr>
         <p:spPr>
           <a:xfrm>
-            <a:off x="658368" y="5623560"/>
+            <a:off x="658368" y="5577840"/>
             <a:ext cx="2651760" cy="566928"/>
           </a:xfrm>
           <a:prstGeom prst="rect">
@@ -1375,7 +1356,7 @@
         </p:nvSpPr>
         <p:spPr>
           <a:xfrm>
-            <a:off x="3538728" y="5623560"/>
+            <a:off x="3538728" y="5577840"/>
             <a:ext cx="2651760" cy="566928"/>
           </a:xfrm>
           <a:prstGeom prst="roundRect">
@@ -1402,7 +1383,7 @@
         </p:nvSpPr>
         <p:spPr>
           <a:xfrm>
-            <a:off x="3538728" y="5623560"/>
+            <a:off x="3538728" y="5577840"/>
             <a:ext cx="2651760" cy="566928"/>
           </a:xfrm>
           <a:prstGeom prst="rect">
@@ -1441,7 +1422,7 @@
         </p:nvSpPr>
         <p:spPr>
           <a:xfrm>
-            <a:off x="6419088" y="5623560"/>
+            <a:off x="6419088" y="5577840"/>
             <a:ext cx="2651760" cy="566928"/>
           </a:xfrm>
           <a:prstGeom prst="roundRect">
@@ -1468,7 +1449,7 @@
         </p:nvSpPr>
         <p:spPr>
           <a:xfrm>
-            <a:off x="6419088" y="5623560"/>
+            <a:off x="6419088" y="5577840"/>
             <a:ext cx="2651760" cy="566928"/>
           </a:xfrm>
           <a:prstGeom prst="rect">
@@ -1617,12 +1598,12 @@
         </p:nvSpPr>
         <p:spPr>
           <a:xfrm>
-            <a:off x="640080" y="1874520"/>
-            <a:ext cx="2286000" cy="1280160"/>
+            <a:off x="640080" y="1554480"/>
+            <a:ext cx="3200400" cy="3383280"/>
           </a:xfrm>
           <a:prstGeom prst="roundRect">
             <a:avLst>
-              <a:gd name="adj" fmla="val 7143"/>
+              <a:gd name="adj" fmla="val 2857"/>
             </a:avLst>
           </a:prstGeom>
           <a:solidFill>
@@ -1638,147 +1619,63 @@
       </p:sp>
       <p:sp>
         <p:nvSpPr>
-          <p:cNvPr id="4" name="Shape 2"/>
-          <p:cNvSpPr/>
-          <p:nvPr/>
-        </p:nvSpPr>
-        <p:spPr>
-          <a:xfrm>
-            <a:off x="1691640" y="2039112"/>
-            <a:ext cx="182880" cy="182880"/>
-          </a:xfrm>
-          <a:prstGeom prst="ellipse">
-            <a:avLst/>
-          </a:prstGeom>
-          <a:solidFill>
-            <a:srgbClr val="8CA85E"/>
-          </a:solidFill>
-          <a:ln/>
-        </p:spPr>
-      </p:sp>
-      <p:sp>
-        <p:nvSpPr>
-          <p:cNvPr id="5" name="Text 3"/>
-          <p:cNvSpPr/>
-          <p:nvPr/>
-        </p:nvSpPr>
-        <p:spPr>
-          <a:xfrm>
-            <a:off x="612648" y="2258568"/>
-            <a:ext cx="2340864" cy="365760"/>
-          </a:xfrm>
-          <a:prstGeom prst="rect">
-            <a:avLst/>
-          </a:prstGeom>
-          <a:noFill/>
-          <a:ln/>
-        </p:spPr>
-        <p:txBody>
-          <a:bodyPr wrap="square" lIns="0" tIns="0" rIns="0" bIns="0" rtlCol="0" anchor="ctr"/>
+          <p:cNvPr id="4" name="Text 2"/>
+          <p:cNvSpPr/>
+          <p:nvPr/>
+        </p:nvSpPr>
+        <p:spPr>
+          <a:xfrm>
+            <a:off x="640080" y="1691640"/>
+            <a:ext cx="3200400" cy="365760"/>
+          </a:xfrm>
+          <a:prstGeom prst="rect">
+            <a:avLst/>
+          </a:prstGeom>
+          <a:noFill/>
+          <a:ln/>
+        </p:spPr>
+        <p:txBody>
+          <a:bodyPr wrap="square" rtlCol="0" anchor="ctr"/>
           <a:lstStyle/>
           <a:p>
             <a:pPr algn="ctr" indent="0" marL="0">
               <a:buNone/>
             </a:pPr>
             <a:r>
-              <a:rPr lang="en-US" sz="1450" b="1" dirty="0">
-                <a:solidFill>
-                  <a:srgbClr val="1C2617"/>
+              <a:rPr lang="en-US" sz="1200" b="1" spc="300" kern="0" dirty="0">
+                <a:solidFill>
+                  <a:srgbClr val="8CA85E"/>
                 </a:solidFill>
                 <a:latin typeface="Calibri" pitchFamily="34" charset="0"/>
                 <a:ea typeface="Calibri" pitchFamily="34" charset="-122"/>
                 <a:cs typeface="Calibri" pitchFamily="34" charset="-120"/>
               </a:rPr>
-              <a:t>Field sensors</a:t>
-            </a:r>
-            <a:endParaRPr lang="en-US" sz="1450" dirty="0"/>
-          </a:p>
-        </p:txBody>
-      </p:sp>
-      <p:sp>
-        <p:nvSpPr>
-          <p:cNvPr id="6" name="Text 4"/>
-          <p:cNvSpPr/>
-          <p:nvPr/>
-        </p:nvSpPr>
-        <p:spPr>
-          <a:xfrm>
-            <a:off x="640080" y="2606040"/>
-            <a:ext cx="2286000" cy="411480"/>
-          </a:xfrm>
-          <a:prstGeom prst="rect">
-            <a:avLst/>
-          </a:prstGeom>
-          <a:noFill/>
-          <a:ln/>
-        </p:spPr>
-        <p:txBody>
-          <a:bodyPr wrap="square" lIns="0" tIns="0" rIns="0" bIns="0" rtlCol="0" anchor="t"/>
-          <a:lstStyle/>
-          <a:p>
-            <a:pPr algn="ctr" indent="0" marL="0">
-              <a:buNone/>
-            </a:pPr>
-            <a:r>
-              <a:rPr lang="en-US" sz="1050" dirty="0">
-                <a:solidFill>
-                  <a:srgbClr val="606E50"/>
-                </a:solidFill>
-                <a:latin typeface="Calibri" pitchFamily="34" charset="0"/>
-                <a:ea typeface="Calibri" pitchFamily="34" charset="-122"/>
-                <a:cs typeface="Calibri" pitchFamily="34" charset="-120"/>
-              </a:rPr>
-              <a:t>10 · 2 reserves</a:t>
-            </a:r>
-            <a:endParaRPr lang="en-US" sz="1050" dirty="0"/>
-          </a:p>
-        </p:txBody>
-      </p:sp>
-      <p:sp>
-        <p:nvSpPr>
-          <p:cNvPr id="7" name="Shape 5"/>
-          <p:cNvSpPr/>
-          <p:nvPr/>
-        </p:nvSpPr>
-        <p:spPr>
-          <a:xfrm>
-            <a:off x="2944368" y="2514600"/>
-            <a:ext cx="1975104" cy="0"/>
-          </a:xfrm>
-          <a:prstGeom prst="line">
-            <a:avLst/>
-          </a:prstGeom>
-          <a:noFill/>
-          <a:ln w="25400">
-            <a:solidFill>
-              <a:srgbClr val="8CA85E"/>
-            </a:solidFill>
-            <a:prstDash val="solid"/>
-            <a:headEnd type="none"/>
-            <a:tailEnd type="triangle"/>
-          </a:ln>
-        </p:spPr>
-      </p:sp>
-      <p:sp>
-        <p:nvSpPr>
-          <p:cNvPr id="8" name="Shape 6"/>
-          <p:cNvSpPr/>
-          <p:nvPr/>
-        </p:nvSpPr>
-        <p:spPr>
-          <a:xfrm>
-            <a:off x="4937760" y="1874520"/>
-            <a:ext cx="2286000" cy="1280160"/>
+              <a:t>EDGE</a:t>
+            </a:r>
+            <a:endParaRPr lang="en-US" sz="1200" dirty="0"/>
+          </a:p>
+        </p:txBody>
+      </p:sp>
+      <p:sp>
+        <p:nvSpPr>
+          <p:cNvPr id="5" name="Shape 3"/>
+          <p:cNvSpPr/>
+          <p:nvPr/>
+        </p:nvSpPr>
+        <p:spPr>
+          <a:xfrm>
+            <a:off x="914400" y="2286000"/>
+            <a:ext cx="2651760" cy="1005840"/>
           </a:xfrm>
           <a:prstGeom prst="roundRect">
             <a:avLst>
-              <a:gd name="adj" fmla="val 7143"/>
+              <a:gd name="adj" fmla="val 7273"/>
             </a:avLst>
           </a:prstGeom>
           <a:solidFill>
-            <a:srgbClr val="EFF3E9"/>
-          </a:solidFill>
-          <a:ln w="19050">
+            <a:srgbClr val="FFFFFF"/>
+          </a:solidFill>
+          <a:ln w="15240">
             <a:solidFill>
               <a:srgbClr val="8CA85E"/>
             </a:solidFill>
@@ -1788,34 +1685,14 @@
       </p:sp>
       <p:sp>
         <p:nvSpPr>
-          <p:cNvPr id="9" name="Shape 7"/>
-          <p:cNvSpPr/>
-          <p:nvPr/>
-        </p:nvSpPr>
-        <p:spPr>
-          <a:xfrm>
-            <a:off x="5989320" y="2039112"/>
-            <a:ext cx="182880" cy="182880"/>
-          </a:xfrm>
-          <a:prstGeom prst="ellipse">
-            <a:avLst/>
-          </a:prstGeom>
-          <a:solidFill>
-            <a:srgbClr val="8CA85E"/>
-          </a:solidFill>
-          <a:ln/>
-        </p:spPr>
-      </p:sp>
-      <p:sp>
-        <p:nvSpPr>
-          <p:cNvPr id="10" name="Text 8"/>
-          <p:cNvSpPr/>
-          <p:nvPr/>
-        </p:nvSpPr>
-        <p:spPr>
-          <a:xfrm>
-            <a:off x="4910328" y="2258568"/>
-            <a:ext cx="2340864" cy="365760"/>
+          <p:cNvPr id="6" name="Text 4"/>
+          <p:cNvSpPr/>
+          <p:nvPr/>
+        </p:nvSpPr>
+        <p:spPr>
+          <a:xfrm>
+            <a:off x="914400" y="2432304"/>
+            <a:ext cx="2651760" cy="365760"/>
           </a:xfrm>
           <a:prstGeom prst="rect">
             <a:avLst/>
@@ -1831,7 +1708,7 @@
               <a:buNone/>
             </a:pPr>
             <a:r>
-              <a:rPr lang="en-US" sz="1450" b="1" dirty="0">
+              <a:rPr lang="en-US" sz="1400" b="1" dirty="0">
                 <a:solidFill>
                   <a:srgbClr val="1C2617"/>
                 </a:solidFill>
@@ -1839,38 +1716,38 @@
                 <a:ea typeface="Calibri" pitchFamily="34" charset="-122"/>
                 <a:cs typeface="Calibri" pitchFamily="34" charset="-120"/>
               </a:rPr>
-              <a:t>Fog node (EC2)</a:t>
-            </a:r>
-            <a:endParaRPr lang="en-US" sz="1450" dirty="0"/>
-          </a:p>
-        </p:txBody>
-      </p:sp>
-      <p:sp>
-        <p:nvSpPr>
-          <p:cNvPr id="11" name="Text 9"/>
-          <p:cNvSpPr/>
-          <p:nvPr/>
-        </p:nvSpPr>
-        <p:spPr>
-          <a:xfrm>
-            <a:off x="4937760" y="2606040"/>
-            <a:ext cx="2286000" cy="411480"/>
-          </a:xfrm>
-          <a:prstGeom prst="rect">
-            <a:avLst/>
-          </a:prstGeom>
-          <a:noFill/>
-          <a:ln/>
-        </p:spPr>
-        <p:txBody>
-          <a:bodyPr wrap="square" lIns="0" tIns="0" rIns="0" bIns="0" rtlCol="0" anchor="t"/>
+              <a:t>Field sensors</a:t>
+            </a:r>
+            <a:endParaRPr lang="en-US" sz="1400" dirty="0"/>
+          </a:p>
+        </p:txBody>
+      </p:sp>
+      <p:sp>
+        <p:nvSpPr>
+          <p:cNvPr id="7" name="Text 5"/>
+          <p:cNvSpPr/>
+          <p:nvPr/>
+        </p:nvSpPr>
+        <p:spPr>
+          <a:xfrm>
+            <a:off x="914400" y="2816352"/>
+            <a:ext cx="2651760" cy="365760"/>
+          </a:xfrm>
+          <a:prstGeom prst="rect">
+            <a:avLst/>
+          </a:prstGeom>
+          <a:noFill/>
+          <a:ln/>
+        </p:spPr>
+        <p:txBody>
+          <a:bodyPr wrap="square" lIns="0" tIns="0" rIns="0" bIns="0" rtlCol="0" anchor="ctr"/>
           <a:lstStyle/>
           <a:p>
             <a:pPr algn="ctr" indent="0" marL="0">
               <a:buNone/>
             </a:pPr>
             <a:r>
-              <a:rPr lang="en-US" sz="1050" dirty="0">
+              <a:rPr lang="en-US" sz="1000" dirty="0">
                 <a:solidFill>
                   <a:srgbClr val="606E50"/>
                 </a:solidFill>
@@ -1878,51 +1755,155 @@
                 <a:ea typeface="Calibri" pitchFamily="34" charset="-122"/>
                 <a:cs typeface="Calibri" pitchFamily="34" charset="-120"/>
               </a:rPr>
-              <a:t>window · aggregate · alert</a:t>
-            </a:r>
-            <a:endParaRPr lang="en-US" sz="1050" dirty="0"/>
-          </a:p>
-        </p:txBody>
-      </p:sp>
-      <p:sp>
-        <p:nvSpPr>
-          <p:cNvPr id="12" name="Shape 10"/>
-          <p:cNvSpPr/>
-          <p:nvPr/>
-        </p:nvSpPr>
-        <p:spPr>
-          <a:xfrm>
-            <a:off x="7242048" y="2514600"/>
-            <a:ext cx="1975104" cy="0"/>
-          </a:xfrm>
-          <a:prstGeom prst="line">
-            <a:avLst/>
-          </a:prstGeom>
-          <a:noFill/>
-          <a:ln w="25400">
+              <a:t>10 · 2 reserves</a:t>
+            </a:r>
+            <a:endParaRPr lang="en-US" sz="1000" dirty="0"/>
+          </a:p>
+        </p:txBody>
+      </p:sp>
+      <p:sp>
+        <p:nvSpPr>
+          <p:cNvPr id="8" name="Shape 6"/>
+          <p:cNvSpPr/>
+          <p:nvPr/>
+        </p:nvSpPr>
+        <p:spPr>
+          <a:xfrm>
+            <a:off x="914400" y="3520440"/>
+            <a:ext cx="2651760" cy="1005840"/>
+          </a:xfrm>
+          <a:prstGeom prst="roundRect">
+            <a:avLst>
+              <a:gd name="adj" fmla="val 7273"/>
+            </a:avLst>
+          </a:prstGeom>
+          <a:solidFill>
+            <a:srgbClr val="FFFFFF"/>
+          </a:solidFill>
+          <a:ln w="15240">
             <a:solidFill>
               <a:srgbClr val="8CA85E"/>
             </a:solidFill>
             <a:prstDash val="solid"/>
-            <a:headEnd type="none"/>
+          </a:ln>
+        </p:spPr>
+      </p:sp>
+      <p:sp>
+        <p:nvSpPr>
+          <p:cNvPr id="9" name="Text 7"/>
+          <p:cNvSpPr/>
+          <p:nvPr/>
+        </p:nvSpPr>
+        <p:spPr>
+          <a:xfrm>
+            <a:off x="914400" y="3666744"/>
+            <a:ext cx="2651760" cy="365760"/>
+          </a:xfrm>
+          <a:prstGeom prst="rect">
+            <a:avLst/>
+          </a:prstGeom>
+          <a:noFill/>
+          <a:ln/>
+        </p:spPr>
+        <p:txBody>
+          <a:bodyPr wrap="square" lIns="0" tIns="0" rIns="0" bIns="0" rtlCol="0" anchor="ctr"/>
+          <a:lstStyle/>
+          <a:p>
+            <a:pPr algn="ctr" indent="0" marL="0">
+              <a:buNone/>
+            </a:pPr>
+            <a:r>
+              <a:rPr lang="en-US" sz="1400" b="1" dirty="0">
+                <a:solidFill>
+                  <a:srgbClr val="1C2617"/>
+                </a:solidFill>
+                <a:latin typeface="Calibri" pitchFamily="34" charset="0"/>
+                <a:ea typeface="Calibri" pitchFamily="34" charset="-122"/>
+                <a:cs typeface="Calibri" pitchFamily="34" charset="-120"/>
+              </a:rPr>
+              <a:t>Fog node (EC2)</a:t>
+            </a:r>
+            <a:endParaRPr lang="en-US" sz="1400" dirty="0"/>
+          </a:p>
+        </p:txBody>
+      </p:sp>
+      <p:sp>
+        <p:nvSpPr>
+          <p:cNvPr id="10" name="Text 8"/>
+          <p:cNvSpPr/>
+          <p:nvPr/>
+        </p:nvSpPr>
+        <p:spPr>
+          <a:xfrm>
+            <a:off x="914400" y="4050792"/>
+            <a:ext cx="2651760" cy="365760"/>
+          </a:xfrm>
+          <a:prstGeom prst="rect">
+            <a:avLst/>
+          </a:prstGeom>
+          <a:noFill/>
+          <a:ln/>
+        </p:spPr>
+        <p:txBody>
+          <a:bodyPr wrap="square" lIns="0" tIns="0" rIns="0" bIns="0" rtlCol="0" anchor="ctr"/>
+          <a:lstStyle/>
+          <a:p>
+            <a:pPr algn="ctr" indent="0" marL="0">
+              <a:buNone/>
+            </a:pPr>
+            <a:r>
+              <a:rPr lang="en-US" sz="1000" dirty="0">
+                <a:solidFill>
+                  <a:srgbClr val="606E50"/>
+                </a:solidFill>
+                <a:latin typeface="Calibri" pitchFamily="34" charset="0"/>
+                <a:ea typeface="Calibri" pitchFamily="34" charset="-122"/>
+                <a:cs typeface="Calibri" pitchFamily="34" charset="-120"/>
+              </a:rPr>
+              <a:t>window · aggregate · alert</a:t>
+            </a:r>
+            <a:endParaRPr lang="en-US" sz="1000" dirty="0"/>
+          </a:p>
+        </p:txBody>
+      </p:sp>
+      <p:sp>
+        <p:nvSpPr>
+          <p:cNvPr id="11" name="Shape 9"/>
+          <p:cNvSpPr/>
+          <p:nvPr/>
+        </p:nvSpPr>
+        <p:spPr>
+          <a:xfrm>
+            <a:off x="3886200" y="3246120"/>
+            <a:ext cx="502920" cy="0"/>
+          </a:xfrm>
+          <a:prstGeom prst="line">
+            <a:avLst/>
+          </a:prstGeom>
+          <a:noFill/>
+          <a:ln w="31750">
+            <a:solidFill>
+              <a:srgbClr val="4B6B2A"/>
+            </a:solidFill>
+            <a:prstDash val="solid"/>
             <a:tailEnd type="triangle"/>
           </a:ln>
         </p:spPr>
       </p:sp>
       <p:sp>
         <p:nvSpPr>
-          <p:cNvPr id="13" name="Shape 11"/>
-          <p:cNvSpPr/>
-          <p:nvPr/>
-        </p:nvSpPr>
-        <p:spPr>
-          <a:xfrm>
-            <a:off x="9235440" y="1874520"/>
-            <a:ext cx="2286000" cy="1280160"/>
+          <p:cNvPr id="12" name="Shape 10"/>
+          <p:cNvSpPr/>
+          <p:nvPr/>
+        </p:nvSpPr>
+        <p:spPr>
+          <a:xfrm>
+            <a:off x="4572000" y="1554480"/>
+            <a:ext cx="6949440" cy="3383280"/>
           </a:xfrm>
           <a:prstGeom prst="roundRect">
             <a:avLst>
-              <a:gd name="adj" fmla="val 7143"/>
+              <a:gd name="adj" fmla="val 2703"/>
             </a:avLst>
           </a:prstGeom>
           <a:solidFill>
@@ -1938,122 +1919,63 @@
       </p:sp>
       <p:sp>
         <p:nvSpPr>
-          <p:cNvPr id="14" name="Shape 12"/>
-          <p:cNvSpPr/>
-          <p:nvPr/>
-        </p:nvSpPr>
-        <p:spPr>
-          <a:xfrm>
-            <a:off x="10287000" y="2039112"/>
-            <a:ext cx="182880" cy="182880"/>
-          </a:xfrm>
-          <a:prstGeom prst="ellipse">
-            <a:avLst/>
-          </a:prstGeom>
-          <a:solidFill>
-            <a:srgbClr val="4B6B2A"/>
-          </a:solidFill>
-          <a:ln/>
-        </p:spPr>
-      </p:sp>
-      <p:sp>
-        <p:nvSpPr>
-          <p:cNvPr id="15" name="Text 13"/>
-          <p:cNvSpPr/>
-          <p:nvPr/>
-        </p:nvSpPr>
-        <p:spPr>
-          <a:xfrm>
-            <a:off x="9208008" y="2258568"/>
-            <a:ext cx="2340864" cy="365760"/>
-          </a:xfrm>
-          <a:prstGeom prst="rect">
-            <a:avLst/>
-          </a:prstGeom>
-          <a:noFill/>
-          <a:ln/>
-        </p:spPr>
-        <p:txBody>
-          <a:bodyPr wrap="square" lIns="0" tIns="0" rIns="0" bIns="0" rtlCol="0" anchor="ctr"/>
+          <p:cNvPr id="13" name="Text 11"/>
+          <p:cNvSpPr/>
+          <p:nvPr/>
+        </p:nvSpPr>
+        <p:spPr>
+          <a:xfrm>
+            <a:off x="4572000" y="1691640"/>
+            <a:ext cx="6949440" cy="365760"/>
+          </a:xfrm>
+          <a:prstGeom prst="rect">
+            <a:avLst/>
+          </a:prstGeom>
+          <a:noFill/>
+          <a:ln/>
+        </p:spPr>
+        <p:txBody>
+          <a:bodyPr wrap="square" rtlCol="0" anchor="ctr"/>
           <a:lstStyle/>
           <a:p>
             <a:pPr algn="ctr" indent="0" marL="0">
               <a:buNone/>
             </a:pPr>
             <a:r>
-              <a:rPr lang="en-US" sz="1450" b="1" dirty="0">
-                <a:solidFill>
-                  <a:srgbClr val="1C2617"/>
+              <a:rPr lang="en-US" sz="1200" b="1" spc="200" kern="0" dirty="0">
+                <a:solidFill>
+                  <a:srgbClr val="4B6B2A"/>
                 </a:solidFill>
                 <a:latin typeface="Calibri" pitchFamily="34" charset="0"/>
                 <a:ea typeface="Calibri" pitchFamily="34" charset="-122"/>
                 <a:cs typeface="Calibri" pitchFamily="34" charset="-120"/>
               </a:rPr>
-              <a:t>Amazon SQS</a:t>
-            </a:r>
-            <a:endParaRPr lang="en-US" sz="1450" dirty="0"/>
-          </a:p>
-        </p:txBody>
-      </p:sp>
-      <p:sp>
-        <p:nvSpPr>
-          <p:cNvPr id="16" name="Text 14"/>
-          <p:cNvSpPr/>
-          <p:nvPr/>
-        </p:nvSpPr>
-        <p:spPr>
-          <a:xfrm>
-            <a:off x="9235440" y="2606040"/>
-            <a:ext cx="2286000" cy="411480"/>
-          </a:xfrm>
-          <a:prstGeom prst="rect">
-            <a:avLst/>
-          </a:prstGeom>
-          <a:noFill/>
-          <a:ln/>
-        </p:spPr>
-        <p:txBody>
-          <a:bodyPr wrap="square" lIns="0" tIns="0" rIns="0" bIns="0" rtlCol="0" anchor="t"/>
-          <a:lstStyle/>
-          <a:p>
-            <a:pPr algn="ctr" indent="0" marL="0">
-              <a:buNone/>
-            </a:pPr>
-            <a:r>
-              <a:rPr lang="en-US" sz="1050" dirty="0">
-                <a:solidFill>
-                  <a:srgbClr val="606E50"/>
-                </a:solidFill>
-                <a:latin typeface="Calibri" pitchFamily="34" charset="0"/>
-                <a:ea typeface="Calibri" pitchFamily="34" charset="-122"/>
-                <a:cs typeface="Calibri" pitchFamily="34" charset="-120"/>
-              </a:rPr>
-              <a:t>aggregate queue</a:t>
-            </a:r>
-            <a:endParaRPr lang="en-US" sz="1050" dirty="0"/>
-          </a:p>
-        </p:txBody>
-      </p:sp>
-      <p:sp>
-        <p:nvSpPr>
-          <p:cNvPr id="17" name="Shape 15"/>
-          <p:cNvSpPr/>
-          <p:nvPr/>
-        </p:nvSpPr>
-        <p:spPr>
-          <a:xfrm>
-            <a:off x="9235440" y="3520440"/>
-            <a:ext cx="2286000" cy="1280160"/>
+              <a:t>CLOUD (serverless)</a:t>
+            </a:r>
+            <a:endParaRPr lang="en-US" sz="1200" dirty="0"/>
+          </a:p>
+        </p:txBody>
+      </p:sp>
+      <p:sp>
+        <p:nvSpPr>
+          <p:cNvPr id="14" name="Shape 12"/>
+          <p:cNvSpPr/>
+          <p:nvPr/>
+        </p:nvSpPr>
+        <p:spPr>
+          <a:xfrm>
+            <a:off x="4846320" y="2651760"/>
+            <a:ext cx="1463040" cy="1371600"/>
           </a:xfrm>
           <a:prstGeom prst="roundRect">
             <a:avLst>
-              <a:gd name="adj" fmla="val 7143"/>
+              <a:gd name="adj" fmla="val 5333"/>
             </a:avLst>
           </a:prstGeom>
           <a:solidFill>
-            <a:srgbClr val="EFF3E9"/>
-          </a:solidFill>
-          <a:ln w="19050">
+            <a:srgbClr val="FFFFFF"/>
+          </a:solidFill>
+          <a:ln w="15240">
             <a:solidFill>
               <a:srgbClr val="4B6B2A"/>
             </a:solidFill>
@@ -2063,34 +1985,14 @@
       </p:sp>
       <p:sp>
         <p:nvSpPr>
-          <p:cNvPr id="18" name="Shape 16"/>
-          <p:cNvSpPr/>
-          <p:nvPr/>
-        </p:nvSpPr>
-        <p:spPr>
-          <a:xfrm>
-            <a:off x="10287000" y="3685032"/>
-            <a:ext cx="182880" cy="182880"/>
-          </a:xfrm>
-          <a:prstGeom prst="ellipse">
-            <a:avLst/>
-          </a:prstGeom>
-          <a:solidFill>
-            <a:srgbClr val="4B6B2A"/>
-          </a:solidFill>
-          <a:ln/>
-        </p:spPr>
-      </p:sp>
-      <p:sp>
-        <p:nvSpPr>
-          <p:cNvPr id="19" name="Text 17"/>
-          <p:cNvSpPr/>
-          <p:nvPr/>
-        </p:nvSpPr>
-        <p:spPr>
-          <a:xfrm>
-            <a:off x="9208008" y="3904488"/>
-            <a:ext cx="2340864" cy="365760"/>
+          <p:cNvPr id="15" name="Text 13"/>
+          <p:cNvSpPr/>
+          <p:nvPr/>
+        </p:nvSpPr>
+        <p:spPr>
+          <a:xfrm>
+            <a:off x="4800600" y="2907792"/>
+            <a:ext cx="1554480" cy="457200"/>
           </a:xfrm>
           <a:prstGeom prst="rect">
             <a:avLst/>
@@ -2106,7 +2008,7 @@
               <a:buNone/>
             </a:pPr>
             <a:r>
-              <a:rPr lang="en-US" sz="1450" b="1" dirty="0">
+              <a:rPr lang="en-US" sz="1250" b="1" dirty="0">
                 <a:solidFill>
                   <a:srgbClr val="1C2617"/>
                 </a:solidFill>
@@ -2114,38 +2016,38 @@
                 <a:ea typeface="Calibri" pitchFamily="34" charset="-122"/>
                 <a:cs typeface="Calibri" pitchFamily="34" charset="-120"/>
               </a:rPr>
-              <a:t>AWS Lambda</a:t>
-            </a:r>
-            <a:endParaRPr lang="en-US" sz="1450" dirty="0"/>
-          </a:p>
-        </p:txBody>
-      </p:sp>
-      <p:sp>
-        <p:nvSpPr>
-          <p:cNvPr id="20" name="Text 18"/>
-          <p:cNvSpPr/>
-          <p:nvPr/>
-        </p:nvSpPr>
-        <p:spPr>
-          <a:xfrm>
-            <a:off x="9235440" y="4251960"/>
-            <a:ext cx="2286000" cy="411480"/>
-          </a:xfrm>
-          <a:prstGeom prst="rect">
-            <a:avLst/>
-          </a:prstGeom>
-          <a:noFill/>
-          <a:ln/>
-        </p:spPr>
-        <p:txBody>
-          <a:bodyPr wrap="square" lIns="0" tIns="0" rIns="0" bIns="0" rtlCol="0" anchor="t"/>
+              <a:t>Amazon SQS</a:t>
+            </a:r>
+            <a:endParaRPr lang="en-US" sz="1250" dirty="0"/>
+          </a:p>
+        </p:txBody>
+      </p:sp>
+      <p:sp>
+        <p:nvSpPr>
+          <p:cNvPr id="16" name="Text 14"/>
+          <p:cNvSpPr/>
+          <p:nvPr/>
+        </p:nvSpPr>
+        <p:spPr>
+          <a:xfrm>
+            <a:off x="4828032" y="3401568"/>
+            <a:ext cx="1499616" cy="457200"/>
+          </a:xfrm>
+          <a:prstGeom prst="rect">
+            <a:avLst/>
+          </a:prstGeom>
+          <a:noFill/>
+          <a:ln/>
+        </p:spPr>
+        <p:txBody>
+          <a:bodyPr wrap="square" lIns="0" tIns="0" rIns="0" bIns="0" rtlCol="0" anchor="ctr"/>
           <a:lstStyle/>
           <a:p>
             <a:pPr algn="ctr" indent="0" marL="0">
               <a:buNone/>
             </a:pPr>
             <a:r>
-              <a:rPr lang="en-US" sz="1050" dirty="0">
+              <a:rPr lang="en-US" sz="900" dirty="0">
                 <a:solidFill>
                   <a:srgbClr val="606E50"/>
                 </a:solidFill>
@@ -2153,328 +2055,28 @@
                 <a:ea typeface="Calibri" pitchFamily="34" charset="-122"/>
                 <a:cs typeface="Calibri" pitchFamily="34" charset="-120"/>
               </a:rPr>
-              <a:t>java17 ingest</a:t>
-            </a:r>
-            <a:endParaRPr lang="en-US" sz="1050" dirty="0"/>
-          </a:p>
-        </p:txBody>
-      </p:sp>
-      <p:sp>
-        <p:nvSpPr>
-          <p:cNvPr id="21" name="Shape 19"/>
-          <p:cNvSpPr/>
-          <p:nvPr/>
-        </p:nvSpPr>
-        <p:spPr>
-          <a:xfrm>
-            <a:off x="7242048" y="4160520"/>
-            <a:ext cx="1975104" cy="0"/>
+              <a:t>aggregate queue</a:t>
+            </a:r>
+            <a:endParaRPr lang="en-US" sz="900" dirty="0"/>
+          </a:p>
+        </p:txBody>
+      </p:sp>
+      <p:sp>
+        <p:nvSpPr>
+          <p:cNvPr id="17" name="Shape 15"/>
+          <p:cNvSpPr/>
+          <p:nvPr/>
+        </p:nvSpPr>
+        <p:spPr>
+          <a:xfrm>
+            <a:off x="6318504" y="3337560"/>
+            <a:ext cx="164592" cy="0"/>
           </a:xfrm>
           <a:prstGeom prst="line">
             <a:avLst/>
           </a:prstGeom>
           <a:noFill/>
-          <a:ln w="25400">
-            <a:solidFill>
-              <a:srgbClr val="8CA85E"/>
-            </a:solidFill>
-            <a:prstDash val="solid"/>
-            <a:headEnd type="triangle"/>
-            <a:tailEnd type="oval"/>
-          </a:ln>
-        </p:spPr>
-      </p:sp>
-      <p:sp>
-        <p:nvSpPr>
-          <p:cNvPr id="22" name="Shape 20"/>
-          <p:cNvSpPr/>
-          <p:nvPr/>
-        </p:nvSpPr>
-        <p:spPr>
-          <a:xfrm>
-            <a:off x="4937760" y="3520440"/>
-            <a:ext cx="2286000" cy="1280160"/>
-          </a:xfrm>
-          <a:prstGeom prst="roundRect">
-            <a:avLst>
-              <a:gd name="adj" fmla="val 7143"/>
-            </a:avLst>
-          </a:prstGeom>
-          <a:solidFill>
-            <a:srgbClr val="EFF3E9"/>
-          </a:solidFill>
-          <a:ln w="19050">
-            <a:solidFill>
-              <a:srgbClr val="4B6B2A"/>
-            </a:solidFill>
-            <a:prstDash val="solid"/>
-          </a:ln>
-        </p:spPr>
-      </p:sp>
-      <p:sp>
-        <p:nvSpPr>
-          <p:cNvPr id="23" name="Shape 21"/>
-          <p:cNvSpPr/>
-          <p:nvPr/>
-        </p:nvSpPr>
-        <p:spPr>
-          <a:xfrm>
-            <a:off x="5989320" y="3685032"/>
-            <a:ext cx="182880" cy="182880"/>
-          </a:xfrm>
-          <a:prstGeom prst="ellipse">
-            <a:avLst/>
-          </a:prstGeom>
-          <a:solidFill>
-            <a:srgbClr val="4B6B2A"/>
-          </a:solidFill>
-          <a:ln/>
-        </p:spPr>
-      </p:sp>
-      <p:sp>
-        <p:nvSpPr>
-          <p:cNvPr id="24" name="Text 22"/>
-          <p:cNvSpPr/>
-          <p:nvPr/>
-        </p:nvSpPr>
-        <p:spPr>
-          <a:xfrm>
-            <a:off x="4910328" y="3904488"/>
-            <a:ext cx="2340864" cy="365760"/>
-          </a:xfrm>
-          <a:prstGeom prst="rect">
-            <a:avLst/>
-          </a:prstGeom>
-          <a:noFill/>
-          <a:ln/>
-        </p:spPr>
-        <p:txBody>
-          <a:bodyPr wrap="square" lIns="0" tIns="0" rIns="0" bIns="0" rtlCol="0" anchor="ctr"/>
-          <a:lstStyle/>
-          <a:p>
-            <a:pPr algn="ctr" indent="0" marL="0">
-              <a:buNone/>
-            </a:pPr>
-            <a:r>
-              <a:rPr lang="en-US" sz="1450" b="1" dirty="0">
-                <a:solidFill>
-                  <a:srgbClr val="1C2617"/>
-                </a:solidFill>
-                <a:latin typeface="Calibri" pitchFamily="34" charset="0"/>
-                <a:ea typeface="Calibri" pitchFamily="34" charset="-122"/>
-                <a:cs typeface="Calibri" pitchFamily="34" charset="-120"/>
-              </a:rPr>
-              <a:t>DynamoDB</a:t>
-            </a:r>
-            <a:endParaRPr lang="en-US" sz="1450" dirty="0"/>
-          </a:p>
-        </p:txBody>
-      </p:sp>
-      <p:sp>
-        <p:nvSpPr>
-          <p:cNvPr id="25" name="Text 23"/>
-          <p:cNvSpPr/>
-          <p:nvPr/>
-        </p:nvSpPr>
-        <p:spPr>
-          <a:xfrm>
-            <a:off x="4937760" y="4251960"/>
-            <a:ext cx="2286000" cy="411480"/>
-          </a:xfrm>
-          <a:prstGeom prst="rect">
-            <a:avLst/>
-          </a:prstGeom>
-          <a:noFill/>
-          <a:ln/>
-        </p:spPr>
-        <p:txBody>
-          <a:bodyPr wrap="square" lIns="0" tIns="0" rIns="0" bIns="0" rtlCol="0" anchor="t"/>
-          <a:lstStyle/>
-          <a:p>
-            <a:pPr algn="ctr" indent="0" marL="0">
-              <a:buNone/>
-            </a:pPr>
-            <a:r>
-              <a:rPr lang="en-US" sz="1050" dirty="0">
-                <a:solidFill>
-                  <a:srgbClr val="606E50"/>
-                </a:solidFill>
-                <a:latin typeface="Calibri" pitchFamily="34" charset="0"/>
-                <a:ea typeface="Calibri" pitchFamily="34" charset="-122"/>
-                <a:cs typeface="Calibri" pitchFamily="34" charset="-120"/>
-              </a:rPr>
-              <a:t>readings store</a:t>
-            </a:r>
-            <a:endParaRPr lang="en-US" sz="1050" dirty="0"/>
-          </a:p>
-        </p:txBody>
-      </p:sp>
-      <p:sp>
-        <p:nvSpPr>
-          <p:cNvPr id="26" name="Shape 24"/>
-          <p:cNvSpPr/>
-          <p:nvPr/>
-        </p:nvSpPr>
-        <p:spPr>
-          <a:xfrm>
-            <a:off x="2944368" y="4160520"/>
-            <a:ext cx="1975104" cy="0"/>
-          </a:xfrm>
-          <a:prstGeom prst="line">
-            <a:avLst/>
-          </a:prstGeom>
-          <a:noFill/>
-          <a:ln w="25400">
-            <a:solidFill>
-              <a:srgbClr val="8CA85E"/>
-            </a:solidFill>
-            <a:prstDash val="solid"/>
-            <a:headEnd type="triangle"/>
-            <a:tailEnd type="oval"/>
-          </a:ln>
-        </p:spPr>
-      </p:sp>
-      <p:sp>
-        <p:nvSpPr>
-          <p:cNvPr id="27" name="Shape 25"/>
-          <p:cNvSpPr/>
-          <p:nvPr/>
-        </p:nvSpPr>
-        <p:spPr>
-          <a:xfrm>
-            <a:off x="640080" y="3520440"/>
-            <a:ext cx="2286000" cy="1280160"/>
-          </a:xfrm>
-          <a:prstGeom prst="roundRect">
-            <a:avLst>
-              <a:gd name="adj" fmla="val 7143"/>
-            </a:avLst>
-          </a:prstGeom>
-          <a:solidFill>
-            <a:srgbClr val="EFF3E9"/>
-          </a:solidFill>
-          <a:ln w="19050">
-            <a:solidFill>
-              <a:srgbClr val="6A8F3C"/>
-            </a:solidFill>
-            <a:prstDash val="solid"/>
-          </a:ln>
-        </p:spPr>
-      </p:sp>
-      <p:sp>
-        <p:nvSpPr>
-          <p:cNvPr id="28" name="Shape 26"/>
-          <p:cNvSpPr/>
-          <p:nvPr/>
-        </p:nvSpPr>
-        <p:spPr>
-          <a:xfrm>
-            <a:off x="1691640" y="3685032"/>
-            <a:ext cx="182880" cy="182880"/>
-          </a:xfrm>
-          <a:prstGeom prst="ellipse">
-            <a:avLst/>
-          </a:prstGeom>
-          <a:solidFill>
-            <a:srgbClr val="6A8F3C"/>
-          </a:solidFill>
-          <a:ln/>
-        </p:spPr>
-      </p:sp>
-      <p:sp>
-        <p:nvSpPr>
-          <p:cNvPr id="29" name="Text 27"/>
-          <p:cNvSpPr/>
-          <p:nvPr/>
-        </p:nvSpPr>
-        <p:spPr>
-          <a:xfrm>
-            <a:off x="612648" y="3904488"/>
-            <a:ext cx="2340864" cy="365760"/>
-          </a:xfrm>
-          <a:prstGeom prst="rect">
-            <a:avLst/>
-          </a:prstGeom>
-          <a:noFill/>
-          <a:ln/>
-        </p:spPr>
-        <p:txBody>
-          <a:bodyPr wrap="square" lIns="0" tIns="0" rIns="0" bIns="0" rtlCol="0" anchor="ctr"/>
-          <a:lstStyle/>
-          <a:p>
-            <a:pPr algn="ctr" indent="0" marL="0">
-              <a:buNone/>
-            </a:pPr>
-            <a:r>
-              <a:rPr lang="en-US" sz="1450" b="1" dirty="0">
-                <a:solidFill>
-                  <a:srgbClr val="1C2617"/>
-                </a:solidFill>
-                <a:latin typeface="Calibri" pitchFamily="34" charset="0"/>
-                <a:ea typeface="Calibri" pitchFamily="34" charset="-122"/>
-                <a:cs typeface="Calibri" pitchFamily="34" charset="-120"/>
-              </a:rPr>
-              <a:t>API GW + S3</a:t>
-            </a:r>
-            <a:endParaRPr lang="en-US" sz="1450" dirty="0"/>
-          </a:p>
-        </p:txBody>
-      </p:sp>
-      <p:sp>
-        <p:nvSpPr>
-          <p:cNvPr id="30" name="Text 28"/>
-          <p:cNvSpPr/>
-          <p:nvPr/>
-        </p:nvSpPr>
-        <p:spPr>
-          <a:xfrm>
-            <a:off x="640080" y="4251960"/>
-            <a:ext cx="2286000" cy="411480"/>
-          </a:xfrm>
-          <a:prstGeom prst="rect">
-            <a:avLst/>
-          </a:prstGeom>
-          <a:noFill/>
-          <a:ln/>
-        </p:spPr>
-        <p:txBody>
-          <a:bodyPr wrap="square" lIns="0" tIns="0" rIns="0" bIns="0" rtlCol="0" anchor="t"/>
-          <a:lstStyle/>
-          <a:p>
-            <a:pPr algn="ctr" indent="0" marL="0">
-              <a:buNone/>
-            </a:pPr>
-            <a:r>
-              <a:rPr lang="en-US" sz="1050" dirty="0">
-                <a:solidFill>
-                  <a:srgbClr val="606E50"/>
-                </a:solidFill>
-                <a:latin typeface="Calibri" pitchFamily="34" charset="0"/>
-                <a:ea typeface="Calibri" pitchFamily="34" charset="-122"/>
-                <a:cs typeface="Calibri" pitchFamily="34" charset="-120"/>
-              </a:rPr>
-              <a:t>reserve dashboard</a:t>
-            </a:r>
-            <a:endParaRPr lang="en-US" sz="1050" dirty="0"/>
-          </a:p>
-        </p:txBody>
-      </p:sp>
-      <p:sp>
-        <p:nvSpPr>
-          <p:cNvPr id="31" name="Shape 29"/>
-          <p:cNvSpPr/>
-          <p:nvPr/>
-        </p:nvSpPr>
-        <p:spPr>
-          <a:xfrm>
-            <a:off x="10378440" y="3154680"/>
-            <a:ext cx="0" cy="365760"/>
-          </a:xfrm>
-          <a:prstGeom prst="line">
-            <a:avLst/>
-          </a:prstGeom>
-          <a:noFill/>
-          <a:ln w="25400">
+          <a:ln w="20320">
             <a:solidFill>
               <a:srgbClr val="8CA85E"/>
             </a:solidFill>
@@ -2485,7 +2087,370 @@
       </p:sp>
       <p:sp>
         <p:nvSpPr>
-          <p:cNvPr id="32" name="Text 30"/>
+          <p:cNvPr id="18" name="Shape 16"/>
+          <p:cNvSpPr/>
+          <p:nvPr/>
+        </p:nvSpPr>
+        <p:spPr>
+          <a:xfrm>
+            <a:off x="6492240" y="2651760"/>
+            <a:ext cx="1463040" cy="1371600"/>
+          </a:xfrm>
+          <a:prstGeom prst="roundRect">
+            <a:avLst>
+              <a:gd name="adj" fmla="val 5333"/>
+            </a:avLst>
+          </a:prstGeom>
+          <a:solidFill>
+            <a:srgbClr val="FFFFFF"/>
+          </a:solidFill>
+          <a:ln w="15240">
+            <a:solidFill>
+              <a:srgbClr val="4B6B2A"/>
+            </a:solidFill>
+            <a:prstDash val="solid"/>
+          </a:ln>
+        </p:spPr>
+      </p:sp>
+      <p:sp>
+        <p:nvSpPr>
+          <p:cNvPr id="19" name="Text 17"/>
+          <p:cNvSpPr/>
+          <p:nvPr/>
+        </p:nvSpPr>
+        <p:spPr>
+          <a:xfrm>
+            <a:off x="6446520" y="2907792"/>
+            <a:ext cx="1554480" cy="457200"/>
+          </a:xfrm>
+          <a:prstGeom prst="rect">
+            <a:avLst/>
+          </a:prstGeom>
+          <a:noFill/>
+          <a:ln/>
+        </p:spPr>
+        <p:txBody>
+          <a:bodyPr wrap="square" lIns="0" tIns="0" rIns="0" bIns="0" rtlCol="0" anchor="ctr"/>
+          <a:lstStyle/>
+          <a:p>
+            <a:pPr algn="ctr" indent="0" marL="0">
+              <a:buNone/>
+            </a:pPr>
+            <a:r>
+              <a:rPr lang="en-US" sz="1250" b="1" dirty="0">
+                <a:solidFill>
+                  <a:srgbClr val="1C2617"/>
+                </a:solidFill>
+                <a:latin typeface="Calibri" pitchFamily="34" charset="0"/>
+                <a:ea typeface="Calibri" pitchFamily="34" charset="-122"/>
+                <a:cs typeface="Calibri" pitchFamily="34" charset="-120"/>
+              </a:rPr>
+              <a:t>AWS Lambda</a:t>
+            </a:r>
+            <a:endParaRPr lang="en-US" sz="1250" dirty="0"/>
+          </a:p>
+        </p:txBody>
+      </p:sp>
+      <p:sp>
+        <p:nvSpPr>
+          <p:cNvPr id="20" name="Text 18"/>
+          <p:cNvSpPr/>
+          <p:nvPr/>
+        </p:nvSpPr>
+        <p:spPr>
+          <a:xfrm>
+            <a:off x="6473952" y="3401568"/>
+            <a:ext cx="1499616" cy="457200"/>
+          </a:xfrm>
+          <a:prstGeom prst="rect">
+            <a:avLst/>
+          </a:prstGeom>
+          <a:noFill/>
+          <a:ln/>
+        </p:spPr>
+        <p:txBody>
+          <a:bodyPr wrap="square" lIns="0" tIns="0" rIns="0" bIns="0" rtlCol="0" anchor="ctr"/>
+          <a:lstStyle/>
+          <a:p>
+            <a:pPr algn="ctr" indent="0" marL="0">
+              <a:buNone/>
+            </a:pPr>
+            <a:r>
+              <a:rPr lang="en-US" sz="900" dirty="0">
+                <a:solidFill>
+                  <a:srgbClr val="606E50"/>
+                </a:solidFill>
+                <a:latin typeface="Calibri" pitchFamily="34" charset="0"/>
+                <a:ea typeface="Calibri" pitchFamily="34" charset="-122"/>
+                <a:cs typeface="Calibri" pitchFamily="34" charset="-120"/>
+              </a:rPr>
+              <a:t>java17 ingest</a:t>
+            </a:r>
+            <a:endParaRPr lang="en-US" sz="900" dirty="0"/>
+          </a:p>
+        </p:txBody>
+      </p:sp>
+      <p:sp>
+        <p:nvSpPr>
+          <p:cNvPr id="21" name="Shape 19"/>
+          <p:cNvSpPr/>
+          <p:nvPr/>
+        </p:nvSpPr>
+        <p:spPr>
+          <a:xfrm>
+            <a:off x="7964424" y="3337560"/>
+            <a:ext cx="164592" cy="0"/>
+          </a:xfrm>
+          <a:prstGeom prst="line">
+            <a:avLst/>
+          </a:prstGeom>
+          <a:noFill/>
+          <a:ln w="20320">
+            <a:solidFill>
+              <a:srgbClr val="8CA85E"/>
+            </a:solidFill>
+            <a:prstDash val="solid"/>
+            <a:tailEnd type="triangle"/>
+          </a:ln>
+        </p:spPr>
+      </p:sp>
+      <p:sp>
+        <p:nvSpPr>
+          <p:cNvPr id="22" name="Shape 20"/>
+          <p:cNvSpPr/>
+          <p:nvPr/>
+        </p:nvSpPr>
+        <p:spPr>
+          <a:xfrm>
+            <a:off x="8138160" y="2651760"/>
+            <a:ext cx="1463040" cy="1371600"/>
+          </a:xfrm>
+          <a:prstGeom prst="roundRect">
+            <a:avLst>
+              <a:gd name="adj" fmla="val 5333"/>
+            </a:avLst>
+          </a:prstGeom>
+          <a:solidFill>
+            <a:srgbClr val="FFFFFF"/>
+          </a:solidFill>
+          <a:ln w="15240">
+            <a:solidFill>
+              <a:srgbClr val="4B6B2A"/>
+            </a:solidFill>
+            <a:prstDash val="solid"/>
+          </a:ln>
+        </p:spPr>
+      </p:sp>
+      <p:sp>
+        <p:nvSpPr>
+          <p:cNvPr id="23" name="Text 21"/>
+          <p:cNvSpPr/>
+          <p:nvPr/>
+        </p:nvSpPr>
+        <p:spPr>
+          <a:xfrm>
+            <a:off x="8092440" y="2907792"/>
+            <a:ext cx="1554480" cy="457200"/>
+          </a:xfrm>
+          <a:prstGeom prst="rect">
+            <a:avLst/>
+          </a:prstGeom>
+          <a:noFill/>
+          <a:ln/>
+        </p:spPr>
+        <p:txBody>
+          <a:bodyPr wrap="square" lIns="0" tIns="0" rIns="0" bIns="0" rtlCol="0" anchor="ctr"/>
+          <a:lstStyle/>
+          <a:p>
+            <a:pPr algn="ctr" indent="0" marL="0">
+              <a:buNone/>
+            </a:pPr>
+            <a:r>
+              <a:rPr lang="en-US" sz="1250" b="1" dirty="0">
+                <a:solidFill>
+                  <a:srgbClr val="1C2617"/>
+                </a:solidFill>
+                <a:latin typeface="Calibri" pitchFamily="34" charset="0"/>
+                <a:ea typeface="Calibri" pitchFamily="34" charset="-122"/>
+                <a:cs typeface="Calibri" pitchFamily="34" charset="-120"/>
+              </a:rPr>
+              <a:t>DynamoDB</a:t>
+            </a:r>
+            <a:endParaRPr lang="en-US" sz="1250" dirty="0"/>
+          </a:p>
+        </p:txBody>
+      </p:sp>
+      <p:sp>
+        <p:nvSpPr>
+          <p:cNvPr id="24" name="Text 22"/>
+          <p:cNvSpPr/>
+          <p:nvPr/>
+        </p:nvSpPr>
+        <p:spPr>
+          <a:xfrm>
+            <a:off x="8119872" y="3401568"/>
+            <a:ext cx="1499616" cy="457200"/>
+          </a:xfrm>
+          <a:prstGeom prst="rect">
+            <a:avLst/>
+          </a:prstGeom>
+          <a:noFill/>
+          <a:ln/>
+        </p:spPr>
+        <p:txBody>
+          <a:bodyPr wrap="square" lIns="0" tIns="0" rIns="0" bIns="0" rtlCol="0" anchor="ctr"/>
+          <a:lstStyle/>
+          <a:p>
+            <a:pPr algn="ctr" indent="0" marL="0">
+              <a:buNone/>
+            </a:pPr>
+            <a:r>
+              <a:rPr lang="en-US" sz="900" dirty="0">
+                <a:solidFill>
+                  <a:srgbClr val="606E50"/>
+                </a:solidFill>
+                <a:latin typeface="Calibri" pitchFamily="34" charset="0"/>
+                <a:ea typeface="Calibri" pitchFamily="34" charset="-122"/>
+                <a:cs typeface="Calibri" pitchFamily="34" charset="-120"/>
+              </a:rPr>
+              <a:t>readings store</a:t>
+            </a:r>
+            <a:endParaRPr lang="en-US" sz="900" dirty="0"/>
+          </a:p>
+        </p:txBody>
+      </p:sp>
+      <p:sp>
+        <p:nvSpPr>
+          <p:cNvPr id="25" name="Shape 23"/>
+          <p:cNvSpPr/>
+          <p:nvPr/>
+        </p:nvSpPr>
+        <p:spPr>
+          <a:xfrm>
+            <a:off x="9610344" y="3337560"/>
+            <a:ext cx="164592" cy="0"/>
+          </a:xfrm>
+          <a:prstGeom prst="line">
+            <a:avLst/>
+          </a:prstGeom>
+          <a:noFill/>
+          <a:ln w="20320">
+            <a:solidFill>
+              <a:srgbClr val="8CA85E"/>
+            </a:solidFill>
+            <a:prstDash val="solid"/>
+            <a:tailEnd type="triangle"/>
+          </a:ln>
+        </p:spPr>
+      </p:sp>
+      <p:sp>
+        <p:nvSpPr>
+          <p:cNvPr id="26" name="Shape 24"/>
+          <p:cNvSpPr/>
+          <p:nvPr/>
+        </p:nvSpPr>
+        <p:spPr>
+          <a:xfrm>
+            <a:off x="9784080" y="2651760"/>
+            <a:ext cx="1463040" cy="1371600"/>
+          </a:xfrm>
+          <a:prstGeom prst="roundRect">
+            <a:avLst>
+              <a:gd name="adj" fmla="val 5333"/>
+            </a:avLst>
+          </a:prstGeom>
+          <a:solidFill>
+            <a:srgbClr val="FFFFFF"/>
+          </a:solidFill>
+          <a:ln w="15240">
+            <a:solidFill>
+              <a:srgbClr val="6A8F3C"/>
+            </a:solidFill>
+            <a:prstDash val="solid"/>
+          </a:ln>
+        </p:spPr>
+      </p:sp>
+      <p:sp>
+        <p:nvSpPr>
+          <p:cNvPr id="27" name="Text 25"/>
+          <p:cNvSpPr/>
+          <p:nvPr/>
+        </p:nvSpPr>
+        <p:spPr>
+          <a:xfrm>
+            <a:off x="9738360" y="2907792"/>
+            <a:ext cx="1554480" cy="457200"/>
+          </a:xfrm>
+          <a:prstGeom prst="rect">
+            <a:avLst/>
+          </a:prstGeom>
+          <a:noFill/>
+          <a:ln/>
+        </p:spPr>
+        <p:txBody>
+          <a:bodyPr wrap="square" lIns="0" tIns="0" rIns="0" bIns="0" rtlCol="0" anchor="ctr"/>
+          <a:lstStyle/>
+          <a:p>
+            <a:pPr algn="ctr" indent="0" marL="0">
+              <a:buNone/>
+            </a:pPr>
+            <a:r>
+              <a:rPr lang="en-US" sz="1250" b="1" dirty="0">
+                <a:solidFill>
+                  <a:srgbClr val="1C2617"/>
+                </a:solidFill>
+                <a:latin typeface="Calibri" pitchFamily="34" charset="0"/>
+                <a:ea typeface="Calibri" pitchFamily="34" charset="-122"/>
+                <a:cs typeface="Calibri" pitchFamily="34" charset="-120"/>
+              </a:rPr>
+              <a:t>API GW + S3</a:t>
+            </a:r>
+            <a:endParaRPr lang="en-US" sz="1250" dirty="0"/>
+          </a:p>
+        </p:txBody>
+      </p:sp>
+      <p:sp>
+        <p:nvSpPr>
+          <p:cNvPr id="28" name="Text 26"/>
+          <p:cNvSpPr/>
+          <p:nvPr/>
+        </p:nvSpPr>
+        <p:spPr>
+          <a:xfrm>
+            <a:off x="9765792" y="3401568"/>
+            <a:ext cx="1499616" cy="457200"/>
+          </a:xfrm>
+          <a:prstGeom prst="rect">
+            <a:avLst/>
+          </a:prstGeom>
+          <a:noFill/>
+          <a:ln/>
+        </p:spPr>
+        <p:txBody>
+          <a:bodyPr wrap="square" lIns="0" tIns="0" rIns="0" bIns="0" rtlCol="0" anchor="ctr"/>
+          <a:lstStyle/>
+          <a:p>
+            <a:pPr algn="ctr" indent="0" marL="0">
+              <a:buNone/>
+            </a:pPr>
+            <a:r>
+              <a:rPr lang="en-US" sz="900" dirty="0">
+                <a:solidFill>
+                  <a:srgbClr val="606E50"/>
+                </a:solidFill>
+                <a:latin typeface="Calibri" pitchFamily="34" charset="0"/>
+                <a:ea typeface="Calibri" pitchFamily="34" charset="-122"/>
+                <a:cs typeface="Calibri" pitchFamily="34" charset="-120"/>
+              </a:rPr>
+              <a:t>reserve dashboard</a:t>
+            </a:r>
+            <a:endParaRPr lang="en-US" sz="900" dirty="0"/>
+          </a:p>
+        </p:txBody>
+      </p:sp>
+      <p:sp>
+        <p:nvSpPr>
+          <p:cNvPr id="29" name="Text 27"/>
           <p:cNvSpPr/>
           <p:nvPr/>
         </p:nvSpPr>
@@ -3245,24 +3210,59 @@
       </p:sp>
       <p:sp>
         <p:nvSpPr>
-          <p:cNvPr id="3" name="Shape 1"/>
-          <p:cNvSpPr/>
-          <p:nvPr/>
-        </p:nvSpPr>
-        <p:spPr>
-          <a:xfrm>
-            <a:off x="731520" y="1920240"/>
-            <a:ext cx="10698480" cy="1965960"/>
-          </a:xfrm>
-          <a:prstGeom prst="roundRect">
-            <a:avLst>
-              <a:gd name="adj" fmla="val 4651"/>
-            </a:avLst>
-          </a:prstGeom>
-          <a:solidFill>
-            <a:srgbClr val="EFF3E9"/>
-          </a:solidFill>
-          <a:ln w="19050">
+          <p:cNvPr id="3" name="Text 1"/>
+          <p:cNvSpPr/>
+          <p:nvPr/>
+        </p:nvSpPr>
+        <p:spPr>
+          <a:xfrm>
+            <a:off x="731520" y="1965960"/>
+            <a:ext cx="2377440" cy="548640"/>
+          </a:xfrm>
+          <a:prstGeom prst="rect">
+            <a:avLst/>
+          </a:prstGeom>
+          <a:noFill/>
+          <a:ln/>
+        </p:spPr>
+        <p:txBody>
+          <a:bodyPr wrap="square" lIns="0" tIns="0" rIns="0" bIns="0" rtlCol="0" anchor="ctr"/>
+          <a:lstStyle/>
+          <a:p>
+            <a:pPr indent="0" marL="0">
+              <a:buNone/>
+            </a:pPr>
+            <a:r>
+              <a:rPr lang="en-US" sz="2300" b="1" dirty="0">
+                <a:solidFill>
+                  <a:srgbClr val="D9A62E"/>
+                </a:solidFill>
+                <a:latin typeface="Cambria" pitchFamily="34" charset="0"/>
+                <a:ea typeface="Cambria" pitchFamily="34" charset="-122"/>
+                <a:cs typeface="Cambria" pitchFamily="34" charset="-120"/>
+              </a:rPr>
+              <a:t>Problem</a:t>
+            </a:r>
+            <a:endParaRPr lang="en-US" sz="2300" dirty="0"/>
+          </a:p>
+        </p:txBody>
+      </p:sp>
+      <p:sp>
+        <p:nvSpPr>
+          <p:cNvPr id="4" name="Shape 2"/>
+          <p:cNvSpPr/>
+          <p:nvPr/>
+        </p:nvSpPr>
+        <p:spPr>
+          <a:xfrm>
+            <a:off x="3200400" y="1920240"/>
+            <a:ext cx="0" cy="1783080"/>
+          </a:xfrm>
+          <a:prstGeom prst="line">
+            <a:avLst/>
+          </a:prstGeom>
+          <a:noFill/>
+          <a:ln w="31750">
             <a:solidFill>
               <a:srgbClr val="D9A62E"/>
             </a:solidFill>
@@ -3272,14 +3272,14 @@
       </p:sp>
       <p:sp>
         <p:nvSpPr>
-          <p:cNvPr id="4" name="Text 2"/>
-          <p:cNvSpPr/>
-          <p:nvPr/>
-        </p:nvSpPr>
-        <p:spPr>
-          <a:xfrm>
-            <a:off x="1005840" y="2103120"/>
-            <a:ext cx="3657600" cy="457200"/>
+          <p:cNvPr id="5" name="Text 3"/>
+          <p:cNvSpPr/>
+          <p:nvPr/>
+        </p:nvSpPr>
+        <p:spPr>
+          <a:xfrm>
+            <a:off x="3474720" y="1920240"/>
+            <a:ext cx="7955280" cy="1920240"/>
           </a:xfrm>
           <a:prstGeom prst="rect">
             <a:avLst/>
@@ -3292,85 +3292,81 @@
           <a:lstStyle/>
           <a:p>
             <a:pPr indent="0" marL="0">
-              <a:buNone/>
-            </a:pPr>
-            <a:r>
-              <a:rPr lang="en-US" sz="1900" b="1" dirty="0">
-                <a:solidFill>
-                  <a:srgbClr val="D9A62E"/>
+              <a:lnSpc>
+                <a:spcPct val="112000"/>
+              </a:lnSpc>
+              <a:buNone/>
+            </a:pPr>
+            <a:r>
+              <a:rPr lang="en-US" sz="1450" dirty="0">
+                <a:solidFill>
+                  <a:srgbClr val="1C2617"/>
+                </a:solidFill>
+                <a:latin typeface="Calibri" pitchFamily="34" charset="0"/>
+                <a:ea typeface="Calibri" pitchFamily="34" charset="-122"/>
+                <a:cs typeface="Calibri" pitchFamily="34" charset="-120"/>
+              </a:rPr>
+              <a:t>The dashboard's stored-readings count came from a single DynamoDB scan. One scan call returns only about 1 MB of data and hands back a cursor for the rest, so the count silently stops short, and no error is raised anywhere. All 82 local tests and a full emulator run stayed green — a small local table fits in one page, so nothing could expose the missing pages.</a:t>
+            </a:r>
+            <a:endParaRPr lang="en-US" sz="1450" dirty="0"/>
+          </a:p>
+        </p:txBody>
+      </p:sp>
+      <p:sp>
+        <p:nvSpPr>
+          <p:cNvPr id="6" name="Text 4"/>
+          <p:cNvSpPr/>
+          <p:nvPr/>
+        </p:nvSpPr>
+        <p:spPr>
+          <a:xfrm>
+            <a:off x="731520" y="4114800"/>
+            <a:ext cx="2377440" cy="548640"/>
+          </a:xfrm>
+          <a:prstGeom prst="rect">
+            <a:avLst/>
+          </a:prstGeom>
+          <a:noFill/>
+          <a:ln/>
+        </p:spPr>
+        <p:txBody>
+          <a:bodyPr wrap="square" lIns="0" tIns="0" rIns="0" bIns="0" rtlCol="0" anchor="ctr"/>
+          <a:lstStyle/>
+          <a:p>
+            <a:pPr indent="0" marL="0">
+              <a:buNone/>
+            </a:pPr>
+            <a:r>
+              <a:rPr lang="en-US" sz="2300" b="1" dirty="0">
+                <a:solidFill>
+                  <a:srgbClr val="6A8F3C"/>
                 </a:solidFill>
                 <a:latin typeface="Cambria" pitchFamily="34" charset="0"/>
                 <a:ea typeface="Cambria" pitchFamily="34" charset="-122"/>
                 <a:cs typeface="Cambria" pitchFamily="34" charset="-120"/>
               </a:rPr>
-              <a:t>Problem</a:t>
-            </a:r>
-            <a:endParaRPr lang="en-US" sz="1900" dirty="0"/>
-          </a:p>
-        </p:txBody>
-      </p:sp>
-      <p:sp>
-        <p:nvSpPr>
-          <p:cNvPr id="5" name="Text 3"/>
-          <p:cNvSpPr/>
-          <p:nvPr/>
-        </p:nvSpPr>
-        <p:spPr>
-          <a:xfrm>
-            <a:off x="1005840" y="2578608"/>
-            <a:ext cx="9966960" cy="1188720"/>
-          </a:xfrm>
-          <a:prstGeom prst="rect">
-            <a:avLst/>
-          </a:prstGeom>
-          <a:noFill/>
-          <a:ln/>
-        </p:spPr>
-        <p:txBody>
-          <a:bodyPr wrap="square" lIns="0" tIns="0" rIns="0" bIns="0" rtlCol="0" anchor="ctr"/>
-          <a:lstStyle/>
-          <a:p>
-            <a:pPr indent="0" marL="0">
-              <a:lnSpc>
-                <a:spcPct val="105000"/>
-              </a:lnSpc>
-              <a:buNone/>
-            </a:pPr>
-            <a:r>
-              <a:rPr lang="en-US" sz="1300" dirty="0">
-                <a:solidFill>
-                  <a:srgbClr val="1C2617"/>
-                </a:solidFill>
-                <a:latin typeface="Calibri" pitchFamily="34" charset="0"/>
-                <a:ea typeface="Calibri" pitchFamily="34" charset="-122"/>
-                <a:cs typeface="Calibri" pitchFamily="34" charset="-120"/>
-              </a:rPr>
-              <a:t>The dashboard's stored-readings count came from a single DynamoDB scan. One scan call returns only about 1 MB of data and hands back a cursor for the rest, so the count silently stops short, and no error is raised anywhere. All 82 local tests and a full emulator run stayed green — a small local table fits in one page, so nothing could expose the missing pages.</a:t>
-            </a:r>
-            <a:endParaRPr lang="en-US" sz="1300" dirty="0"/>
-          </a:p>
-        </p:txBody>
-      </p:sp>
-      <p:sp>
-        <p:nvSpPr>
-          <p:cNvPr id="6" name="Shape 4"/>
-          <p:cNvSpPr/>
-          <p:nvPr/>
-        </p:nvSpPr>
-        <p:spPr>
-          <a:xfrm>
-            <a:off x="731520" y="4041648"/>
-            <a:ext cx="10698480" cy="1965960"/>
-          </a:xfrm>
-          <a:prstGeom prst="roundRect">
-            <a:avLst>
-              <a:gd name="adj" fmla="val 4651"/>
-            </a:avLst>
-          </a:prstGeom>
-          <a:solidFill>
-            <a:srgbClr val="EFF3E9"/>
-          </a:solidFill>
-          <a:ln w="19050">
+              <a:t>Solution</a:t>
+            </a:r>
+            <a:endParaRPr lang="en-US" sz="2300" dirty="0"/>
+          </a:p>
+        </p:txBody>
+      </p:sp>
+      <p:sp>
+        <p:nvSpPr>
+          <p:cNvPr id="7" name="Shape 5"/>
+          <p:cNvSpPr/>
+          <p:nvPr/>
+        </p:nvSpPr>
+        <p:spPr>
+          <a:xfrm>
+            <a:off x="3200400" y="4069080"/>
+            <a:ext cx="0" cy="1783080"/>
+          </a:xfrm>
+          <a:prstGeom prst="line">
+            <a:avLst/>
+          </a:prstGeom>
+          <a:noFill/>
+          <a:ln w="31750">
             <a:solidFill>
               <a:srgbClr val="6A8F3C"/>
             </a:solidFill>
@@ -3380,53 +3376,14 @@
       </p:sp>
       <p:sp>
         <p:nvSpPr>
-          <p:cNvPr id="7" name="Text 5"/>
-          <p:cNvSpPr/>
-          <p:nvPr/>
-        </p:nvSpPr>
-        <p:spPr>
-          <a:xfrm>
-            <a:off x="1005840" y="4224528"/>
-            <a:ext cx="3657600" cy="457200"/>
-          </a:xfrm>
-          <a:prstGeom prst="rect">
-            <a:avLst/>
-          </a:prstGeom>
-          <a:noFill/>
-          <a:ln/>
-        </p:spPr>
-        <p:txBody>
-          <a:bodyPr wrap="square" lIns="0" tIns="0" rIns="0" bIns="0" rtlCol="0" anchor="ctr"/>
-          <a:lstStyle/>
-          <a:p>
-            <a:pPr indent="0" marL="0">
-              <a:buNone/>
-            </a:pPr>
-            <a:r>
-              <a:rPr lang="en-US" sz="1900" b="1" dirty="0">
-                <a:solidFill>
-                  <a:srgbClr val="6A8F3C"/>
-                </a:solidFill>
-                <a:latin typeface="Cambria" pitchFamily="34" charset="0"/>
-                <a:ea typeface="Cambria" pitchFamily="34" charset="-122"/>
-                <a:cs typeface="Cambria" pitchFamily="34" charset="-120"/>
-              </a:rPr>
-              <a:t>Solution</a:t>
-            </a:r>
-            <a:endParaRPr lang="en-US" sz="1900" dirty="0"/>
-          </a:p>
-        </p:txBody>
-      </p:sp>
-      <p:sp>
-        <p:nvSpPr>
           <p:cNvPr id="8" name="Text 6"/>
           <p:cNvSpPr/>
           <p:nvPr/>
         </p:nvSpPr>
         <p:spPr>
           <a:xfrm>
-            <a:off x="1005840" y="4700016"/>
-            <a:ext cx="9966960" cy="1188720"/>
+            <a:off x="3474720" y="4069080"/>
+            <a:ext cx="7955280" cy="1920240"/>
           </a:xfrm>
           <a:prstGeom prst="rect">
             <a:avLst/>
@@ -3440,12 +3397,12 @@
           <a:p>
             <a:pPr indent="0" marL="0">
               <a:lnSpc>
-                <a:spcPct val="105000"/>
+                <a:spcPct val="112000"/>
               </a:lnSpc>
               <a:buNone/>
             </a:pPr>
             <a:r>
-              <a:rPr lang="en-US" sz="1300" dirty="0">
+              <a:rPr lang="en-US" sz="1450" dirty="0">
                 <a:solidFill>
                   <a:srgbClr val="1C2617"/>
                 </a:solidFill>
@@ -3455,7 +3412,7 @@
               </a:rPr>
               <a:t>The count now follows the cursor page by page with the SDK's own paginator, locked in by a four-page regression test that sums 1,287 items across four pages, and re-verified against the live account. The same audit also caught unbatched SQS sends, now grouped ten per call.</a:t>
             </a:r>
-            <a:endParaRPr lang="en-US" sz="1300" dirty="0"/>
+            <a:endParaRPr lang="en-US" sz="1450" dirty="0"/>
           </a:p>
         </p:txBody>
       </p:sp>

--- a/ppt/HrishikeshSajeev_X25132377_wildlife-conservation-monitoring.pptx
+++ b/ppt/HrishikeshSajeev_X25132377_wildlife-conservation-monitoring.pptx
@@ -2605,12 +2605,12 @@
         </p:nvSpPr>
         <p:spPr>
           <a:xfrm>
-            <a:off x="640080" y="1874520"/>
-            <a:ext cx="3502152" cy="3657600"/>
+            <a:off x="640080" y="1828800"/>
+            <a:ext cx="10881360" cy="1371600"/>
           </a:xfrm>
           <a:prstGeom prst="roundRect">
             <a:avLst>
-              <a:gd name="adj" fmla="val 2611"/>
+              <a:gd name="adj" fmla="val 6667"/>
             </a:avLst>
           </a:prstGeom>
           <a:solidFill>
@@ -2632,8 +2632,8 @@
         </p:nvSpPr>
         <p:spPr>
           <a:xfrm>
-            <a:off x="914400" y="2194560"/>
-            <a:ext cx="640080" cy="640080"/>
+            <a:off x="960120" y="2203704"/>
+            <a:ext cx="621792" cy="621792"/>
           </a:xfrm>
           <a:prstGeom prst="ellipse">
             <a:avLst/>
@@ -2652,8 +2652,8 @@
         </p:nvSpPr>
         <p:spPr>
           <a:xfrm>
-            <a:off x="914400" y="2194560"/>
-            <a:ext cx="640080" cy="640080"/>
+            <a:off x="960120" y="2203704"/>
+            <a:ext cx="621792" cy="621792"/>
           </a:xfrm>
           <a:prstGeom prst="rect">
             <a:avLst/>
@@ -2669,7 +2669,7 @@
               <a:buNone/>
             </a:pPr>
             <a:r>
-              <a:rPr lang="en-US" sz="2400" b="1" dirty="0">
+              <a:rPr lang="en-US" sz="2200" b="1" dirty="0">
                 <a:solidFill>
                   <a:srgbClr val="FFFFFF"/>
                 </a:solidFill>
@@ -2679,7 +2679,7 @@
               </a:rPr>
               <a:t>1</a:t>
             </a:r>
-            <a:endParaRPr lang="en-US" sz="2400" dirty="0"/>
+            <a:endParaRPr lang="en-US" sz="2200" dirty="0"/>
           </a:p>
         </p:txBody>
       </p:sp>
@@ -2691,8 +2691,8 @@
         </p:nvSpPr>
         <p:spPr>
           <a:xfrm>
-            <a:off x="914400" y="3017520"/>
-            <a:ext cx="2953512" cy="822960"/>
+            <a:off x="1828800" y="2029968"/>
+            <a:ext cx="9418320" cy="411480"/>
           </a:xfrm>
           <a:prstGeom prst="rect">
             <a:avLst/>
@@ -2730,8 +2730,8 @@
         </p:nvSpPr>
         <p:spPr>
           <a:xfrm>
-            <a:off x="914400" y="3794760"/>
-            <a:ext cx="2953512" cy="1554480"/>
+            <a:off x="1828800" y="2450592"/>
+            <a:ext cx="9418320" cy="594360"/>
           </a:xfrm>
           <a:prstGeom prst="rect">
             <a:avLst/>
@@ -2772,12 +2772,12 @@
         </p:nvSpPr>
         <p:spPr>
           <a:xfrm>
-            <a:off x="4416552" y="1874520"/>
-            <a:ext cx="3502152" cy="3657600"/>
+            <a:off x="640080" y="3346704"/>
+            <a:ext cx="10881360" cy="1371600"/>
           </a:xfrm>
           <a:prstGeom prst="roundRect">
             <a:avLst>
-              <a:gd name="adj" fmla="val 2611"/>
+              <a:gd name="adj" fmla="val 6667"/>
             </a:avLst>
           </a:prstGeom>
           <a:solidFill>
@@ -2799,8 +2799,8 @@
         </p:nvSpPr>
         <p:spPr>
           <a:xfrm>
-            <a:off x="4690872" y="2194560"/>
-            <a:ext cx="640080" cy="640080"/>
+            <a:off x="960120" y="3721608"/>
+            <a:ext cx="621792" cy="621792"/>
           </a:xfrm>
           <a:prstGeom prst="ellipse">
             <a:avLst/>
@@ -2819,8 +2819,8 @@
         </p:nvSpPr>
         <p:spPr>
           <a:xfrm>
-            <a:off x="4690872" y="2194560"/>
-            <a:ext cx="640080" cy="640080"/>
+            <a:off x="960120" y="3721608"/>
+            <a:ext cx="621792" cy="621792"/>
           </a:xfrm>
           <a:prstGeom prst="rect">
             <a:avLst/>
@@ -2836,7 +2836,7 @@
               <a:buNone/>
             </a:pPr>
             <a:r>
-              <a:rPr lang="en-US" sz="2400" b="1" dirty="0">
+              <a:rPr lang="en-US" sz="2200" b="1" dirty="0">
                 <a:solidFill>
                   <a:srgbClr val="FFFFFF"/>
                 </a:solidFill>
@@ -2846,7 +2846,7 @@
               </a:rPr>
               <a:t>2</a:t>
             </a:r>
-            <a:endParaRPr lang="en-US" sz="2400" dirty="0"/>
+            <a:endParaRPr lang="en-US" sz="2200" dirty="0"/>
           </a:p>
         </p:txBody>
       </p:sp>
@@ -2858,8 +2858,8 @@
         </p:nvSpPr>
         <p:spPr>
           <a:xfrm>
-            <a:off x="4690872" y="3017520"/>
-            <a:ext cx="2953512" cy="822960"/>
+            <a:off x="1828800" y="3547872"/>
+            <a:ext cx="9418320" cy="411480"/>
           </a:xfrm>
           <a:prstGeom prst="rect">
             <a:avLst/>
@@ -2897,8 +2897,8 @@
         </p:nvSpPr>
         <p:spPr>
           <a:xfrm>
-            <a:off x="4690872" y="3794760"/>
-            <a:ext cx="2953512" cy="1554480"/>
+            <a:off x="1828800" y="3968496"/>
+            <a:ext cx="9418320" cy="594360"/>
           </a:xfrm>
           <a:prstGeom prst="rect">
             <a:avLst/>
@@ -2939,12 +2939,12 @@
         </p:nvSpPr>
         <p:spPr>
           <a:xfrm>
-            <a:off x="8193024" y="1874520"/>
-            <a:ext cx="3502152" cy="3657600"/>
+            <a:off x="640080" y="4864608"/>
+            <a:ext cx="10881360" cy="1371600"/>
           </a:xfrm>
           <a:prstGeom prst="roundRect">
             <a:avLst>
-              <a:gd name="adj" fmla="val 2611"/>
+              <a:gd name="adj" fmla="val 6667"/>
             </a:avLst>
           </a:prstGeom>
           <a:solidFill>
@@ -2966,8 +2966,8 @@
         </p:nvSpPr>
         <p:spPr>
           <a:xfrm>
-            <a:off x="8467344" y="2194560"/>
-            <a:ext cx="640080" cy="640080"/>
+            <a:off x="960120" y="5239512"/>
+            <a:ext cx="621792" cy="621792"/>
           </a:xfrm>
           <a:prstGeom prst="ellipse">
             <a:avLst/>
@@ -2986,8 +2986,8 @@
         </p:nvSpPr>
         <p:spPr>
           <a:xfrm>
-            <a:off x="8467344" y="2194560"/>
-            <a:ext cx="640080" cy="640080"/>
+            <a:off x="960120" y="5239512"/>
+            <a:ext cx="621792" cy="621792"/>
           </a:xfrm>
           <a:prstGeom prst="rect">
             <a:avLst/>
@@ -3003,7 +3003,7 @@
               <a:buNone/>
             </a:pPr>
             <a:r>
-              <a:rPr lang="en-US" sz="2400" b="1" dirty="0">
+              <a:rPr lang="en-US" sz="2200" b="1" dirty="0">
                 <a:solidFill>
                   <a:srgbClr val="FFFFFF"/>
                 </a:solidFill>
@@ -3013,7 +3013,7 @@
               </a:rPr>
               <a:t>3</a:t>
             </a:r>
-            <a:endParaRPr lang="en-US" sz="2400" dirty="0"/>
+            <a:endParaRPr lang="en-US" sz="2200" dirty="0"/>
           </a:p>
         </p:txBody>
       </p:sp>
@@ -3025,8 +3025,8 @@
         </p:nvSpPr>
         <p:spPr>
           <a:xfrm>
-            <a:off x="8467344" y="3017520"/>
-            <a:ext cx="2953512" cy="822960"/>
+            <a:off x="1828800" y="5065776"/>
+            <a:ext cx="9418320" cy="411480"/>
           </a:xfrm>
           <a:prstGeom prst="rect">
             <a:avLst/>
@@ -3064,8 +3064,8 @@
         </p:nvSpPr>
         <p:spPr>
           <a:xfrm>
-            <a:off x="8467344" y="3794760"/>
-            <a:ext cx="2953512" cy="1554480"/>
+            <a:off x="1828800" y="5486400"/>
+            <a:ext cx="9418320" cy="594360"/>
           </a:xfrm>
           <a:prstGeom prst="rect">
             <a:avLst/>
@@ -3093,45 +3093,6 @@
                 <a:cs typeface="Calibri" pitchFamily="34" charset="-120"/>
               </a:rPr>
               <a:t>The flags trip on genuine breaches, and the stored count climbs 362 to 378 in fifteen seconds during the check.</a:t>
-            </a:r>
-            <a:endParaRPr lang="en-US" sz="1300" dirty="0"/>
-          </a:p>
-        </p:txBody>
-      </p:sp>
-      <p:sp>
-        <p:nvSpPr>
-          <p:cNvPr id="19" name="Text 17"/>
-          <p:cNvSpPr/>
-          <p:nvPr/>
-        </p:nvSpPr>
-        <p:spPr>
-          <a:xfrm>
-            <a:off x="640080" y="6263640"/>
-            <a:ext cx="10972800" cy="365760"/>
-          </a:xfrm>
-          <a:prstGeom prst="rect">
-            <a:avLst/>
-          </a:prstGeom>
-          <a:noFill/>
-          <a:ln/>
-        </p:spPr>
-        <p:txBody>
-          <a:bodyPr wrap="square" rtlCol="0" anchor="ctr"/>
-          <a:lstStyle/>
-          <a:p>
-            <a:pPr indent="0" marL="0">
-              <a:buNone/>
-            </a:pPr>
-            <a:r>
-              <a:rPr lang="en-US" sz="1300" i="1" dirty="0">
-                <a:solidFill>
-                  <a:srgbClr val="8CA85E"/>
-                </a:solidFill>
-                <a:latin typeface="Calibri" pitchFamily="34" charset="0"/>
-                <a:ea typeface="Calibri" pitchFamily="34" charset="-122"/>
-                <a:cs typeface="Calibri" pitchFamily="34" charset="-120"/>
-              </a:rPr>
-              <a:t>Switch to the live dashboard here — backup video ready.</a:t>
             </a:r>
             <a:endParaRPr lang="en-US" sz="1300" dirty="0"/>
           </a:p>
@@ -3210,59 +3171,24 @@
       </p:sp>
       <p:sp>
         <p:nvSpPr>
-          <p:cNvPr id="3" name="Text 1"/>
-          <p:cNvSpPr/>
-          <p:nvPr/>
-        </p:nvSpPr>
-        <p:spPr>
-          <a:xfrm>
-            <a:off x="731520" y="1965960"/>
-            <a:ext cx="2377440" cy="548640"/>
-          </a:xfrm>
-          <a:prstGeom prst="rect">
-            <a:avLst/>
-          </a:prstGeom>
-          <a:noFill/>
-          <a:ln/>
-        </p:spPr>
-        <p:txBody>
-          <a:bodyPr wrap="square" lIns="0" tIns="0" rIns="0" bIns="0" rtlCol="0" anchor="ctr"/>
-          <a:lstStyle/>
-          <a:p>
-            <a:pPr indent="0" marL="0">
-              <a:buNone/>
-            </a:pPr>
-            <a:r>
-              <a:rPr lang="en-US" sz="2300" b="1" dirty="0">
-                <a:solidFill>
-                  <a:srgbClr val="D9A62E"/>
-                </a:solidFill>
-                <a:latin typeface="Cambria" pitchFamily="34" charset="0"/>
-                <a:ea typeface="Cambria" pitchFamily="34" charset="-122"/>
-                <a:cs typeface="Cambria" pitchFamily="34" charset="-120"/>
-              </a:rPr>
-              <a:t>Problem</a:t>
-            </a:r>
-            <a:endParaRPr lang="en-US" sz="2300" dirty="0"/>
-          </a:p>
-        </p:txBody>
-      </p:sp>
-      <p:sp>
-        <p:nvSpPr>
-          <p:cNvPr id="4" name="Shape 2"/>
-          <p:cNvSpPr/>
-          <p:nvPr/>
-        </p:nvSpPr>
-        <p:spPr>
-          <a:xfrm>
-            <a:off x="3200400" y="1920240"/>
-            <a:ext cx="0" cy="1783080"/>
-          </a:xfrm>
-          <a:prstGeom prst="line">
-            <a:avLst/>
-          </a:prstGeom>
-          <a:noFill/>
-          <a:ln w="31750">
+          <p:cNvPr id="3" name="Shape 1"/>
+          <p:cNvSpPr/>
+          <p:nvPr/>
+        </p:nvSpPr>
+        <p:spPr>
+          <a:xfrm>
+            <a:off x="640080" y="1874520"/>
+            <a:ext cx="4937760" cy="4160520"/>
+          </a:xfrm>
+          <a:prstGeom prst="roundRect">
+            <a:avLst>
+              <a:gd name="adj" fmla="val 2198"/>
+            </a:avLst>
+          </a:prstGeom>
+          <a:solidFill>
+            <a:srgbClr val="EFF3E9"/>
+          </a:solidFill>
+          <a:ln w="19050">
             <a:solidFill>
               <a:srgbClr val="D9A62E"/>
             </a:solidFill>
@@ -3272,14 +3198,53 @@
       </p:sp>
       <p:sp>
         <p:nvSpPr>
+          <p:cNvPr id="4" name="Text 2"/>
+          <p:cNvSpPr/>
+          <p:nvPr/>
+        </p:nvSpPr>
+        <p:spPr>
+          <a:xfrm>
+            <a:off x="960120" y="2103120"/>
+            <a:ext cx="3657600" cy="457200"/>
+          </a:xfrm>
+          <a:prstGeom prst="rect">
+            <a:avLst/>
+          </a:prstGeom>
+          <a:noFill/>
+          <a:ln/>
+        </p:spPr>
+        <p:txBody>
+          <a:bodyPr wrap="square" lIns="0" tIns="0" rIns="0" bIns="0" rtlCol="0" anchor="ctr"/>
+          <a:lstStyle/>
+          <a:p>
+            <a:pPr indent="0" marL="0">
+              <a:buNone/>
+            </a:pPr>
+            <a:r>
+              <a:rPr lang="en-US" sz="1900" b="1" dirty="0">
+                <a:solidFill>
+                  <a:srgbClr val="D9A62E"/>
+                </a:solidFill>
+                <a:latin typeface="Cambria" pitchFamily="34" charset="0"/>
+                <a:ea typeface="Cambria" pitchFamily="34" charset="-122"/>
+                <a:cs typeface="Cambria" pitchFamily="34" charset="-120"/>
+              </a:rPr>
+              <a:t>Problem</a:t>
+            </a:r>
+            <a:endParaRPr lang="en-US" sz="1900" dirty="0"/>
+          </a:p>
+        </p:txBody>
+      </p:sp>
+      <p:sp>
+        <p:nvSpPr>
           <p:cNvPr id="5" name="Text 3"/>
           <p:cNvSpPr/>
           <p:nvPr/>
         </p:nvSpPr>
         <p:spPr>
           <a:xfrm>
-            <a:off x="3474720" y="1920240"/>
-            <a:ext cx="7955280" cy="1920240"/>
+            <a:off x="960120" y="2651760"/>
+            <a:ext cx="4343400" cy="3200400"/>
           </a:xfrm>
           <a:prstGeom prst="rect">
             <a:avLst/>
@@ -3298,7 +3263,7 @@
               <a:buNone/>
             </a:pPr>
             <a:r>
-              <a:rPr lang="en-US" sz="1450" dirty="0">
+              <a:rPr lang="en-US" sz="1350" dirty="0">
                 <a:solidFill>
                   <a:srgbClr val="1C2617"/>
                 </a:solidFill>
@@ -3308,65 +3273,30 @@
               </a:rPr>
               <a:t>The dashboard's stored-readings count came from a single DynamoDB scan. One scan call returns only about 1 MB of data and hands back a cursor for the rest, so the count silently stops short, and no error is raised anywhere. All 82 local tests and a full emulator run stayed green — a small local table fits in one page, so nothing could expose the missing pages.</a:t>
             </a:r>
-            <a:endParaRPr lang="en-US" sz="1450" dirty="0"/>
-          </a:p>
-        </p:txBody>
-      </p:sp>
-      <p:sp>
-        <p:nvSpPr>
-          <p:cNvPr id="6" name="Text 4"/>
-          <p:cNvSpPr/>
-          <p:nvPr/>
-        </p:nvSpPr>
-        <p:spPr>
-          <a:xfrm>
-            <a:off x="731520" y="4114800"/>
-            <a:ext cx="2377440" cy="548640"/>
-          </a:xfrm>
-          <a:prstGeom prst="rect">
-            <a:avLst/>
-          </a:prstGeom>
-          <a:noFill/>
-          <a:ln/>
-        </p:spPr>
-        <p:txBody>
-          <a:bodyPr wrap="square" lIns="0" tIns="0" rIns="0" bIns="0" rtlCol="0" anchor="ctr"/>
-          <a:lstStyle/>
-          <a:p>
-            <a:pPr indent="0" marL="0">
-              <a:buNone/>
-            </a:pPr>
-            <a:r>
-              <a:rPr lang="en-US" sz="2300" b="1" dirty="0">
-                <a:solidFill>
-                  <a:srgbClr val="6A8F3C"/>
-                </a:solidFill>
-                <a:latin typeface="Cambria" pitchFamily="34" charset="0"/>
-                <a:ea typeface="Cambria" pitchFamily="34" charset="-122"/>
-                <a:cs typeface="Cambria" pitchFamily="34" charset="-120"/>
-              </a:rPr>
-              <a:t>Solution</a:t>
-            </a:r>
-            <a:endParaRPr lang="en-US" sz="2300" dirty="0"/>
-          </a:p>
-        </p:txBody>
-      </p:sp>
-      <p:sp>
-        <p:nvSpPr>
-          <p:cNvPr id="7" name="Shape 5"/>
-          <p:cNvSpPr/>
-          <p:nvPr/>
-        </p:nvSpPr>
-        <p:spPr>
-          <a:xfrm>
-            <a:off x="3200400" y="4069080"/>
-            <a:ext cx="0" cy="1783080"/>
-          </a:xfrm>
-          <a:prstGeom prst="line">
-            <a:avLst/>
-          </a:prstGeom>
-          <a:noFill/>
-          <a:ln w="31750">
+            <a:endParaRPr lang="en-US" sz="1350" dirty="0"/>
+          </a:p>
+        </p:txBody>
+      </p:sp>
+      <p:sp>
+        <p:nvSpPr>
+          <p:cNvPr id="6" name="Shape 4"/>
+          <p:cNvSpPr/>
+          <p:nvPr/>
+        </p:nvSpPr>
+        <p:spPr>
+          <a:xfrm>
+            <a:off x="6611112" y="1874520"/>
+            <a:ext cx="4937760" cy="4160520"/>
+          </a:xfrm>
+          <a:prstGeom prst="roundRect">
+            <a:avLst>
+              <a:gd name="adj" fmla="val 2198"/>
+            </a:avLst>
+          </a:prstGeom>
+          <a:solidFill>
+            <a:srgbClr val="EFF3E9"/>
+          </a:solidFill>
+          <a:ln w="19050">
             <a:solidFill>
               <a:srgbClr val="6A8F3C"/>
             </a:solidFill>
@@ -3376,14 +3306,53 @@
       </p:sp>
       <p:sp>
         <p:nvSpPr>
+          <p:cNvPr id="7" name="Text 5"/>
+          <p:cNvSpPr/>
+          <p:nvPr/>
+        </p:nvSpPr>
+        <p:spPr>
+          <a:xfrm>
+            <a:off x="6931152" y="2103120"/>
+            <a:ext cx="3657600" cy="457200"/>
+          </a:xfrm>
+          <a:prstGeom prst="rect">
+            <a:avLst/>
+          </a:prstGeom>
+          <a:noFill/>
+          <a:ln/>
+        </p:spPr>
+        <p:txBody>
+          <a:bodyPr wrap="square" lIns="0" tIns="0" rIns="0" bIns="0" rtlCol="0" anchor="ctr"/>
+          <a:lstStyle/>
+          <a:p>
+            <a:pPr indent="0" marL="0">
+              <a:buNone/>
+            </a:pPr>
+            <a:r>
+              <a:rPr lang="en-US" sz="1900" b="1" dirty="0">
+                <a:solidFill>
+                  <a:srgbClr val="6A8F3C"/>
+                </a:solidFill>
+                <a:latin typeface="Cambria" pitchFamily="34" charset="0"/>
+                <a:ea typeface="Cambria" pitchFamily="34" charset="-122"/>
+                <a:cs typeface="Cambria" pitchFamily="34" charset="-120"/>
+              </a:rPr>
+              <a:t>Solution</a:t>
+            </a:r>
+            <a:endParaRPr lang="en-US" sz="1900" dirty="0"/>
+          </a:p>
+        </p:txBody>
+      </p:sp>
+      <p:sp>
+        <p:nvSpPr>
           <p:cNvPr id="8" name="Text 6"/>
           <p:cNvSpPr/>
           <p:nvPr/>
         </p:nvSpPr>
         <p:spPr>
           <a:xfrm>
-            <a:off x="3474720" y="4069080"/>
-            <a:ext cx="7955280" cy="1920240"/>
+            <a:off x="6931152" y="2651760"/>
+            <a:ext cx="4343400" cy="3200400"/>
           </a:xfrm>
           <a:prstGeom prst="rect">
             <a:avLst/>
@@ -3402,7 +3371,7 @@
               <a:buNone/>
             </a:pPr>
             <a:r>
-              <a:rPr lang="en-US" sz="1450" dirty="0">
+              <a:rPr lang="en-US" sz="1350" dirty="0">
                 <a:solidFill>
                   <a:srgbClr val="1C2617"/>
                 </a:solidFill>
@@ -3412,9 +3381,29 @@
               </a:rPr>
               <a:t>The count now follows the cursor page by page with the SDK's own paginator, locked in by a four-page regression test that sums 1,287 items across four pages, and re-verified against the live account. The same audit also caught unbatched SQS sends, now grouped ten per call.</a:t>
             </a:r>
-            <a:endParaRPr lang="en-US" sz="1450" dirty="0"/>
-          </a:p>
-        </p:txBody>
+            <a:endParaRPr lang="en-US" sz="1350" dirty="0"/>
+          </a:p>
+        </p:txBody>
+      </p:sp>
+      <p:sp>
+        <p:nvSpPr>
+          <p:cNvPr id="9" name="Shape 7"/>
+          <p:cNvSpPr/>
+          <p:nvPr/>
+        </p:nvSpPr>
+        <p:spPr>
+          <a:xfrm>
+            <a:off x="5669280" y="3703320"/>
+            <a:ext cx="841248" cy="512064"/>
+          </a:xfrm>
+          <a:prstGeom prst="rightArrow">
+            <a:avLst/>
+          </a:prstGeom>
+          <a:solidFill>
+            <a:srgbClr val="4B6B2A"/>
+          </a:solidFill>
+          <a:ln/>
+        </p:spPr>
       </p:sp>
     </p:spTree>
   </p:cSld>

--- a/ppt/HrishikeshSajeev_X25132377_wildlife-conservation-monitoring.pptx
+++ b/ppt/HrishikeshSajeev_X25132377_wildlife-conservation-monitoring.pptx
@@ -1290,23 +1290,16 @@
         </p:nvSpPr>
         <p:spPr>
           <a:xfrm>
-            <a:off x="658368" y="5577840"/>
-            <a:ext cx="2651760" cy="566928"/>
-          </a:xfrm>
-          <a:prstGeom prst="roundRect">
-            <a:avLst>
-              <a:gd name="adj" fmla="val 50000"/>
-            </a:avLst>
-          </a:prstGeom>
-          <a:solidFill>
-            <a:srgbClr val="263219"/>
-          </a:solidFill>
-          <a:ln w="12700">
-            <a:solidFill>
-              <a:srgbClr val="D9A62E"/>
-            </a:solidFill>
-            <a:prstDash val="solid"/>
-          </a:ln>
+            <a:off x="658368" y="5724144"/>
+            <a:ext cx="146304" cy="146304"/>
+          </a:xfrm>
+          <a:prstGeom prst="rect">
+            <a:avLst/>
+          </a:prstGeom>
+          <a:solidFill>
+            <a:srgbClr val="6A8F3C"/>
+          </a:solidFill>
+          <a:ln/>
         </p:spPr>
       </p:sp>
       <p:sp>
@@ -1317,8 +1310,8 @@
         </p:nvSpPr>
         <p:spPr>
           <a:xfrm>
-            <a:off x="658368" y="5577840"/>
-            <a:ext cx="2651760" cy="566928"/>
+            <a:off x="932688" y="5577840"/>
+            <a:ext cx="2560320" cy="457200"/>
           </a:xfrm>
           <a:prstGeom prst="rect">
             <a:avLst/>
@@ -1330,13 +1323,13 @@
           <a:bodyPr wrap="square" lIns="0" tIns="0" rIns="0" bIns="0" rtlCol="0" anchor="ctr"/>
           <a:lstStyle/>
           <a:p>
-            <a:pPr algn="ctr" indent="0" marL="0">
-              <a:buNone/>
-            </a:pPr>
-            <a:r>
-              <a:rPr lang="en-US" sz="1350" b="1" dirty="0">
-                <a:solidFill>
-                  <a:srgbClr val="D9A62E"/>
+            <a:pPr indent="0" marL="0">
+              <a:buNone/>
+            </a:pPr>
+            <a:r>
+              <a:rPr lang="en-US" sz="1400" b="1" dirty="0">
+                <a:solidFill>
+                  <a:srgbClr val="D6E2C6"/>
                 </a:solidFill>
                 <a:latin typeface="Calibri" pitchFamily="34" charset="0"/>
                 <a:ea typeface="Calibri" pitchFamily="34" charset="-122"/>
@@ -1344,7 +1337,7 @@
               </a:rPr>
               <a:t>Acoustic &gt; 75 dB</a:t>
             </a:r>
-            <a:endParaRPr lang="en-US" sz="1350" dirty="0"/>
+            <a:endParaRPr lang="en-US" sz="1400" dirty="0"/>
           </a:p>
         </p:txBody>
       </p:sp>
@@ -1356,23 +1349,16 @@
         </p:nvSpPr>
         <p:spPr>
           <a:xfrm>
-            <a:off x="3538728" y="5577840"/>
-            <a:ext cx="2651760" cy="566928"/>
-          </a:xfrm>
-          <a:prstGeom prst="roundRect">
-            <a:avLst>
-              <a:gd name="adj" fmla="val 50000"/>
-            </a:avLst>
-          </a:prstGeom>
-          <a:solidFill>
-            <a:srgbClr val="263219"/>
-          </a:solidFill>
-          <a:ln w="12700">
-            <a:solidFill>
-              <a:srgbClr val="D9A62E"/>
-            </a:solidFill>
-            <a:prstDash val="solid"/>
-          </a:ln>
+            <a:off x="3538728" y="5724144"/>
+            <a:ext cx="146304" cy="146304"/>
+          </a:xfrm>
+          <a:prstGeom prst="rect">
+            <a:avLst/>
+          </a:prstGeom>
+          <a:solidFill>
+            <a:srgbClr val="6A8F3C"/>
+          </a:solidFill>
+          <a:ln/>
         </p:spPr>
       </p:sp>
       <p:sp>
@@ -1383,8 +1369,8 @@
         </p:nvSpPr>
         <p:spPr>
           <a:xfrm>
-            <a:off x="3538728" y="5577840"/>
-            <a:ext cx="2651760" cy="566928"/>
+            <a:off x="3813048" y="5577840"/>
+            <a:ext cx="2560320" cy="457200"/>
           </a:xfrm>
           <a:prstGeom prst="rect">
             <a:avLst/>
@@ -1396,13 +1382,13 @@
           <a:bodyPr wrap="square" lIns="0" tIns="0" rIns="0" bIns="0" rtlCol="0" anchor="ctr"/>
           <a:lstStyle/>
           <a:p>
-            <a:pPr algn="ctr" indent="0" marL="0">
-              <a:buNone/>
-            </a:pPr>
-            <a:r>
-              <a:rPr lang="en-US" sz="1350" b="1" dirty="0">
-                <a:solidFill>
-                  <a:srgbClr val="D9A62E"/>
+            <a:pPr indent="0" marL="0">
+              <a:buNone/>
+            </a:pPr>
+            <a:r>
+              <a:rPr lang="en-US" sz="1400" b="1" dirty="0">
+                <a:solidFill>
+                  <a:srgbClr val="D6E2C6"/>
                 </a:solidFill>
                 <a:latin typeface="Calibri" pitchFamily="34" charset="0"/>
                 <a:ea typeface="Calibri" pitchFamily="34" charset="-122"/>
@@ -1410,7 +1396,7 @@
               </a:rPr>
               <a:t>Waterhole &lt; 20 cm</a:t>
             </a:r>
-            <a:endParaRPr lang="en-US" sz="1350" dirty="0"/>
+            <a:endParaRPr lang="en-US" sz="1400" dirty="0"/>
           </a:p>
         </p:txBody>
       </p:sp>
@@ -1422,23 +1408,16 @@
         </p:nvSpPr>
         <p:spPr>
           <a:xfrm>
-            <a:off x="6419088" y="5577840"/>
-            <a:ext cx="2651760" cy="566928"/>
-          </a:xfrm>
-          <a:prstGeom prst="roundRect">
-            <a:avLst>
-              <a:gd name="adj" fmla="val 50000"/>
-            </a:avLst>
-          </a:prstGeom>
-          <a:solidFill>
-            <a:srgbClr val="263219"/>
-          </a:solidFill>
-          <a:ln w="12700">
-            <a:solidFill>
-              <a:srgbClr val="D9A62E"/>
-            </a:solidFill>
-            <a:prstDash val="solid"/>
-          </a:ln>
+            <a:off x="6419088" y="5724144"/>
+            <a:ext cx="146304" cy="146304"/>
+          </a:xfrm>
+          <a:prstGeom prst="rect">
+            <a:avLst/>
+          </a:prstGeom>
+          <a:solidFill>
+            <a:srgbClr val="6A8F3C"/>
+          </a:solidFill>
+          <a:ln/>
         </p:spPr>
       </p:sp>
       <p:sp>
@@ -1449,8 +1428,8 @@
         </p:nvSpPr>
         <p:spPr>
           <a:xfrm>
-            <a:off x="6419088" y="5577840"/>
-            <a:ext cx="2651760" cy="566928"/>
+            <a:off x="6693408" y="5577840"/>
+            <a:ext cx="2560320" cy="457200"/>
           </a:xfrm>
           <a:prstGeom prst="rect">
             <a:avLst/>
@@ -1462,13 +1441,13 @@
           <a:bodyPr wrap="square" lIns="0" tIns="0" rIns="0" bIns="0" rtlCol="0" anchor="ctr"/>
           <a:lstStyle/>
           <a:p>
-            <a:pPr algn="ctr" indent="0" marL="0">
-              <a:buNone/>
-            </a:pPr>
-            <a:r>
-              <a:rPr lang="en-US" sz="1350" b="1" dirty="0">
-                <a:solidFill>
-                  <a:srgbClr val="D9A62E"/>
+            <a:pPr indent="0" marL="0">
+              <a:buNone/>
+            </a:pPr>
+            <a:r>
+              <a:rPr lang="en-US" sz="1400" b="1" dirty="0">
+                <a:solidFill>
+                  <a:srgbClr val="D6E2C6"/>
                 </a:solidFill>
                 <a:latin typeface="Calibri" pitchFamily="34" charset="0"/>
                 <a:ea typeface="Calibri" pitchFamily="34" charset="-122"/>
@@ -1476,7 +1455,7 @@
               </a:rPr>
               <a:t>4 rules at the edge</a:t>
             </a:r>
-            <a:endParaRPr lang="en-US" sz="1350" dirty="0"/>
+            <a:endParaRPr lang="en-US" sz="1400" dirty="0"/>
           </a:p>
         </p:txBody>
       </p:sp>
@@ -1504,17 +1483,6 @@
             <a:pPr indent="0" marL="0">
               <a:buNone/>
             </a:pPr>
-            <a:r>
-              <a:rPr lang="en-US" sz="1250" dirty="0">
-                <a:solidFill>
-                  <a:srgbClr val="606E50"/>
-                </a:solidFill>
-                <a:latin typeface="Calibri" pitchFamily="34" charset="0"/>
-                <a:ea typeface="Calibri" pitchFamily="34" charset="-122"/>
-                <a:cs typeface="Calibri" pitchFamily="34" charset="-120"/>
-              </a:rPr>
-              <a:t>Fog &amp; Edge Computing (H9FECC)   ·   deployed live on AWS</a:t>
-            </a:r>
             <a:endParaRPr lang="en-US" sz="1250" dirty="0"/>
           </a:p>
         </p:txBody>

--- a/ppt/HrishikeshSajeev_X25132377_wildlife-conservation-monitoring.pptx
+++ b/ppt/HrishikeshSajeev_X25132377_wildlife-conservation-monitoring.pptx
@@ -1124,7 +1124,7 @@
     <p:bg>
       <p:bgPr>
         <a:solidFill>
-          <a:srgbClr val="1C2618"/>
+          <a:srgbClr val="203127"/>
         </a:solidFill>
       </p:bgPr>
     </p:bg>
@@ -1150,28 +1150,148 @@
         </p:nvSpPr>
         <p:spPr>
           <a:xfrm>
-            <a:off x="0" y="0"/>
-            <a:ext cx="12191695" cy="3931920"/>
-          </a:xfrm>
-          <a:prstGeom prst="rect">
-            <a:avLst/>
-          </a:prstGeom>
-          <a:solidFill>
-            <a:srgbClr val="4B6B2A"/>
-          </a:solidFill>
-          <a:ln/>
-        </p:spPr>
-      </p:sp>
-      <p:sp>
-        <p:nvSpPr>
-          <p:cNvPr id="3" name="Text 1"/>
-          <p:cNvSpPr/>
-          <p:nvPr/>
-        </p:nvSpPr>
-        <p:spPr>
-          <a:xfrm>
-            <a:off x="640080" y="1005840"/>
-            <a:ext cx="10972800" cy="1554480"/>
+            <a:off x="10881360" y="640080"/>
+            <a:ext cx="91440" cy="91440"/>
+          </a:xfrm>
+          <a:prstGeom prst="ellipse">
+            <a:avLst/>
+          </a:prstGeom>
+          <a:solidFill>
+            <a:srgbClr val="A5501F"/>
+          </a:solidFill>
+          <a:ln/>
+        </p:spPr>
+      </p:sp>
+      <p:sp>
+        <p:nvSpPr>
+          <p:cNvPr id="3" name="Shape 1"/>
+          <p:cNvSpPr/>
+          <p:nvPr/>
+        </p:nvSpPr>
+        <p:spPr>
+          <a:xfrm>
+            <a:off x="11521440" y="1280160"/>
+            <a:ext cx="128016" cy="128016"/>
+          </a:xfrm>
+          <a:prstGeom prst="ellipse">
+            <a:avLst/>
+          </a:prstGeom>
+          <a:solidFill>
+            <a:srgbClr val="A5501F"/>
+          </a:solidFill>
+          <a:ln/>
+        </p:spPr>
+      </p:sp>
+      <p:sp>
+        <p:nvSpPr>
+          <p:cNvPr id="4" name="Shape 2"/>
+          <p:cNvSpPr/>
+          <p:nvPr/>
+        </p:nvSpPr>
+        <p:spPr>
+          <a:xfrm>
+            <a:off x="10424160" y="1463040"/>
+            <a:ext cx="164592" cy="164592"/>
+          </a:xfrm>
+          <a:prstGeom prst="ellipse">
+            <a:avLst/>
+          </a:prstGeom>
+          <a:solidFill>
+            <a:srgbClr val="A5501F"/>
+          </a:solidFill>
+          <a:ln/>
+        </p:spPr>
+      </p:sp>
+      <p:sp>
+        <p:nvSpPr>
+          <p:cNvPr id="5" name="Shape 3"/>
+          <p:cNvSpPr/>
+          <p:nvPr/>
+        </p:nvSpPr>
+        <p:spPr>
+          <a:xfrm>
+            <a:off x="11155680" y="2103120"/>
+            <a:ext cx="91440" cy="91440"/>
+          </a:xfrm>
+          <a:prstGeom prst="ellipse">
+            <a:avLst/>
+          </a:prstGeom>
+          <a:solidFill>
+            <a:srgbClr val="A5501F"/>
+          </a:solidFill>
+          <a:ln/>
+        </p:spPr>
+      </p:sp>
+      <p:sp>
+        <p:nvSpPr>
+          <p:cNvPr id="6" name="Shape 4"/>
+          <p:cNvSpPr/>
+          <p:nvPr/>
+        </p:nvSpPr>
+        <p:spPr>
+          <a:xfrm>
+            <a:off x="9966960" y="914400"/>
+            <a:ext cx="128016" cy="128016"/>
+          </a:xfrm>
+          <a:prstGeom prst="ellipse">
+            <a:avLst/>
+          </a:prstGeom>
+          <a:solidFill>
+            <a:srgbClr val="A5501F"/>
+          </a:solidFill>
+          <a:ln/>
+        </p:spPr>
+      </p:sp>
+      <p:sp>
+        <p:nvSpPr>
+          <p:cNvPr id="7" name="Shape 5"/>
+          <p:cNvSpPr/>
+          <p:nvPr/>
+        </p:nvSpPr>
+        <p:spPr>
+          <a:xfrm>
+            <a:off x="11704320" y="2651760"/>
+            <a:ext cx="164592" cy="164592"/>
+          </a:xfrm>
+          <a:prstGeom prst="ellipse">
+            <a:avLst/>
+          </a:prstGeom>
+          <a:solidFill>
+            <a:srgbClr val="A5501F"/>
+          </a:solidFill>
+          <a:ln/>
+        </p:spPr>
+      </p:sp>
+      <p:sp>
+        <p:nvSpPr>
+          <p:cNvPr id="8" name="Shape 6"/>
+          <p:cNvSpPr/>
+          <p:nvPr/>
+        </p:nvSpPr>
+        <p:spPr>
+          <a:xfrm>
+            <a:off x="10698480" y="2468880"/>
+            <a:ext cx="91440" cy="91440"/>
+          </a:xfrm>
+          <a:prstGeom prst="ellipse">
+            <a:avLst/>
+          </a:prstGeom>
+          <a:solidFill>
+            <a:srgbClr val="A5501F"/>
+          </a:solidFill>
+          <a:ln/>
+        </p:spPr>
+      </p:sp>
+      <p:sp>
+        <p:nvSpPr>
+          <p:cNvPr id="9" name="Text 7"/>
+          <p:cNvSpPr/>
+          <p:nvPr/>
+        </p:nvSpPr>
+        <p:spPr>
+          <a:xfrm>
+            <a:off x="758952" y="1645920"/>
+            <a:ext cx="10637215" cy="1645920"/>
           </a:xfrm>
           <a:prstGeom prst="rect">
             <a:avLst/>
@@ -1184,12 +1304,15 @@
           <a:lstStyle/>
           <a:p>
             <a:pPr indent="0" marL="0">
+              <a:lnSpc>
+                <a:spcPct val="98000"/>
+              </a:lnSpc>
               <a:buNone/>
             </a:pPr>
             <a:r>
-              <a:rPr lang="en-US" sz="3400" b="1" dirty="0">
+              <a:rPr lang="en-US" sz="3800" b="1" dirty="0">
                 <a:solidFill>
-                  <a:srgbClr val="FFFFFF"/>
+                  <a:srgbClr val="ECE3CF"/>
                 </a:solidFill>
                 <a:latin typeface="Cambria" pitchFamily="34" charset="0"/>
                 <a:ea typeface="Cambria" pitchFamily="34" charset="-122"/>
@@ -1197,20 +1320,20 @@
               </a:rPr>
               <a:t>Wildlife Conservation Habitat Monitoring</a:t>
             </a:r>
-            <a:endParaRPr lang="en-US" sz="3400" dirty="0"/>
-          </a:p>
-        </p:txBody>
-      </p:sp>
-      <p:sp>
-        <p:nvSpPr>
-          <p:cNvPr id="4" name="Text 2"/>
-          <p:cNvSpPr/>
-          <p:nvPr/>
-        </p:nvSpPr>
-        <p:spPr>
-          <a:xfrm>
-            <a:off x="658368" y="2880360"/>
-            <a:ext cx="10972800" cy="457200"/>
+            <a:endParaRPr lang="en-US" sz="3800" dirty="0"/>
+          </a:p>
+        </p:txBody>
+      </p:sp>
+      <p:sp>
+        <p:nvSpPr>
+          <p:cNvPr id="10" name="Text 8"/>
+          <p:cNvSpPr/>
+          <p:nvPr/>
+        </p:nvSpPr>
+        <p:spPr>
+          <a:xfrm>
+            <a:off x="777240" y="3337560"/>
+            <a:ext cx="10637215" cy="365760"/>
           </a:xfrm>
           <a:prstGeom prst="rect">
             <a:avLst/>
@@ -1226,9 +1349,9 @@
               <a:buNone/>
             </a:pPr>
             <a:r>
-              <a:rPr lang="en-US" sz="1600" dirty="0">
+              <a:rPr lang="en-US" sz="1450" dirty="0">
                 <a:solidFill>
-                  <a:srgbClr val="D6E2C6"/>
+                  <a:srgbClr val="8B98A6"/>
                 </a:solidFill>
                 <a:latin typeface="Calibri" pitchFamily="34" charset="0"/>
                 <a:ea typeface="Calibri" pitchFamily="34" charset="-122"/>
@@ -1236,41 +1359,41 @@
               </a:rPr>
               <a:t>Hrishikesh Sajeev   ·   X25132377</a:t>
             </a:r>
-            <a:endParaRPr lang="en-US" sz="1600" dirty="0"/>
-          </a:p>
-        </p:txBody>
-      </p:sp>
-      <p:sp>
-        <p:nvSpPr>
-          <p:cNvPr id="5" name="Text 3"/>
-          <p:cNvSpPr/>
-          <p:nvPr/>
-        </p:nvSpPr>
-        <p:spPr>
-          <a:xfrm>
-            <a:off x="658368" y="4206240"/>
-            <a:ext cx="10424160" cy="1280160"/>
-          </a:xfrm>
-          <a:prstGeom prst="rect">
-            <a:avLst/>
-          </a:prstGeom>
-          <a:noFill/>
-          <a:ln/>
-        </p:spPr>
-        <p:txBody>
-          <a:bodyPr wrap="square" rtlCol="0" anchor="ctr"/>
+            <a:endParaRPr lang="en-US" sz="1450" dirty="0"/>
+          </a:p>
+        </p:txBody>
+      </p:sp>
+      <p:sp>
+        <p:nvSpPr>
+          <p:cNvPr id="11" name="Text 9"/>
+          <p:cNvSpPr/>
+          <p:nvPr/>
+        </p:nvSpPr>
+        <p:spPr>
+          <a:xfrm>
+            <a:off x="777240" y="3931920"/>
+            <a:ext cx="8138160" cy="1325880"/>
+          </a:xfrm>
+          <a:prstGeom prst="rect">
+            <a:avLst/>
+          </a:prstGeom>
+          <a:noFill/>
+          <a:ln/>
+        </p:spPr>
+        <p:txBody>
+          <a:bodyPr wrap="square" rtlCol="0" anchor="t"/>
           <a:lstStyle/>
           <a:p>
             <a:pPr indent="0" marL="0">
               <a:lnSpc>
-                <a:spcPct val="108000"/>
+                <a:spcPct val="130000"/>
               </a:lnSpc>
               <a:buNone/>
             </a:pPr>
             <a:r>
-              <a:rPr lang="en-US" sz="1800" dirty="0">
+              <a:rPr lang="en-US" sz="1400" dirty="0">
                 <a:solidFill>
-                  <a:srgbClr val="D6E2C6"/>
+                  <a:srgbClr val="ECE3CF"/>
                 </a:solidFill>
                 <a:latin typeface="Calibri" pitchFamily="34" charset="0"/>
                 <a:ea typeface="Calibri" pitchFamily="34" charset="-122"/>
@@ -1278,212 +1401,7 @@
               </a:rPr>
               <a:t>A gunshot-like acoustic spike lasts moments, a waterhole dries over days — fixed patrols learn of an event only when a ranger reaches the spot, not when it starts.</a:t>
             </a:r>
-            <a:endParaRPr lang="en-US" sz="1800" dirty="0"/>
-          </a:p>
-        </p:txBody>
-      </p:sp>
-      <p:sp>
-        <p:nvSpPr>
-          <p:cNvPr id="6" name="Shape 4"/>
-          <p:cNvSpPr/>
-          <p:nvPr/>
-        </p:nvSpPr>
-        <p:spPr>
-          <a:xfrm>
-            <a:off x="658368" y="5724144"/>
-            <a:ext cx="146304" cy="146304"/>
-          </a:xfrm>
-          <a:prstGeom prst="rect">
-            <a:avLst/>
-          </a:prstGeom>
-          <a:solidFill>
-            <a:srgbClr val="6A8F3C"/>
-          </a:solidFill>
-          <a:ln/>
-        </p:spPr>
-      </p:sp>
-      <p:sp>
-        <p:nvSpPr>
-          <p:cNvPr id="7" name="Text 5"/>
-          <p:cNvSpPr/>
-          <p:nvPr/>
-        </p:nvSpPr>
-        <p:spPr>
-          <a:xfrm>
-            <a:off x="932688" y="5577840"/>
-            <a:ext cx="2560320" cy="457200"/>
-          </a:xfrm>
-          <a:prstGeom prst="rect">
-            <a:avLst/>
-          </a:prstGeom>
-          <a:noFill/>
-          <a:ln/>
-        </p:spPr>
-        <p:txBody>
-          <a:bodyPr wrap="square" lIns="0" tIns="0" rIns="0" bIns="0" rtlCol="0" anchor="ctr"/>
-          <a:lstStyle/>
-          <a:p>
-            <a:pPr indent="0" marL="0">
-              <a:buNone/>
-            </a:pPr>
-            <a:r>
-              <a:rPr lang="en-US" sz="1400" b="1" dirty="0">
-                <a:solidFill>
-                  <a:srgbClr val="D6E2C6"/>
-                </a:solidFill>
-                <a:latin typeface="Calibri" pitchFamily="34" charset="0"/>
-                <a:ea typeface="Calibri" pitchFamily="34" charset="-122"/>
-                <a:cs typeface="Calibri" pitchFamily="34" charset="-120"/>
-              </a:rPr>
-              <a:t>Acoustic &gt; 75 dB</a:t>
-            </a:r>
             <a:endParaRPr lang="en-US" sz="1400" dirty="0"/>
-          </a:p>
-        </p:txBody>
-      </p:sp>
-      <p:sp>
-        <p:nvSpPr>
-          <p:cNvPr id="8" name="Shape 6"/>
-          <p:cNvSpPr/>
-          <p:nvPr/>
-        </p:nvSpPr>
-        <p:spPr>
-          <a:xfrm>
-            <a:off x="3538728" y="5724144"/>
-            <a:ext cx="146304" cy="146304"/>
-          </a:xfrm>
-          <a:prstGeom prst="rect">
-            <a:avLst/>
-          </a:prstGeom>
-          <a:solidFill>
-            <a:srgbClr val="6A8F3C"/>
-          </a:solidFill>
-          <a:ln/>
-        </p:spPr>
-      </p:sp>
-      <p:sp>
-        <p:nvSpPr>
-          <p:cNvPr id="9" name="Text 7"/>
-          <p:cNvSpPr/>
-          <p:nvPr/>
-        </p:nvSpPr>
-        <p:spPr>
-          <a:xfrm>
-            <a:off x="3813048" y="5577840"/>
-            <a:ext cx="2560320" cy="457200"/>
-          </a:xfrm>
-          <a:prstGeom prst="rect">
-            <a:avLst/>
-          </a:prstGeom>
-          <a:noFill/>
-          <a:ln/>
-        </p:spPr>
-        <p:txBody>
-          <a:bodyPr wrap="square" lIns="0" tIns="0" rIns="0" bIns="0" rtlCol="0" anchor="ctr"/>
-          <a:lstStyle/>
-          <a:p>
-            <a:pPr indent="0" marL="0">
-              <a:buNone/>
-            </a:pPr>
-            <a:r>
-              <a:rPr lang="en-US" sz="1400" b="1" dirty="0">
-                <a:solidFill>
-                  <a:srgbClr val="D6E2C6"/>
-                </a:solidFill>
-                <a:latin typeface="Calibri" pitchFamily="34" charset="0"/>
-                <a:ea typeface="Calibri" pitchFamily="34" charset="-122"/>
-                <a:cs typeface="Calibri" pitchFamily="34" charset="-120"/>
-              </a:rPr>
-              <a:t>Waterhole &lt; 20 cm</a:t>
-            </a:r>
-            <a:endParaRPr lang="en-US" sz="1400" dirty="0"/>
-          </a:p>
-        </p:txBody>
-      </p:sp>
-      <p:sp>
-        <p:nvSpPr>
-          <p:cNvPr id="10" name="Shape 8"/>
-          <p:cNvSpPr/>
-          <p:nvPr/>
-        </p:nvSpPr>
-        <p:spPr>
-          <a:xfrm>
-            <a:off x="6419088" y="5724144"/>
-            <a:ext cx="146304" cy="146304"/>
-          </a:xfrm>
-          <a:prstGeom prst="rect">
-            <a:avLst/>
-          </a:prstGeom>
-          <a:solidFill>
-            <a:srgbClr val="6A8F3C"/>
-          </a:solidFill>
-          <a:ln/>
-        </p:spPr>
-      </p:sp>
-      <p:sp>
-        <p:nvSpPr>
-          <p:cNvPr id="11" name="Text 9"/>
-          <p:cNvSpPr/>
-          <p:nvPr/>
-        </p:nvSpPr>
-        <p:spPr>
-          <a:xfrm>
-            <a:off x="6693408" y="5577840"/>
-            <a:ext cx="2560320" cy="457200"/>
-          </a:xfrm>
-          <a:prstGeom prst="rect">
-            <a:avLst/>
-          </a:prstGeom>
-          <a:noFill/>
-          <a:ln/>
-        </p:spPr>
-        <p:txBody>
-          <a:bodyPr wrap="square" lIns="0" tIns="0" rIns="0" bIns="0" rtlCol="0" anchor="ctr"/>
-          <a:lstStyle/>
-          <a:p>
-            <a:pPr indent="0" marL="0">
-              <a:buNone/>
-            </a:pPr>
-            <a:r>
-              <a:rPr lang="en-US" sz="1400" b="1" dirty="0">
-                <a:solidFill>
-                  <a:srgbClr val="D6E2C6"/>
-                </a:solidFill>
-                <a:latin typeface="Calibri" pitchFamily="34" charset="0"/>
-                <a:ea typeface="Calibri" pitchFamily="34" charset="-122"/>
-                <a:cs typeface="Calibri" pitchFamily="34" charset="-120"/>
-              </a:rPr>
-              <a:t>4 rules at the edge</a:t>
-            </a:r>
-            <a:endParaRPr lang="en-US" sz="1400" dirty="0"/>
-          </a:p>
-        </p:txBody>
-      </p:sp>
-      <p:sp>
-        <p:nvSpPr>
-          <p:cNvPr id="12" name="Text 10"/>
-          <p:cNvSpPr/>
-          <p:nvPr/>
-        </p:nvSpPr>
-        <p:spPr>
-          <a:xfrm>
-            <a:off x="658368" y="6400800"/>
-            <a:ext cx="10972800" cy="320040"/>
-          </a:xfrm>
-          <a:prstGeom prst="rect">
-            <a:avLst/>
-          </a:prstGeom>
-          <a:noFill/>
-          <a:ln/>
-        </p:spPr>
-        <p:txBody>
-          <a:bodyPr wrap="square" rtlCol="0" anchor="ctr"/>
-          <a:lstStyle/>
-          <a:p>
-            <a:pPr indent="0" marL="0">
-              <a:buNone/>
-            </a:pPr>
-            <a:endParaRPr lang="en-US" sz="1250" dirty="0"/>
           </a:p>
         </p:txBody>
       </p:sp>
@@ -1501,7 +1419,7 @@
     <p:bg>
       <p:bgPr>
         <a:solidFill>
-          <a:srgbClr val="FFFFFF"/>
+          <a:srgbClr val="203127"/>
         </a:solidFill>
       </p:bgPr>
     </p:bg>
@@ -1521,23 +1439,163 @@
       </p:grpSpPr>
       <p:sp>
         <p:nvSpPr>
-          <p:cNvPr id="2" name="Text 0"/>
-          <p:cNvSpPr/>
-          <p:nvPr/>
-        </p:nvSpPr>
-        <p:spPr>
-          <a:xfrm>
-            <a:off x="640080" y="457200"/>
-            <a:ext cx="10972800" cy="640080"/>
-          </a:xfrm>
-          <a:prstGeom prst="rect">
-            <a:avLst/>
-          </a:prstGeom>
-          <a:noFill/>
-          <a:ln/>
-        </p:spPr>
-        <p:txBody>
-          <a:bodyPr wrap="square" rtlCol="0" anchor="ctr"/>
+          <p:cNvPr id="2" name="Shape 0"/>
+          <p:cNvSpPr/>
+          <p:nvPr/>
+        </p:nvSpPr>
+        <p:spPr>
+          <a:xfrm>
+            <a:off x="10881360" y="640080"/>
+            <a:ext cx="91440" cy="91440"/>
+          </a:xfrm>
+          <a:prstGeom prst="ellipse">
+            <a:avLst/>
+          </a:prstGeom>
+          <a:solidFill>
+            <a:srgbClr val="A5501F"/>
+          </a:solidFill>
+          <a:ln/>
+        </p:spPr>
+      </p:sp>
+      <p:sp>
+        <p:nvSpPr>
+          <p:cNvPr id="3" name="Shape 1"/>
+          <p:cNvSpPr/>
+          <p:nvPr/>
+        </p:nvSpPr>
+        <p:spPr>
+          <a:xfrm>
+            <a:off x="11521440" y="1280160"/>
+            <a:ext cx="128016" cy="128016"/>
+          </a:xfrm>
+          <a:prstGeom prst="ellipse">
+            <a:avLst/>
+          </a:prstGeom>
+          <a:solidFill>
+            <a:srgbClr val="A5501F"/>
+          </a:solidFill>
+          <a:ln/>
+        </p:spPr>
+      </p:sp>
+      <p:sp>
+        <p:nvSpPr>
+          <p:cNvPr id="4" name="Shape 2"/>
+          <p:cNvSpPr/>
+          <p:nvPr/>
+        </p:nvSpPr>
+        <p:spPr>
+          <a:xfrm>
+            <a:off x="10424160" y="1463040"/>
+            <a:ext cx="164592" cy="164592"/>
+          </a:xfrm>
+          <a:prstGeom prst="ellipse">
+            <a:avLst/>
+          </a:prstGeom>
+          <a:solidFill>
+            <a:srgbClr val="A5501F"/>
+          </a:solidFill>
+          <a:ln/>
+        </p:spPr>
+      </p:sp>
+      <p:sp>
+        <p:nvSpPr>
+          <p:cNvPr id="5" name="Shape 3"/>
+          <p:cNvSpPr/>
+          <p:nvPr/>
+        </p:nvSpPr>
+        <p:spPr>
+          <a:xfrm>
+            <a:off x="11155680" y="2103120"/>
+            <a:ext cx="91440" cy="91440"/>
+          </a:xfrm>
+          <a:prstGeom prst="ellipse">
+            <a:avLst/>
+          </a:prstGeom>
+          <a:solidFill>
+            <a:srgbClr val="A5501F"/>
+          </a:solidFill>
+          <a:ln/>
+        </p:spPr>
+      </p:sp>
+      <p:sp>
+        <p:nvSpPr>
+          <p:cNvPr id="6" name="Shape 4"/>
+          <p:cNvSpPr/>
+          <p:nvPr/>
+        </p:nvSpPr>
+        <p:spPr>
+          <a:xfrm>
+            <a:off x="9966960" y="914400"/>
+            <a:ext cx="128016" cy="128016"/>
+          </a:xfrm>
+          <a:prstGeom prst="ellipse">
+            <a:avLst/>
+          </a:prstGeom>
+          <a:solidFill>
+            <a:srgbClr val="A5501F"/>
+          </a:solidFill>
+          <a:ln/>
+        </p:spPr>
+      </p:sp>
+      <p:sp>
+        <p:nvSpPr>
+          <p:cNvPr id="7" name="Shape 5"/>
+          <p:cNvSpPr/>
+          <p:nvPr/>
+        </p:nvSpPr>
+        <p:spPr>
+          <a:xfrm>
+            <a:off x="11704320" y="2651760"/>
+            <a:ext cx="164592" cy="164592"/>
+          </a:xfrm>
+          <a:prstGeom prst="ellipse">
+            <a:avLst/>
+          </a:prstGeom>
+          <a:solidFill>
+            <a:srgbClr val="A5501F"/>
+          </a:solidFill>
+          <a:ln/>
+        </p:spPr>
+      </p:sp>
+      <p:sp>
+        <p:nvSpPr>
+          <p:cNvPr id="8" name="Shape 6"/>
+          <p:cNvSpPr/>
+          <p:nvPr/>
+        </p:nvSpPr>
+        <p:spPr>
+          <a:xfrm>
+            <a:off x="10698480" y="2468880"/>
+            <a:ext cx="91440" cy="91440"/>
+          </a:xfrm>
+          <a:prstGeom prst="ellipse">
+            <a:avLst/>
+          </a:prstGeom>
+          <a:solidFill>
+            <a:srgbClr val="A5501F"/>
+          </a:solidFill>
+          <a:ln/>
+        </p:spPr>
+      </p:sp>
+      <p:sp>
+        <p:nvSpPr>
+          <p:cNvPr id="9" name="Text 7"/>
+          <p:cNvSpPr/>
+          <p:nvPr/>
+        </p:nvSpPr>
+        <p:spPr>
+          <a:xfrm>
+            <a:off x="777240" y="731520"/>
+            <a:ext cx="914400" cy="640080"/>
+          </a:xfrm>
+          <a:prstGeom prst="rect">
+            <a:avLst/>
+          </a:prstGeom>
+          <a:noFill/>
+          <a:ln/>
+        </p:spPr>
+        <p:txBody>
+          <a:bodyPr wrap="square" lIns="0" tIns="0" rIns="0" bIns="0" rtlCol="0" anchor="ctr"/>
           <a:lstStyle/>
           <a:p>
             <a:pPr indent="0" marL="0">
@@ -1546,7 +1604,85 @@
             <a:r>
               <a:rPr lang="en-US" sz="3000" b="1" dirty="0">
                 <a:solidFill>
-                  <a:srgbClr val="1C2617"/>
+                  <a:srgbClr val="A5501F"/>
+                </a:solidFill>
+                <a:latin typeface="Cambria" pitchFamily="34" charset="0"/>
+                <a:ea typeface="Cambria" pitchFamily="34" charset="-122"/>
+                <a:cs typeface="Cambria" pitchFamily="34" charset="-120"/>
+              </a:rPr>
+              <a:t>01</a:t>
+            </a:r>
+            <a:endParaRPr lang="en-US" sz="3000" dirty="0"/>
+          </a:p>
+        </p:txBody>
+      </p:sp>
+      <p:sp>
+        <p:nvSpPr>
+          <p:cNvPr id="10" name="Text 8"/>
+          <p:cNvSpPr/>
+          <p:nvPr/>
+        </p:nvSpPr>
+        <p:spPr>
+          <a:xfrm>
+            <a:off x="1645920" y="905256"/>
+            <a:ext cx="9768535" cy="274320"/>
+          </a:xfrm>
+          <a:prstGeom prst="rect">
+            <a:avLst/>
+          </a:prstGeom>
+          <a:noFill/>
+          <a:ln/>
+        </p:spPr>
+        <p:txBody>
+          <a:bodyPr wrap="square" lIns="0" tIns="0" rIns="0" bIns="0" rtlCol="0" anchor="ctr"/>
+          <a:lstStyle/>
+          <a:p>
+            <a:pPr indent="0" marL="0">
+              <a:buNone/>
+            </a:pPr>
+            <a:r>
+              <a:rPr lang="en-US" sz="1100" b="1" spc="200" kern="0" dirty="0">
+                <a:solidFill>
+                  <a:srgbClr val="8B98A6"/>
+                </a:solidFill>
+                <a:latin typeface="Calibri" pitchFamily="34" charset="0"/>
+                <a:ea typeface="Calibri" pitchFamily="34" charset="-122"/>
+                <a:cs typeface="Calibri" pitchFamily="34" charset="-120"/>
+              </a:rPr>
+              <a:t>ARCHITECTURE</a:t>
+            </a:r>
+            <a:endParaRPr lang="en-US" sz="1100" dirty="0"/>
+          </a:p>
+        </p:txBody>
+      </p:sp>
+      <p:sp>
+        <p:nvSpPr>
+          <p:cNvPr id="11" name="Text 9"/>
+          <p:cNvSpPr/>
+          <p:nvPr/>
+        </p:nvSpPr>
+        <p:spPr>
+          <a:xfrm>
+            <a:off x="777240" y="1380744"/>
+            <a:ext cx="10637215" cy="640080"/>
+          </a:xfrm>
+          <a:prstGeom prst="rect">
+            <a:avLst/>
+          </a:prstGeom>
+          <a:noFill/>
+          <a:ln/>
+        </p:spPr>
+        <p:txBody>
+          <a:bodyPr wrap="square" lIns="0" tIns="0" rIns="0" bIns="0" rtlCol="0" anchor="ctr"/>
+          <a:lstStyle/>
+          <a:p>
+            <a:pPr indent="0" marL="0">
+              <a:buNone/>
+            </a:pPr>
+            <a:r>
+              <a:rPr lang="en-US" sz="2300" b="1" dirty="0">
+                <a:solidFill>
+                  <a:srgbClr val="ECE3CF"/>
                 </a:solidFill>
                 <a:latin typeface="Cambria" pitchFamily="34" charset="0"/>
                 <a:ea typeface="Cambria" pitchFamily="34" charset="-122"/>
@@ -1554,32 +1690,32 @@
               </a:rPr>
               <a:t>What I Built — Reserve to Live Dashboard</a:t>
             </a:r>
-            <a:endParaRPr lang="en-US" sz="3000" dirty="0"/>
-          </a:p>
-        </p:txBody>
-      </p:sp>
-      <p:sp>
-        <p:nvSpPr>
-          <p:cNvPr id="3" name="Shape 1"/>
-          <p:cNvSpPr/>
-          <p:nvPr/>
-        </p:nvSpPr>
-        <p:spPr>
-          <a:xfrm>
-            <a:off x="640080" y="1554480"/>
-            <a:ext cx="3200400" cy="3383280"/>
+            <a:endParaRPr lang="en-US" sz="2300" dirty="0"/>
+          </a:p>
+        </p:txBody>
+      </p:sp>
+      <p:sp>
+        <p:nvSpPr>
+          <p:cNvPr id="12" name="Shape 10"/>
+          <p:cNvSpPr/>
+          <p:nvPr/>
+        </p:nvSpPr>
+        <p:spPr>
+          <a:xfrm>
+            <a:off x="777240" y="2971800"/>
+            <a:ext cx="1391869" cy="1965960"/>
           </a:xfrm>
           <a:prstGeom prst="roundRect">
             <a:avLst>
-              <a:gd name="adj" fmla="val 2857"/>
+              <a:gd name="adj" fmla="val 3942"/>
             </a:avLst>
           </a:prstGeom>
           <a:solidFill>
-            <a:srgbClr val="EFF3E9"/>
-          </a:solidFill>
-          <a:ln w="19050">
+            <a:srgbClr val="A5501F"/>
+          </a:solidFill>
+          <a:ln w="12700">
             <a:solidFill>
-              <a:srgbClr val="8CA85E"/>
+              <a:srgbClr val="A5501F"/>
             </a:solidFill>
             <a:prstDash val="solid"/>
           </a:ln>
@@ -1587,119 +1723,95 @@
       </p:sp>
       <p:sp>
         <p:nvSpPr>
-          <p:cNvPr id="4" name="Text 2"/>
-          <p:cNvSpPr/>
-          <p:nvPr/>
-        </p:nvSpPr>
-        <p:spPr>
-          <a:xfrm>
-            <a:off x="640080" y="1691640"/>
-            <a:ext cx="3200400" cy="365760"/>
-          </a:xfrm>
-          <a:prstGeom prst="rect">
-            <a:avLst/>
-          </a:prstGeom>
-          <a:noFill/>
-          <a:ln/>
-        </p:spPr>
-        <p:txBody>
-          <a:bodyPr wrap="square" rtlCol="0" anchor="ctr"/>
-          <a:lstStyle/>
-          <a:p>
-            <a:pPr algn="ctr" indent="0" marL="0">
+          <p:cNvPr id="13" name="Text 11"/>
+          <p:cNvSpPr/>
+          <p:nvPr/>
+        </p:nvSpPr>
+        <p:spPr>
+          <a:xfrm>
+            <a:off x="923544" y="3154680"/>
+            <a:ext cx="1099261" cy="320040"/>
+          </a:xfrm>
+          <a:prstGeom prst="rect">
+            <a:avLst/>
+          </a:prstGeom>
+          <a:noFill/>
+          <a:ln/>
+        </p:spPr>
+        <p:txBody>
+          <a:bodyPr wrap="square" lIns="0" tIns="0" rIns="0" bIns="0" rtlCol="0" anchor="ctr"/>
+          <a:lstStyle/>
+          <a:p>
+            <a:pPr indent="0" marL="0">
               <a:buNone/>
             </a:pPr>
             <a:r>
-              <a:rPr lang="en-US" sz="1200" b="1" spc="300" kern="0" dirty="0">
+              <a:rPr lang="en-US" sz="1100" dirty="0">
                 <a:solidFill>
-                  <a:srgbClr val="8CA85E"/>
+                  <a:srgbClr val="FFFFFF"/>
                 </a:solidFill>
-                <a:latin typeface="Calibri" pitchFamily="34" charset="0"/>
-                <a:ea typeface="Calibri" pitchFamily="34" charset="-122"/>
-                <a:cs typeface="Calibri" pitchFamily="34" charset="-120"/>
+                <a:latin typeface="Consolas" pitchFamily="34" charset="0"/>
+                <a:ea typeface="Consolas" pitchFamily="34" charset="-122"/>
+                <a:cs typeface="Consolas" pitchFamily="34" charset="-120"/>
               </a:rPr>
-              <a:t>EDGE</a:t>
-            </a:r>
-            <a:endParaRPr lang="en-US" sz="1200" dirty="0"/>
-          </a:p>
-        </p:txBody>
-      </p:sp>
-      <p:sp>
-        <p:nvSpPr>
-          <p:cNvPr id="5" name="Shape 3"/>
-          <p:cNvSpPr/>
-          <p:nvPr/>
-        </p:nvSpPr>
-        <p:spPr>
-          <a:xfrm>
-            <a:off x="914400" y="2286000"/>
-            <a:ext cx="2651760" cy="1005840"/>
-          </a:xfrm>
-          <a:prstGeom prst="roundRect">
-            <a:avLst>
-              <a:gd name="adj" fmla="val 7273"/>
-            </a:avLst>
-          </a:prstGeom>
-          <a:solidFill>
-            <a:srgbClr val="FFFFFF"/>
-          </a:solidFill>
-          <a:ln w="15240">
-            <a:solidFill>
-              <a:srgbClr val="8CA85E"/>
-            </a:solidFill>
-            <a:prstDash val="solid"/>
-          </a:ln>
-        </p:spPr>
-      </p:sp>
-      <p:sp>
-        <p:nvSpPr>
-          <p:cNvPr id="6" name="Text 4"/>
-          <p:cNvSpPr/>
-          <p:nvPr/>
-        </p:nvSpPr>
-        <p:spPr>
-          <a:xfrm>
-            <a:off x="914400" y="2432304"/>
-            <a:ext cx="2651760" cy="365760"/>
-          </a:xfrm>
-          <a:prstGeom prst="rect">
-            <a:avLst/>
-          </a:prstGeom>
-          <a:noFill/>
-          <a:ln/>
-        </p:spPr>
-        <p:txBody>
-          <a:bodyPr wrap="square" lIns="0" tIns="0" rIns="0" bIns="0" rtlCol="0" anchor="ctr"/>
-          <a:lstStyle/>
-          <a:p>
-            <a:pPr algn="ctr" indent="0" marL="0">
+              <a:t>01</a:t>
+            </a:r>
+            <a:endParaRPr lang="en-US" sz="1100" dirty="0"/>
+          </a:p>
+        </p:txBody>
+      </p:sp>
+      <p:sp>
+        <p:nvSpPr>
+          <p:cNvPr id="14" name="Text 12"/>
+          <p:cNvSpPr/>
+          <p:nvPr/>
+        </p:nvSpPr>
+        <p:spPr>
+          <a:xfrm>
+            <a:off x="923544" y="3593592"/>
+            <a:ext cx="1099261" cy="868680"/>
+          </a:xfrm>
+          <a:prstGeom prst="rect">
+            <a:avLst/>
+          </a:prstGeom>
+          <a:noFill/>
+          <a:ln/>
+        </p:spPr>
+        <p:txBody>
+          <a:bodyPr wrap="square" lIns="0" tIns="0" rIns="0" bIns="0" rtlCol="0" anchor="t"/>
+          <a:lstStyle/>
+          <a:p>
+            <a:pPr indent="0" marL="0">
+              <a:lnSpc>
+                <a:spcPct val="96000"/>
+              </a:lnSpc>
               <a:buNone/>
             </a:pPr>
             <a:r>
-              <a:rPr lang="en-US" sz="1400" b="1" dirty="0">
+              <a:rPr lang="en-US" sz="1300" b="1" dirty="0">
                 <a:solidFill>
-                  <a:srgbClr val="1C2617"/>
+                  <a:srgbClr val="FFFFFF"/>
                 </a:solidFill>
-                <a:latin typeface="Calibri" pitchFamily="34" charset="0"/>
-                <a:ea typeface="Calibri" pitchFamily="34" charset="-122"/>
-                <a:cs typeface="Calibri" pitchFamily="34" charset="-120"/>
+                <a:latin typeface="Cambria" pitchFamily="34" charset="0"/>
+                <a:ea typeface="Cambria" pitchFamily="34" charset="-122"/>
+                <a:cs typeface="Cambria" pitchFamily="34" charset="-120"/>
               </a:rPr>
               <a:t>Field sensors</a:t>
             </a:r>
-            <a:endParaRPr lang="en-US" sz="1400" dirty="0"/>
-          </a:p>
-        </p:txBody>
-      </p:sp>
-      <p:sp>
-        <p:nvSpPr>
-          <p:cNvPr id="7" name="Text 5"/>
-          <p:cNvSpPr/>
-          <p:nvPr/>
-        </p:nvSpPr>
-        <p:spPr>
-          <a:xfrm>
-            <a:off x="914400" y="2816352"/>
-            <a:ext cx="2651760" cy="365760"/>
+            <a:endParaRPr lang="en-US" sz="1300" dirty="0"/>
+          </a:p>
+        </p:txBody>
+      </p:sp>
+      <p:sp>
+        <p:nvSpPr>
+          <p:cNvPr id="15" name="Text 13"/>
+          <p:cNvSpPr/>
+          <p:nvPr/>
+        </p:nvSpPr>
+        <p:spPr>
+          <a:xfrm>
+            <a:off x="923544" y="4453128"/>
+            <a:ext cx="1099261" cy="365760"/>
           </a:xfrm>
           <a:prstGeom prst="rect">
             <a:avLst/>
@@ -1711,13 +1823,13 @@
           <a:bodyPr wrap="square" lIns="0" tIns="0" rIns="0" bIns="0" rtlCol="0" anchor="ctr"/>
           <a:lstStyle/>
           <a:p>
-            <a:pPr algn="ctr" indent="0" marL="0">
+            <a:pPr indent="0" marL="0">
               <a:buNone/>
             </a:pPr>
             <a:r>
-              <a:rPr lang="en-US" sz="1000" dirty="0">
+              <a:rPr lang="en-US" sz="900" dirty="0">
                 <a:solidFill>
-                  <a:srgbClr val="606E50"/>
+                  <a:srgbClr val="FFFFFF"/>
                 </a:solidFill>
                 <a:latin typeface="Calibri" pitchFamily="34" charset="0"/>
                 <a:ea typeface="Calibri" pitchFamily="34" charset="-122"/>
@@ -1725,32 +1837,52 @@
               </a:rPr>
               <a:t>10 · 2 reserves</a:t>
             </a:r>
-            <a:endParaRPr lang="en-US" sz="1000" dirty="0"/>
-          </a:p>
-        </p:txBody>
-      </p:sp>
-      <p:sp>
-        <p:nvSpPr>
-          <p:cNvPr id="8" name="Shape 6"/>
-          <p:cNvSpPr/>
-          <p:nvPr/>
-        </p:nvSpPr>
-        <p:spPr>
-          <a:xfrm>
-            <a:off x="914400" y="3520440"/>
-            <a:ext cx="2651760" cy="1005840"/>
+            <a:endParaRPr lang="en-US" sz="900" dirty="0"/>
+          </a:p>
+        </p:txBody>
+      </p:sp>
+      <p:sp>
+        <p:nvSpPr>
+          <p:cNvPr id="16" name="Shape 14"/>
+          <p:cNvSpPr/>
+          <p:nvPr/>
+        </p:nvSpPr>
+        <p:spPr>
+          <a:xfrm>
+            <a:off x="2242261" y="3845052"/>
+            <a:ext cx="310896" cy="219456"/>
+          </a:xfrm>
+          <a:prstGeom prst="rightArrow">
+            <a:avLst/>
+          </a:prstGeom>
+          <a:solidFill>
+            <a:srgbClr val="8B98A6"/>
+          </a:solidFill>
+          <a:ln/>
+        </p:spPr>
+      </p:sp>
+      <p:sp>
+        <p:nvSpPr>
+          <p:cNvPr id="17" name="Shape 15"/>
+          <p:cNvSpPr/>
+          <p:nvPr/>
+        </p:nvSpPr>
+        <p:spPr>
+          <a:xfrm>
+            <a:off x="2626309" y="2971800"/>
+            <a:ext cx="1391869" cy="1965960"/>
           </a:xfrm>
           <a:prstGeom prst="roundRect">
             <a:avLst>
-              <a:gd name="adj" fmla="val 7273"/>
+              <a:gd name="adj" fmla="val 3942"/>
             </a:avLst>
           </a:prstGeom>
           <a:solidFill>
-            <a:srgbClr val="FFFFFF"/>
-          </a:solidFill>
-          <a:ln w="15240">
+            <a:srgbClr val="A5501F"/>
+          </a:solidFill>
+          <a:ln w="12700">
             <a:solidFill>
-              <a:srgbClr val="8CA85E"/>
+              <a:srgbClr val="A5501F"/>
             </a:solidFill>
             <a:prstDash val="solid"/>
           </a:ln>
@@ -1758,14 +1890,14 @@
       </p:sp>
       <p:sp>
         <p:nvSpPr>
-          <p:cNvPr id="9" name="Text 7"/>
-          <p:cNvSpPr/>
-          <p:nvPr/>
-        </p:nvSpPr>
-        <p:spPr>
-          <a:xfrm>
-            <a:off x="914400" y="3666744"/>
-            <a:ext cx="2651760" cy="365760"/>
+          <p:cNvPr id="18" name="Text 16"/>
+          <p:cNvSpPr/>
+          <p:nvPr/>
+        </p:nvSpPr>
+        <p:spPr>
+          <a:xfrm>
+            <a:off x="2772613" y="3154680"/>
+            <a:ext cx="1099261" cy="320040"/>
           </a:xfrm>
           <a:prstGeom prst="rect">
             <a:avLst/>
@@ -1777,34 +1909,76 @@
           <a:bodyPr wrap="square" lIns="0" tIns="0" rIns="0" bIns="0" rtlCol="0" anchor="ctr"/>
           <a:lstStyle/>
           <a:p>
-            <a:pPr algn="ctr" indent="0" marL="0">
+            <a:pPr indent="0" marL="0">
               <a:buNone/>
             </a:pPr>
             <a:r>
-              <a:rPr lang="en-US" sz="1400" b="1" dirty="0">
+              <a:rPr lang="en-US" sz="1100" dirty="0">
                 <a:solidFill>
-                  <a:srgbClr val="1C2617"/>
+                  <a:srgbClr val="FFFFFF"/>
                 </a:solidFill>
-                <a:latin typeface="Calibri" pitchFamily="34" charset="0"/>
-                <a:ea typeface="Calibri" pitchFamily="34" charset="-122"/>
-                <a:cs typeface="Calibri" pitchFamily="34" charset="-120"/>
+                <a:latin typeface="Consolas" pitchFamily="34" charset="0"/>
+                <a:ea typeface="Consolas" pitchFamily="34" charset="-122"/>
+                <a:cs typeface="Consolas" pitchFamily="34" charset="-120"/>
+              </a:rPr>
+              <a:t>02</a:t>
+            </a:r>
+            <a:endParaRPr lang="en-US" sz="1100" dirty="0"/>
+          </a:p>
+        </p:txBody>
+      </p:sp>
+      <p:sp>
+        <p:nvSpPr>
+          <p:cNvPr id="19" name="Text 17"/>
+          <p:cNvSpPr/>
+          <p:nvPr/>
+        </p:nvSpPr>
+        <p:spPr>
+          <a:xfrm>
+            <a:off x="2772613" y="3593592"/>
+            <a:ext cx="1099261" cy="868680"/>
+          </a:xfrm>
+          <a:prstGeom prst="rect">
+            <a:avLst/>
+          </a:prstGeom>
+          <a:noFill/>
+          <a:ln/>
+        </p:spPr>
+        <p:txBody>
+          <a:bodyPr wrap="square" lIns="0" tIns="0" rIns="0" bIns="0" rtlCol="0" anchor="t"/>
+          <a:lstStyle/>
+          <a:p>
+            <a:pPr indent="0" marL="0">
+              <a:lnSpc>
+                <a:spcPct val="96000"/>
+              </a:lnSpc>
+              <a:buNone/>
+            </a:pPr>
+            <a:r>
+              <a:rPr lang="en-US" sz="1300" b="1" dirty="0">
+                <a:solidFill>
+                  <a:srgbClr val="FFFFFF"/>
+                </a:solidFill>
+                <a:latin typeface="Cambria" pitchFamily="34" charset="0"/>
+                <a:ea typeface="Cambria" pitchFamily="34" charset="-122"/>
+                <a:cs typeface="Cambria" pitchFamily="34" charset="-120"/>
               </a:rPr>
               <a:t>Fog node (EC2)</a:t>
             </a:r>
-            <a:endParaRPr lang="en-US" sz="1400" dirty="0"/>
-          </a:p>
-        </p:txBody>
-      </p:sp>
-      <p:sp>
-        <p:nvSpPr>
-          <p:cNvPr id="10" name="Text 8"/>
-          <p:cNvSpPr/>
-          <p:nvPr/>
-        </p:nvSpPr>
-        <p:spPr>
-          <a:xfrm>
-            <a:off x="914400" y="4050792"/>
-            <a:ext cx="2651760" cy="365760"/>
+            <a:endParaRPr lang="en-US" sz="1300" dirty="0"/>
+          </a:p>
+        </p:txBody>
+      </p:sp>
+      <p:sp>
+        <p:nvSpPr>
+          <p:cNvPr id="20" name="Text 18"/>
+          <p:cNvSpPr/>
+          <p:nvPr/>
+        </p:nvSpPr>
+        <p:spPr>
+          <a:xfrm>
+            <a:off x="2772613" y="4453128"/>
+            <a:ext cx="1099261" cy="365760"/>
           </a:xfrm>
           <a:prstGeom prst="rect">
             <a:avLst/>
@@ -1816,13 +1990,13 @@
           <a:bodyPr wrap="square" lIns="0" tIns="0" rIns="0" bIns="0" rtlCol="0" anchor="ctr"/>
           <a:lstStyle/>
           <a:p>
-            <a:pPr algn="ctr" indent="0" marL="0">
+            <a:pPr indent="0" marL="0">
               <a:buNone/>
             </a:pPr>
             <a:r>
-              <a:rPr lang="en-US" sz="1000" dirty="0">
+              <a:rPr lang="en-US" sz="900" dirty="0">
                 <a:solidFill>
-                  <a:srgbClr val="606E50"/>
+                  <a:srgbClr val="FFFFFF"/>
                 </a:solidFill>
                 <a:latin typeface="Calibri" pitchFamily="34" charset="0"/>
                 <a:ea typeface="Calibri" pitchFamily="34" charset="-122"/>
@@ -1830,56 +2004,52 @@
               </a:rPr>
               <a:t>window · aggregate · alert</a:t>
             </a:r>
-            <a:endParaRPr lang="en-US" sz="1000" dirty="0"/>
-          </a:p>
-        </p:txBody>
-      </p:sp>
-      <p:sp>
-        <p:nvSpPr>
-          <p:cNvPr id="11" name="Shape 9"/>
-          <p:cNvSpPr/>
-          <p:nvPr/>
-        </p:nvSpPr>
-        <p:spPr>
-          <a:xfrm>
-            <a:off x="3886200" y="3246120"/>
-            <a:ext cx="502920" cy="0"/>
-          </a:xfrm>
-          <a:prstGeom prst="line">
-            <a:avLst/>
-          </a:prstGeom>
-          <a:noFill/>
-          <a:ln w="31750">
-            <a:solidFill>
-              <a:srgbClr val="4B6B2A"/>
-            </a:solidFill>
-            <a:prstDash val="solid"/>
-            <a:tailEnd type="triangle"/>
-          </a:ln>
-        </p:spPr>
-      </p:sp>
-      <p:sp>
-        <p:nvSpPr>
-          <p:cNvPr id="12" name="Shape 10"/>
-          <p:cNvSpPr/>
-          <p:nvPr/>
-        </p:nvSpPr>
-        <p:spPr>
-          <a:xfrm>
-            <a:off x="4572000" y="1554480"/>
-            <a:ext cx="6949440" cy="3383280"/>
+            <a:endParaRPr lang="en-US" sz="900" dirty="0"/>
+          </a:p>
+        </p:txBody>
+      </p:sp>
+      <p:sp>
+        <p:nvSpPr>
+          <p:cNvPr id="21" name="Shape 19"/>
+          <p:cNvSpPr/>
+          <p:nvPr/>
+        </p:nvSpPr>
+        <p:spPr>
+          <a:xfrm>
+            <a:off x="4091330" y="3845052"/>
+            <a:ext cx="310896" cy="219456"/>
+          </a:xfrm>
+          <a:prstGeom prst="rightArrow">
+            <a:avLst/>
+          </a:prstGeom>
+          <a:solidFill>
+            <a:srgbClr val="8B98A6"/>
+          </a:solidFill>
+          <a:ln/>
+        </p:spPr>
+      </p:sp>
+      <p:sp>
+        <p:nvSpPr>
+          <p:cNvPr id="22" name="Shape 20"/>
+          <p:cNvSpPr/>
+          <p:nvPr/>
+        </p:nvSpPr>
+        <p:spPr>
+          <a:xfrm>
+            <a:off x="4475378" y="2971800"/>
+            <a:ext cx="1391869" cy="1965960"/>
           </a:xfrm>
           <a:prstGeom prst="roundRect">
             <a:avLst>
-              <a:gd name="adj" fmla="val 2703"/>
+              <a:gd name="adj" fmla="val 3942"/>
             </a:avLst>
           </a:prstGeom>
           <a:solidFill>
-            <a:srgbClr val="EFF3E9"/>
-          </a:solidFill>
-          <a:ln w="19050">
+            <a:srgbClr val="2B4030"/>
+          </a:solidFill>
+          <a:ln w="12700">
             <a:solidFill>
-              <a:srgbClr val="4B6B2A"/>
+              <a:srgbClr val="3F5444"/>
             </a:solidFill>
             <a:prstDash val="solid"/>
           </a:ln>
@@ -1887,119 +2057,95 @@
       </p:sp>
       <p:sp>
         <p:nvSpPr>
-          <p:cNvPr id="13" name="Text 11"/>
-          <p:cNvSpPr/>
-          <p:nvPr/>
-        </p:nvSpPr>
-        <p:spPr>
-          <a:xfrm>
-            <a:off x="4572000" y="1691640"/>
-            <a:ext cx="6949440" cy="365760"/>
-          </a:xfrm>
-          <a:prstGeom prst="rect">
-            <a:avLst/>
-          </a:prstGeom>
-          <a:noFill/>
-          <a:ln/>
-        </p:spPr>
-        <p:txBody>
-          <a:bodyPr wrap="square" rtlCol="0" anchor="ctr"/>
-          <a:lstStyle/>
-          <a:p>
-            <a:pPr algn="ctr" indent="0" marL="0">
+          <p:cNvPr id="23" name="Text 21"/>
+          <p:cNvSpPr/>
+          <p:nvPr/>
+        </p:nvSpPr>
+        <p:spPr>
+          <a:xfrm>
+            <a:off x="4621682" y="3154680"/>
+            <a:ext cx="1099261" cy="320040"/>
+          </a:xfrm>
+          <a:prstGeom prst="rect">
+            <a:avLst/>
+          </a:prstGeom>
+          <a:noFill/>
+          <a:ln/>
+        </p:spPr>
+        <p:txBody>
+          <a:bodyPr wrap="square" lIns="0" tIns="0" rIns="0" bIns="0" rtlCol="0" anchor="ctr"/>
+          <a:lstStyle/>
+          <a:p>
+            <a:pPr indent="0" marL="0">
               <a:buNone/>
             </a:pPr>
             <a:r>
-              <a:rPr lang="en-US" sz="1200" b="1" spc="200" kern="0" dirty="0">
+              <a:rPr lang="en-US" sz="1100" dirty="0">
                 <a:solidFill>
-                  <a:srgbClr val="4B6B2A"/>
+                  <a:srgbClr val="A5501F"/>
                 </a:solidFill>
-                <a:latin typeface="Calibri" pitchFamily="34" charset="0"/>
-                <a:ea typeface="Calibri" pitchFamily="34" charset="-122"/>
-                <a:cs typeface="Calibri" pitchFamily="34" charset="-120"/>
+                <a:latin typeface="Consolas" pitchFamily="34" charset="0"/>
+                <a:ea typeface="Consolas" pitchFamily="34" charset="-122"/>
+                <a:cs typeface="Consolas" pitchFamily="34" charset="-120"/>
               </a:rPr>
-              <a:t>CLOUD (serverless)</a:t>
-            </a:r>
-            <a:endParaRPr lang="en-US" sz="1200" dirty="0"/>
-          </a:p>
-        </p:txBody>
-      </p:sp>
-      <p:sp>
-        <p:nvSpPr>
-          <p:cNvPr id="14" name="Shape 12"/>
-          <p:cNvSpPr/>
-          <p:nvPr/>
-        </p:nvSpPr>
-        <p:spPr>
-          <a:xfrm>
-            <a:off x="4846320" y="2651760"/>
-            <a:ext cx="1463040" cy="1371600"/>
-          </a:xfrm>
-          <a:prstGeom prst="roundRect">
-            <a:avLst>
-              <a:gd name="adj" fmla="val 5333"/>
-            </a:avLst>
-          </a:prstGeom>
-          <a:solidFill>
-            <a:srgbClr val="FFFFFF"/>
-          </a:solidFill>
-          <a:ln w="15240">
-            <a:solidFill>
-              <a:srgbClr val="4B6B2A"/>
-            </a:solidFill>
-            <a:prstDash val="solid"/>
-          </a:ln>
-        </p:spPr>
-      </p:sp>
-      <p:sp>
-        <p:nvSpPr>
-          <p:cNvPr id="15" name="Text 13"/>
-          <p:cNvSpPr/>
-          <p:nvPr/>
-        </p:nvSpPr>
-        <p:spPr>
-          <a:xfrm>
-            <a:off x="4800600" y="2907792"/>
-            <a:ext cx="1554480" cy="457200"/>
-          </a:xfrm>
-          <a:prstGeom prst="rect">
-            <a:avLst/>
-          </a:prstGeom>
-          <a:noFill/>
-          <a:ln/>
-        </p:spPr>
-        <p:txBody>
-          <a:bodyPr wrap="square" lIns="0" tIns="0" rIns="0" bIns="0" rtlCol="0" anchor="ctr"/>
-          <a:lstStyle/>
-          <a:p>
-            <a:pPr algn="ctr" indent="0" marL="0">
+              <a:t>03</a:t>
+            </a:r>
+            <a:endParaRPr lang="en-US" sz="1100" dirty="0"/>
+          </a:p>
+        </p:txBody>
+      </p:sp>
+      <p:sp>
+        <p:nvSpPr>
+          <p:cNvPr id="24" name="Text 22"/>
+          <p:cNvSpPr/>
+          <p:nvPr/>
+        </p:nvSpPr>
+        <p:spPr>
+          <a:xfrm>
+            <a:off x="4621682" y="3593592"/>
+            <a:ext cx="1099261" cy="868680"/>
+          </a:xfrm>
+          <a:prstGeom prst="rect">
+            <a:avLst/>
+          </a:prstGeom>
+          <a:noFill/>
+          <a:ln/>
+        </p:spPr>
+        <p:txBody>
+          <a:bodyPr wrap="square" lIns="0" tIns="0" rIns="0" bIns="0" rtlCol="0" anchor="t"/>
+          <a:lstStyle/>
+          <a:p>
+            <a:pPr indent="0" marL="0">
+              <a:lnSpc>
+                <a:spcPct val="96000"/>
+              </a:lnSpc>
               <a:buNone/>
             </a:pPr>
             <a:r>
-              <a:rPr lang="en-US" sz="1250" b="1" dirty="0">
+              <a:rPr lang="en-US" sz="1300" b="1" dirty="0">
                 <a:solidFill>
-                  <a:srgbClr val="1C2617"/>
+                  <a:srgbClr val="ECE3CF"/>
                 </a:solidFill>
-                <a:latin typeface="Calibri" pitchFamily="34" charset="0"/>
-                <a:ea typeface="Calibri" pitchFamily="34" charset="-122"/>
-                <a:cs typeface="Calibri" pitchFamily="34" charset="-120"/>
+                <a:latin typeface="Cambria" pitchFamily="34" charset="0"/>
+                <a:ea typeface="Cambria" pitchFamily="34" charset="-122"/>
+                <a:cs typeface="Cambria" pitchFamily="34" charset="-120"/>
               </a:rPr>
               <a:t>Amazon SQS</a:t>
             </a:r>
-            <a:endParaRPr lang="en-US" sz="1250" dirty="0"/>
-          </a:p>
-        </p:txBody>
-      </p:sp>
-      <p:sp>
-        <p:nvSpPr>
-          <p:cNvPr id="16" name="Text 14"/>
-          <p:cNvSpPr/>
-          <p:nvPr/>
-        </p:nvSpPr>
-        <p:spPr>
-          <a:xfrm>
-            <a:off x="4828032" y="3401568"/>
-            <a:ext cx="1499616" cy="457200"/>
+            <a:endParaRPr lang="en-US" sz="1300" dirty="0"/>
+          </a:p>
+        </p:txBody>
+      </p:sp>
+      <p:sp>
+        <p:nvSpPr>
+          <p:cNvPr id="25" name="Text 23"/>
+          <p:cNvSpPr/>
+          <p:nvPr/>
+        </p:nvSpPr>
+        <p:spPr>
+          <a:xfrm>
+            <a:off x="4621682" y="4453128"/>
+            <a:ext cx="1099261" cy="365760"/>
           </a:xfrm>
           <a:prstGeom prst="rect">
             <a:avLst/>
@@ -2011,13 +2157,13 @@
           <a:bodyPr wrap="square" lIns="0" tIns="0" rIns="0" bIns="0" rtlCol="0" anchor="ctr"/>
           <a:lstStyle/>
           <a:p>
-            <a:pPr algn="ctr" indent="0" marL="0">
+            <a:pPr indent="0" marL="0">
               <a:buNone/>
             </a:pPr>
             <a:r>
               <a:rPr lang="en-US" sz="900" dirty="0">
                 <a:solidFill>
-                  <a:srgbClr val="606E50"/>
+                  <a:srgbClr val="8B98A6"/>
                 </a:solidFill>
                 <a:latin typeface="Calibri" pitchFamily="34" charset="0"/>
                 <a:ea typeface="Calibri" pitchFamily="34" charset="-122"/>
@@ -2031,50 +2177,46 @@
       </p:sp>
       <p:sp>
         <p:nvSpPr>
-          <p:cNvPr id="17" name="Shape 15"/>
-          <p:cNvSpPr/>
-          <p:nvPr/>
-        </p:nvSpPr>
-        <p:spPr>
-          <a:xfrm>
-            <a:off x="6318504" y="3337560"/>
-            <a:ext cx="164592" cy="0"/>
-          </a:xfrm>
-          <a:prstGeom prst="line">
-            <a:avLst/>
-          </a:prstGeom>
-          <a:noFill/>
-          <a:ln w="20320">
-            <a:solidFill>
-              <a:srgbClr val="8CA85E"/>
-            </a:solidFill>
-            <a:prstDash val="solid"/>
-            <a:tailEnd type="triangle"/>
-          </a:ln>
-        </p:spPr>
-      </p:sp>
-      <p:sp>
-        <p:nvSpPr>
-          <p:cNvPr id="18" name="Shape 16"/>
-          <p:cNvSpPr/>
-          <p:nvPr/>
-        </p:nvSpPr>
-        <p:spPr>
-          <a:xfrm>
-            <a:off x="6492240" y="2651760"/>
-            <a:ext cx="1463040" cy="1371600"/>
+          <p:cNvPr id="26" name="Shape 24"/>
+          <p:cNvSpPr/>
+          <p:nvPr/>
+        </p:nvSpPr>
+        <p:spPr>
+          <a:xfrm>
+            <a:off x="5940400" y="3845052"/>
+            <a:ext cx="310896" cy="219456"/>
+          </a:xfrm>
+          <a:prstGeom prst="rightArrow">
+            <a:avLst/>
+          </a:prstGeom>
+          <a:solidFill>
+            <a:srgbClr val="8B98A6"/>
+          </a:solidFill>
+          <a:ln/>
+        </p:spPr>
+      </p:sp>
+      <p:sp>
+        <p:nvSpPr>
+          <p:cNvPr id="27" name="Shape 25"/>
+          <p:cNvSpPr/>
+          <p:nvPr/>
+        </p:nvSpPr>
+        <p:spPr>
+          <a:xfrm>
+            <a:off x="6324448" y="2971800"/>
+            <a:ext cx="1391869" cy="1965960"/>
           </a:xfrm>
           <a:prstGeom prst="roundRect">
             <a:avLst>
-              <a:gd name="adj" fmla="val 5333"/>
+              <a:gd name="adj" fmla="val 3942"/>
             </a:avLst>
           </a:prstGeom>
           <a:solidFill>
-            <a:srgbClr val="FFFFFF"/>
-          </a:solidFill>
-          <a:ln w="15240">
+            <a:srgbClr val="2B4030"/>
+          </a:solidFill>
+          <a:ln w="12700">
             <a:solidFill>
-              <a:srgbClr val="4B6B2A"/>
+              <a:srgbClr val="3F5444"/>
             </a:solidFill>
             <a:prstDash val="solid"/>
           </a:ln>
@@ -2082,14 +2224,14 @@
       </p:sp>
       <p:sp>
         <p:nvSpPr>
-          <p:cNvPr id="19" name="Text 17"/>
-          <p:cNvSpPr/>
-          <p:nvPr/>
-        </p:nvSpPr>
-        <p:spPr>
-          <a:xfrm>
-            <a:off x="6446520" y="2907792"/>
-            <a:ext cx="1554480" cy="457200"/>
+          <p:cNvPr id="28" name="Text 26"/>
+          <p:cNvSpPr/>
+          <p:nvPr/>
+        </p:nvSpPr>
+        <p:spPr>
+          <a:xfrm>
+            <a:off x="6470752" y="3154680"/>
+            <a:ext cx="1099261" cy="320040"/>
           </a:xfrm>
           <a:prstGeom prst="rect">
             <a:avLst/>
@@ -2101,34 +2243,76 @@
           <a:bodyPr wrap="square" lIns="0" tIns="0" rIns="0" bIns="0" rtlCol="0" anchor="ctr"/>
           <a:lstStyle/>
           <a:p>
-            <a:pPr algn="ctr" indent="0" marL="0">
+            <a:pPr indent="0" marL="0">
               <a:buNone/>
             </a:pPr>
             <a:r>
-              <a:rPr lang="en-US" sz="1250" b="1" dirty="0">
+              <a:rPr lang="en-US" sz="1100" dirty="0">
                 <a:solidFill>
-                  <a:srgbClr val="1C2617"/>
+                  <a:srgbClr val="A5501F"/>
                 </a:solidFill>
-                <a:latin typeface="Calibri" pitchFamily="34" charset="0"/>
-                <a:ea typeface="Calibri" pitchFamily="34" charset="-122"/>
-                <a:cs typeface="Calibri" pitchFamily="34" charset="-120"/>
+                <a:latin typeface="Consolas" pitchFamily="34" charset="0"/>
+                <a:ea typeface="Consolas" pitchFamily="34" charset="-122"/>
+                <a:cs typeface="Consolas" pitchFamily="34" charset="-120"/>
+              </a:rPr>
+              <a:t>04</a:t>
+            </a:r>
+            <a:endParaRPr lang="en-US" sz="1100" dirty="0"/>
+          </a:p>
+        </p:txBody>
+      </p:sp>
+      <p:sp>
+        <p:nvSpPr>
+          <p:cNvPr id="29" name="Text 27"/>
+          <p:cNvSpPr/>
+          <p:nvPr/>
+        </p:nvSpPr>
+        <p:spPr>
+          <a:xfrm>
+            <a:off x="6470752" y="3593592"/>
+            <a:ext cx="1099261" cy="868680"/>
+          </a:xfrm>
+          <a:prstGeom prst="rect">
+            <a:avLst/>
+          </a:prstGeom>
+          <a:noFill/>
+          <a:ln/>
+        </p:spPr>
+        <p:txBody>
+          <a:bodyPr wrap="square" lIns="0" tIns="0" rIns="0" bIns="0" rtlCol="0" anchor="t"/>
+          <a:lstStyle/>
+          <a:p>
+            <a:pPr indent="0" marL="0">
+              <a:lnSpc>
+                <a:spcPct val="96000"/>
+              </a:lnSpc>
+              <a:buNone/>
+            </a:pPr>
+            <a:r>
+              <a:rPr lang="en-US" sz="1300" b="1" dirty="0">
+                <a:solidFill>
+                  <a:srgbClr val="ECE3CF"/>
+                </a:solidFill>
+                <a:latin typeface="Cambria" pitchFamily="34" charset="0"/>
+                <a:ea typeface="Cambria" pitchFamily="34" charset="-122"/>
+                <a:cs typeface="Cambria" pitchFamily="34" charset="-120"/>
               </a:rPr>
               <a:t>AWS Lambda</a:t>
             </a:r>
-            <a:endParaRPr lang="en-US" sz="1250" dirty="0"/>
-          </a:p>
-        </p:txBody>
-      </p:sp>
-      <p:sp>
-        <p:nvSpPr>
-          <p:cNvPr id="20" name="Text 18"/>
-          <p:cNvSpPr/>
-          <p:nvPr/>
-        </p:nvSpPr>
-        <p:spPr>
-          <a:xfrm>
-            <a:off x="6473952" y="3401568"/>
-            <a:ext cx="1499616" cy="457200"/>
+            <a:endParaRPr lang="en-US" sz="1300" dirty="0"/>
+          </a:p>
+        </p:txBody>
+      </p:sp>
+      <p:sp>
+        <p:nvSpPr>
+          <p:cNvPr id="30" name="Text 28"/>
+          <p:cNvSpPr/>
+          <p:nvPr/>
+        </p:nvSpPr>
+        <p:spPr>
+          <a:xfrm>
+            <a:off x="6470752" y="4453128"/>
+            <a:ext cx="1099261" cy="365760"/>
           </a:xfrm>
           <a:prstGeom prst="rect">
             <a:avLst/>
@@ -2140,13 +2324,13 @@
           <a:bodyPr wrap="square" lIns="0" tIns="0" rIns="0" bIns="0" rtlCol="0" anchor="ctr"/>
           <a:lstStyle/>
           <a:p>
-            <a:pPr algn="ctr" indent="0" marL="0">
+            <a:pPr indent="0" marL="0">
               <a:buNone/>
             </a:pPr>
             <a:r>
               <a:rPr lang="en-US" sz="900" dirty="0">
                 <a:solidFill>
-                  <a:srgbClr val="606E50"/>
+                  <a:srgbClr val="8B98A6"/>
                 </a:solidFill>
                 <a:latin typeface="Calibri" pitchFamily="34" charset="0"/>
                 <a:ea typeface="Calibri" pitchFamily="34" charset="-122"/>
@@ -2160,50 +2344,46 @@
       </p:sp>
       <p:sp>
         <p:nvSpPr>
-          <p:cNvPr id="21" name="Shape 19"/>
-          <p:cNvSpPr/>
-          <p:nvPr/>
-        </p:nvSpPr>
-        <p:spPr>
-          <a:xfrm>
-            <a:off x="7964424" y="3337560"/>
-            <a:ext cx="164592" cy="0"/>
-          </a:xfrm>
-          <a:prstGeom prst="line">
-            <a:avLst/>
-          </a:prstGeom>
-          <a:noFill/>
-          <a:ln w="20320">
-            <a:solidFill>
-              <a:srgbClr val="8CA85E"/>
-            </a:solidFill>
-            <a:prstDash val="solid"/>
-            <a:tailEnd type="triangle"/>
-          </a:ln>
-        </p:spPr>
-      </p:sp>
-      <p:sp>
-        <p:nvSpPr>
-          <p:cNvPr id="22" name="Shape 20"/>
-          <p:cNvSpPr/>
-          <p:nvPr/>
-        </p:nvSpPr>
-        <p:spPr>
-          <a:xfrm>
-            <a:off x="8138160" y="2651760"/>
-            <a:ext cx="1463040" cy="1371600"/>
+          <p:cNvPr id="31" name="Shape 29"/>
+          <p:cNvSpPr/>
+          <p:nvPr/>
+        </p:nvSpPr>
+        <p:spPr>
+          <a:xfrm>
+            <a:off x="7789469" y="3845052"/>
+            <a:ext cx="310896" cy="219456"/>
+          </a:xfrm>
+          <a:prstGeom prst="rightArrow">
+            <a:avLst/>
+          </a:prstGeom>
+          <a:solidFill>
+            <a:srgbClr val="8B98A6"/>
+          </a:solidFill>
+          <a:ln/>
+        </p:spPr>
+      </p:sp>
+      <p:sp>
+        <p:nvSpPr>
+          <p:cNvPr id="32" name="Shape 30"/>
+          <p:cNvSpPr/>
+          <p:nvPr/>
+        </p:nvSpPr>
+        <p:spPr>
+          <a:xfrm>
+            <a:off x="8173517" y="2971800"/>
+            <a:ext cx="1391869" cy="1965960"/>
           </a:xfrm>
           <a:prstGeom prst="roundRect">
             <a:avLst>
-              <a:gd name="adj" fmla="val 5333"/>
+              <a:gd name="adj" fmla="val 3942"/>
             </a:avLst>
           </a:prstGeom>
           <a:solidFill>
-            <a:srgbClr val="FFFFFF"/>
-          </a:solidFill>
-          <a:ln w="15240">
+            <a:srgbClr val="2B4030"/>
+          </a:solidFill>
+          <a:ln w="12700">
             <a:solidFill>
-              <a:srgbClr val="4B6B2A"/>
+              <a:srgbClr val="3F5444"/>
             </a:solidFill>
             <a:prstDash val="solid"/>
           </a:ln>
@@ -2211,14 +2391,14 @@
       </p:sp>
       <p:sp>
         <p:nvSpPr>
-          <p:cNvPr id="23" name="Text 21"/>
-          <p:cNvSpPr/>
-          <p:nvPr/>
-        </p:nvSpPr>
-        <p:spPr>
-          <a:xfrm>
-            <a:off x="8092440" y="2907792"/>
-            <a:ext cx="1554480" cy="457200"/>
+          <p:cNvPr id="33" name="Text 31"/>
+          <p:cNvSpPr/>
+          <p:nvPr/>
+        </p:nvSpPr>
+        <p:spPr>
+          <a:xfrm>
+            <a:off x="8319821" y="3154680"/>
+            <a:ext cx="1099261" cy="320040"/>
           </a:xfrm>
           <a:prstGeom prst="rect">
             <a:avLst/>
@@ -2230,34 +2410,76 @@
           <a:bodyPr wrap="square" lIns="0" tIns="0" rIns="0" bIns="0" rtlCol="0" anchor="ctr"/>
           <a:lstStyle/>
           <a:p>
-            <a:pPr algn="ctr" indent="0" marL="0">
+            <a:pPr indent="0" marL="0">
               <a:buNone/>
             </a:pPr>
             <a:r>
-              <a:rPr lang="en-US" sz="1250" b="1" dirty="0">
+              <a:rPr lang="en-US" sz="1100" dirty="0">
                 <a:solidFill>
-                  <a:srgbClr val="1C2617"/>
+                  <a:srgbClr val="A5501F"/>
                 </a:solidFill>
-                <a:latin typeface="Calibri" pitchFamily="34" charset="0"/>
-                <a:ea typeface="Calibri" pitchFamily="34" charset="-122"/>
-                <a:cs typeface="Calibri" pitchFamily="34" charset="-120"/>
+                <a:latin typeface="Consolas" pitchFamily="34" charset="0"/>
+                <a:ea typeface="Consolas" pitchFamily="34" charset="-122"/>
+                <a:cs typeface="Consolas" pitchFamily="34" charset="-120"/>
+              </a:rPr>
+              <a:t>05</a:t>
+            </a:r>
+            <a:endParaRPr lang="en-US" sz="1100" dirty="0"/>
+          </a:p>
+        </p:txBody>
+      </p:sp>
+      <p:sp>
+        <p:nvSpPr>
+          <p:cNvPr id="34" name="Text 32"/>
+          <p:cNvSpPr/>
+          <p:nvPr/>
+        </p:nvSpPr>
+        <p:spPr>
+          <a:xfrm>
+            <a:off x="8319821" y="3593592"/>
+            <a:ext cx="1099261" cy="868680"/>
+          </a:xfrm>
+          <a:prstGeom prst="rect">
+            <a:avLst/>
+          </a:prstGeom>
+          <a:noFill/>
+          <a:ln/>
+        </p:spPr>
+        <p:txBody>
+          <a:bodyPr wrap="square" lIns="0" tIns="0" rIns="0" bIns="0" rtlCol="0" anchor="t"/>
+          <a:lstStyle/>
+          <a:p>
+            <a:pPr indent="0" marL="0">
+              <a:lnSpc>
+                <a:spcPct val="96000"/>
+              </a:lnSpc>
+              <a:buNone/>
+            </a:pPr>
+            <a:r>
+              <a:rPr lang="en-US" sz="1300" b="1" dirty="0">
+                <a:solidFill>
+                  <a:srgbClr val="ECE3CF"/>
+                </a:solidFill>
+                <a:latin typeface="Cambria" pitchFamily="34" charset="0"/>
+                <a:ea typeface="Cambria" pitchFamily="34" charset="-122"/>
+                <a:cs typeface="Cambria" pitchFamily="34" charset="-120"/>
               </a:rPr>
               <a:t>DynamoDB</a:t>
             </a:r>
-            <a:endParaRPr lang="en-US" sz="1250" dirty="0"/>
-          </a:p>
-        </p:txBody>
-      </p:sp>
-      <p:sp>
-        <p:nvSpPr>
-          <p:cNvPr id="24" name="Text 22"/>
-          <p:cNvSpPr/>
-          <p:nvPr/>
-        </p:nvSpPr>
-        <p:spPr>
-          <a:xfrm>
-            <a:off x="8119872" y="3401568"/>
-            <a:ext cx="1499616" cy="457200"/>
+            <a:endParaRPr lang="en-US" sz="1300" dirty="0"/>
+          </a:p>
+        </p:txBody>
+      </p:sp>
+      <p:sp>
+        <p:nvSpPr>
+          <p:cNvPr id="35" name="Text 33"/>
+          <p:cNvSpPr/>
+          <p:nvPr/>
+        </p:nvSpPr>
+        <p:spPr>
+          <a:xfrm>
+            <a:off x="8319821" y="4453128"/>
+            <a:ext cx="1099261" cy="365760"/>
           </a:xfrm>
           <a:prstGeom prst="rect">
             <a:avLst/>
@@ -2269,13 +2491,13 @@
           <a:bodyPr wrap="square" lIns="0" tIns="0" rIns="0" bIns="0" rtlCol="0" anchor="ctr"/>
           <a:lstStyle/>
           <a:p>
-            <a:pPr algn="ctr" indent="0" marL="0">
+            <a:pPr indent="0" marL="0">
               <a:buNone/>
             </a:pPr>
             <a:r>
               <a:rPr lang="en-US" sz="900" dirty="0">
                 <a:solidFill>
-                  <a:srgbClr val="606E50"/>
+                  <a:srgbClr val="8B98A6"/>
                 </a:solidFill>
                 <a:latin typeface="Calibri" pitchFamily="34" charset="0"/>
                 <a:ea typeface="Calibri" pitchFamily="34" charset="-122"/>
@@ -2289,50 +2511,46 @@
       </p:sp>
       <p:sp>
         <p:nvSpPr>
-          <p:cNvPr id="25" name="Shape 23"/>
-          <p:cNvSpPr/>
-          <p:nvPr/>
-        </p:nvSpPr>
-        <p:spPr>
-          <a:xfrm>
-            <a:off x="9610344" y="3337560"/>
-            <a:ext cx="164592" cy="0"/>
-          </a:xfrm>
-          <a:prstGeom prst="line">
-            <a:avLst/>
-          </a:prstGeom>
-          <a:noFill/>
-          <a:ln w="20320">
-            <a:solidFill>
-              <a:srgbClr val="8CA85E"/>
-            </a:solidFill>
-            <a:prstDash val="solid"/>
-            <a:tailEnd type="triangle"/>
-          </a:ln>
-        </p:spPr>
-      </p:sp>
-      <p:sp>
-        <p:nvSpPr>
-          <p:cNvPr id="26" name="Shape 24"/>
-          <p:cNvSpPr/>
-          <p:nvPr/>
-        </p:nvSpPr>
-        <p:spPr>
-          <a:xfrm>
-            <a:off x="9784080" y="2651760"/>
-            <a:ext cx="1463040" cy="1371600"/>
+          <p:cNvPr id="36" name="Shape 34"/>
+          <p:cNvSpPr/>
+          <p:nvPr/>
+        </p:nvSpPr>
+        <p:spPr>
+          <a:xfrm>
+            <a:off x="9638538" y="3845052"/>
+            <a:ext cx="310896" cy="219456"/>
+          </a:xfrm>
+          <a:prstGeom prst="rightArrow">
+            <a:avLst/>
+          </a:prstGeom>
+          <a:solidFill>
+            <a:srgbClr val="8B98A6"/>
+          </a:solidFill>
+          <a:ln/>
+        </p:spPr>
+      </p:sp>
+      <p:sp>
+        <p:nvSpPr>
+          <p:cNvPr id="37" name="Shape 35"/>
+          <p:cNvSpPr/>
+          <p:nvPr/>
+        </p:nvSpPr>
+        <p:spPr>
+          <a:xfrm>
+            <a:off x="10022586" y="2971800"/>
+            <a:ext cx="1391869" cy="1965960"/>
           </a:xfrm>
           <a:prstGeom prst="roundRect">
             <a:avLst>
-              <a:gd name="adj" fmla="val 5333"/>
+              <a:gd name="adj" fmla="val 3942"/>
             </a:avLst>
           </a:prstGeom>
           <a:solidFill>
-            <a:srgbClr val="FFFFFF"/>
-          </a:solidFill>
-          <a:ln w="15240">
+            <a:srgbClr val="2B4030"/>
+          </a:solidFill>
+          <a:ln w="12700">
             <a:solidFill>
-              <a:srgbClr val="6A8F3C"/>
+              <a:srgbClr val="3F5444"/>
             </a:solidFill>
             <a:prstDash val="solid"/>
           </a:ln>
@@ -2340,14 +2558,14 @@
       </p:sp>
       <p:sp>
         <p:nvSpPr>
-          <p:cNvPr id="27" name="Text 25"/>
-          <p:cNvSpPr/>
-          <p:nvPr/>
-        </p:nvSpPr>
-        <p:spPr>
-          <a:xfrm>
-            <a:off x="9738360" y="2907792"/>
-            <a:ext cx="1554480" cy="457200"/>
+          <p:cNvPr id="38" name="Text 36"/>
+          <p:cNvSpPr/>
+          <p:nvPr/>
+        </p:nvSpPr>
+        <p:spPr>
+          <a:xfrm>
+            <a:off x="10168890" y="3154680"/>
+            <a:ext cx="1099261" cy="320040"/>
           </a:xfrm>
           <a:prstGeom prst="rect">
             <a:avLst/>
@@ -2359,34 +2577,76 @@
           <a:bodyPr wrap="square" lIns="0" tIns="0" rIns="0" bIns="0" rtlCol="0" anchor="ctr"/>
           <a:lstStyle/>
           <a:p>
-            <a:pPr algn="ctr" indent="0" marL="0">
+            <a:pPr indent="0" marL="0">
               <a:buNone/>
             </a:pPr>
             <a:r>
-              <a:rPr lang="en-US" sz="1250" b="1" dirty="0">
+              <a:rPr lang="en-US" sz="1100" dirty="0">
                 <a:solidFill>
-                  <a:srgbClr val="1C2617"/>
+                  <a:srgbClr val="A5501F"/>
                 </a:solidFill>
-                <a:latin typeface="Calibri" pitchFamily="34" charset="0"/>
-                <a:ea typeface="Calibri" pitchFamily="34" charset="-122"/>
-                <a:cs typeface="Calibri" pitchFamily="34" charset="-120"/>
+                <a:latin typeface="Consolas" pitchFamily="34" charset="0"/>
+                <a:ea typeface="Consolas" pitchFamily="34" charset="-122"/>
+                <a:cs typeface="Consolas" pitchFamily="34" charset="-120"/>
+              </a:rPr>
+              <a:t>06</a:t>
+            </a:r>
+            <a:endParaRPr lang="en-US" sz="1100" dirty="0"/>
+          </a:p>
+        </p:txBody>
+      </p:sp>
+      <p:sp>
+        <p:nvSpPr>
+          <p:cNvPr id="39" name="Text 37"/>
+          <p:cNvSpPr/>
+          <p:nvPr/>
+        </p:nvSpPr>
+        <p:spPr>
+          <a:xfrm>
+            <a:off x="10168890" y="3593592"/>
+            <a:ext cx="1099261" cy="868680"/>
+          </a:xfrm>
+          <a:prstGeom prst="rect">
+            <a:avLst/>
+          </a:prstGeom>
+          <a:noFill/>
+          <a:ln/>
+        </p:spPr>
+        <p:txBody>
+          <a:bodyPr wrap="square" lIns="0" tIns="0" rIns="0" bIns="0" rtlCol="0" anchor="t"/>
+          <a:lstStyle/>
+          <a:p>
+            <a:pPr indent="0" marL="0">
+              <a:lnSpc>
+                <a:spcPct val="96000"/>
+              </a:lnSpc>
+              <a:buNone/>
+            </a:pPr>
+            <a:r>
+              <a:rPr lang="en-US" sz="1300" b="1" dirty="0">
+                <a:solidFill>
+                  <a:srgbClr val="ECE3CF"/>
+                </a:solidFill>
+                <a:latin typeface="Cambria" pitchFamily="34" charset="0"/>
+                <a:ea typeface="Cambria" pitchFamily="34" charset="-122"/>
+                <a:cs typeface="Cambria" pitchFamily="34" charset="-120"/>
               </a:rPr>
               <a:t>API GW + S3</a:t>
             </a:r>
-            <a:endParaRPr lang="en-US" sz="1250" dirty="0"/>
-          </a:p>
-        </p:txBody>
-      </p:sp>
-      <p:sp>
-        <p:nvSpPr>
-          <p:cNvPr id="28" name="Text 26"/>
-          <p:cNvSpPr/>
-          <p:nvPr/>
-        </p:nvSpPr>
-        <p:spPr>
-          <a:xfrm>
-            <a:off x="9765792" y="3401568"/>
-            <a:ext cx="1499616" cy="457200"/>
+            <a:endParaRPr lang="en-US" sz="1300" dirty="0"/>
+          </a:p>
+        </p:txBody>
+      </p:sp>
+      <p:sp>
+        <p:nvSpPr>
+          <p:cNvPr id="40" name="Text 38"/>
+          <p:cNvSpPr/>
+          <p:nvPr/>
+        </p:nvSpPr>
+        <p:spPr>
+          <a:xfrm>
+            <a:off x="10168890" y="4453128"/>
+            <a:ext cx="1099261" cy="365760"/>
           </a:xfrm>
           <a:prstGeom prst="rect">
             <a:avLst/>
@@ -2398,13 +2658,13 @@
           <a:bodyPr wrap="square" lIns="0" tIns="0" rIns="0" bIns="0" rtlCol="0" anchor="ctr"/>
           <a:lstStyle/>
           <a:p>
-            <a:pPr algn="ctr" indent="0" marL="0">
+            <a:pPr indent="0" marL="0">
               <a:buNone/>
             </a:pPr>
             <a:r>
               <a:rPr lang="en-US" sz="900" dirty="0">
                 <a:solidFill>
-                  <a:srgbClr val="606E50"/>
+                  <a:srgbClr val="8B98A6"/>
                 </a:solidFill>
                 <a:latin typeface="Calibri" pitchFamily="34" charset="0"/>
                 <a:ea typeface="Calibri" pitchFamily="34" charset="-122"/>
@@ -2413,45 +2673,6 @@
               <a:t>reserve dashboard</a:t>
             </a:r>
             <a:endParaRPr lang="en-US" sz="900" dirty="0"/>
-          </a:p>
-        </p:txBody>
-      </p:sp>
-      <p:sp>
-        <p:nvSpPr>
-          <p:cNvPr id="29" name="Text 27"/>
-          <p:cNvSpPr/>
-          <p:nvPr/>
-        </p:nvSpPr>
-        <p:spPr>
-          <a:xfrm>
-            <a:off x="640080" y="5257800"/>
-            <a:ext cx="10972800" cy="731520"/>
-          </a:xfrm>
-          <a:prstGeom prst="rect">
-            <a:avLst/>
-          </a:prstGeom>
-          <a:noFill/>
-          <a:ln/>
-        </p:spPr>
-        <p:txBody>
-          <a:bodyPr wrap="square" rtlCol="0" anchor="ctr"/>
-          <a:lstStyle/>
-          <a:p>
-            <a:pPr algn="ctr" indent="0" marL="0">
-              <a:buNone/>
-            </a:pPr>
-            <a:r>
-              <a:rPr lang="en-US" sz="1500" i="1" dirty="0">
-                <a:solidFill>
-                  <a:srgbClr val="4B6B2A"/>
-                </a:solidFill>
-                <a:latin typeface="Calibri" pitchFamily="34" charset="0"/>
-                <a:ea typeface="Calibri" pitchFamily="34" charset="-122"/>
-                <a:cs typeface="Calibri" pitchFamily="34" charset="-120"/>
-              </a:rPr>
-              <a:t>All four alert rules are evaluated at the fog node, on site, before anything reaches the cloud; only compact summaries cross onward.</a:t>
-            </a:r>
-            <a:endParaRPr lang="en-US" sz="1500" dirty="0"/>
           </a:p>
         </p:txBody>
       </p:sp>
@@ -2469,7 +2690,7 @@
     <p:bg>
       <p:bgPr>
         <a:solidFill>
-          <a:srgbClr val="FFFFFF"/>
+          <a:srgbClr val="203127"/>
         </a:solidFill>
       </p:bgPr>
     </p:bg>
@@ -2489,23 +2710,163 @@
       </p:grpSpPr>
       <p:sp>
         <p:nvSpPr>
-          <p:cNvPr id="2" name="Text 0"/>
-          <p:cNvSpPr/>
-          <p:nvPr/>
-        </p:nvSpPr>
-        <p:spPr>
-          <a:xfrm>
-            <a:off x="640080" y="457200"/>
-            <a:ext cx="7315200" cy="640080"/>
-          </a:xfrm>
-          <a:prstGeom prst="rect">
-            <a:avLst/>
-          </a:prstGeom>
-          <a:noFill/>
-          <a:ln/>
-        </p:spPr>
-        <p:txBody>
-          <a:bodyPr wrap="square" rtlCol="0" anchor="ctr"/>
+          <p:cNvPr id="2" name="Shape 0"/>
+          <p:cNvSpPr/>
+          <p:nvPr/>
+        </p:nvSpPr>
+        <p:spPr>
+          <a:xfrm>
+            <a:off x="10881360" y="640080"/>
+            <a:ext cx="91440" cy="91440"/>
+          </a:xfrm>
+          <a:prstGeom prst="ellipse">
+            <a:avLst/>
+          </a:prstGeom>
+          <a:solidFill>
+            <a:srgbClr val="A5501F"/>
+          </a:solidFill>
+          <a:ln/>
+        </p:spPr>
+      </p:sp>
+      <p:sp>
+        <p:nvSpPr>
+          <p:cNvPr id="3" name="Shape 1"/>
+          <p:cNvSpPr/>
+          <p:nvPr/>
+        </p:nvSpPr>
+        <p:spPr>
+          <a:xfrm>
+            <a:off x="11521440" y="1280160"/>
+            <a:ext cx="128016" cy="128016"/>
+          </a:xfrm>
+          <a:prstGeom prst="ellipse">
+            <a:avLst/>
+          </a:prstGeom>
+          <a:solidFill>
+            <a:srgbClr val="A5501F"/>
+          </a:solidFill>
+          <a:ln/>
+        </p:spPr>
+      </p:sp>
+      <p:sp>
+        <p:nvSpPr>
+          <p:cNvPr id="4" name="Shape 2"/>
+          <p:cNvSpPr/>
+          <p:nvPr/>
+        </p:nvSpPr>
+        <p:spPr>
+          <a:xfrm>
+            <a:off x="10424160" y="1463040"/>
+            <a:ext cx="164592" cy="164592"/>
+          </a:xfrm>
+          <a:prstGeom prst="ellipse">
+            <a:avLst/>
+          </a:prstGeom>
+          <a:solidFill>
+            <a:srgbClr val="A5501F"/>
+          </a:solidFill>
+          <a:ln/>
+        </p:spPr>
+      </p:sp>
+      <p:sp>
+        <p:nvSpPr>
+          <p:cNvPr id="5" name="Shape 3"/>
+          <p:cNvSpPr/>
+          <p:nvPr/>
+        </p:nvSpPr>
+        <p:spPr>
+          <a:xfrm>
+            <a:off x="11155680" y="2103120"/>
+            <a:ext cx="91440" cy="91440"/>
+          </a:xfrm>
+          <a:prstGeom prst="ellipse">
+            <a:avLst/>
+          </a:prstGeom>
+          <a:solidFill>
+            <a:srgbClr val="A5501F"/>
+          </a:solidFill>
+          <a:ln/>
+        </p:spPr>
+      </p:sp>
+      <p:sp>
+        <p:nvSpPr>
+          <p:cNvPr id="6" name="Shape 4"/>
+          <p:cNvSpPr/>
+          <p:nvPr/>
+        </p:nvSpPr>
+        <p:spPr>
+          <a:xfrm>
+            <a:off x="9966960" y="914400"/>
+            <a:ext cx="128016" cy="128016"/>
+          </a:xfrm>
+          <a:prstGeom prst="ellipse">
+            <a:avLst/>
+          </a:prstGeom>
+          <a:solidFill>
+            <a:srgbClr val="A5501F"/>
+          </a:solidFill>
+          <a:ln/>
+        </p:spPr>
+      </p:sp>
+      <p:sp>
+        <p:nvSpPr>
+          <p:cNvPr id="7" name="Shape 5"/>
+          <p:cNvSpPr/>
+          <p:nvPr/>
+        </p:nvSpPr>
+        <p:spPr>
+          <a:xfrm>
+            <a:off x="11704320" y="2651760"/>
+            <a:ext cx="164592" cy="164592"/>
+          </a:xfrm>
+          <a:prstGeom prst="ellipse">
+            <a:avLst/>
+          </a:prstGeom>
+          <a:solidFill>
+            <a:srgbClr val="A5501F"/>
+          </a:solidFill>
+          <a:ln/>
+        </p:spPr>
+      </p:sp>
+      <p:sp>
+        <p:nvSpPr>
+          <p:cNvPr id="8" name="Shape 6"/>
+          <p:cNvSpPr/>
+          <p:nvPr/>
+        </p:nvSpPr>
+        <p:spPr>
+          <a:xfrm>
+            <a:off x="10698480" y="2468880"/>
+            <a:ext cx="91440" cy="91440"/>
+          </a:xfrm>
+          <a:prstGeom prst="ellipse">
+            <a:avLst/>
+          </a:prstGeom>
+          <a:solidFill>
+            <a:srgbClr val="A5501F"/>
+          </a:solidFill>
+          <a:ln/>
+        </p:spPr>
+      </p:sp>
+      <p:sp>
+        <p:nvSpPr>
+          <p:cNvPr id="9" name="Text 7"/>
+          <p:cNvSpPr/>
+          <p:nvPr/>
+        </p:nvSpPr>
+        <p:spPr>
+          <a:xfrm>
+            <a:off x="777240" y="731520"/>
+            <a:ext cx="914400" cy="640080"/>
+          </a:xfrm>
+          <a:prstGeom prst="rect">
+            <a:avLst/>
+          </a:prstGeom>
+          <a:noFill/>
+          <a:ln/>
+        </p:spPr>
+        <p:txBody>
+          <a:bodyPr wrap="square" lIns="0" tIns="0" rIns="0" bIns="0" rtlCol="0" anchor="ctr"/>
           <a:lstStyle/>
           <a:p>
             <a:pPr indent="0" marL="0">
@@ -2514,13 +2875,13 @@
             <a:r>
               <a:rPr lang="en-US" sz="3000" b="1" dirty="0">
                 <a:solidFill>
-                  <a:srgbClr val="1C2617"/>
+                  <a:srgbClr val="A5501F"/>
                 </a:solidFill>
                 <a:latin typeface="Cambria" pitchFamily="34" charset="0"/>
                 <a:ea typeface="Cambria" pitchFamily="34" charset="-122"/>
                 <a:cs typeface="Cambria" pitchFamily="34" charset="-120"/>
               </a:rPr>
-              <a:t>Live Demo</a:t>
+              <a:t>02</a:t>
             </a:r>
             <a:endParaRPr lang="en-US" sz="3000" dirty="0"/>
           </a:p>
@@ -2528,32 +2889,110 @@
       </p:sp>
       <p:sp>
         <p:nvSpPr>
-          <p:cNvPr id="3" name="Text 1"/>
-          <p:cNvSpPr/>
-          <p:nvPr/>
-        </p:nvSpPr>
-        <p:spPr>
-          <a:xfrm>
-            <a:off x="658368" y="1143000"/>
-            <a:ext cx="10972800" cy="365760"/>
-          </a:xfrm>
-          <a:prstGeom prst="rect">
-            <a:avLst/>
-          </a:prstGeom>
-          <a:noFill/>
-          <a:ln/>
-        </p:spPr>
-        <p:txBody>
-          <a:bodyPr wrap="square" rtlCol="0" anchor="ctr"/>
+          <p:cNvPr id="10" name="Text 8"/>
+          <p:cNvSpPr/>
+          <p:nvPr/>
+        </p:nvSpPr>
+        <p:spPr>
+          <a:xfrm>
+            <a:off x="1645920" y="905256"/>
+            <a:ext cx="9768535" cy="274320"/>
+          </a:xfrm>
+          <a:prstGeom prst="rect">
+            <a:avLst/>
+          </a:prstGeom>
+          <a:noFill/>
+          <a:ln/>
+        </p:spPr>
+        <p:txBody>
+          <a:bodyPr wrap="square" lIns="0" tIns="0" rIns="0" bIns="0" rtlCol="0" anchor="ctr"/>
           <a:lstStyle/>
           <a:p>
             <a:pPr indent="0" marL="0">
               <a:buNone/>
             </a:pPr>
             <a:r>
-              <a:rPr lang="en-US" sz="1400" dirty="0">
+              <a:rPr lang="en-US" sz="1100" b="1" spc="200" kern="0" dirty="0">
                 <a:solidFill>
-                  <a:srgbClr val="6A8F3C"/>
+                  <a:srgbClr val="8B98A6"/>
+                </a:solidFill>
+                <a:latin typeface="Calibri" pitchFamily="34" charset="0"/>
+                <a:ea typeface="Calibri" pitchFamily="34" charset="-122"/>
+                <a:cs typeface="Calibri" pitchFamily="34" charset="-120"/>
+              </a:rPr>
+              <a:t>LIVE DEMO</a:t>
+            </a:r>
+            <a:endParaRPr lang="en-US" sz="1100" dirty="0"/>
+          </a:p>
+        </p:txBody>
+      </p:sp>
+      <p:sp>
+        <p:nvSpPr>
+          <p:cNvPr id="11" name="Text 9"/>
+          <p:cNvSpPr/>
+          <p:nvPr/>
+        </p:nvSpPr>
+        <p:spPr>
+          <a:xfrm>
+            <a:off x="777240" y="1380744"/>
+            <a:ext cx="10637215" cy="640080"/>
+          </a:xfrm>
+          <a:prstGeom prst="rect">
+            <a:avLst/>
+          </a:prstGeom>
+          <a:noFill/>
+          <a:ln/>
+        </p:spPr>
+        <p:txBody>
+          <a:bodyPr wrap="square" lIns="0" tIns="0" rIns="0" bIns="0" rtlCol="0" anchor="ctr"/>
+          <a:lstStyle/>
+          <a:p>
+            <a:pPr indent="0" marL="0">
+              <a:buNone/>
+            </a:pPr>
+            <a:r>
+              <a:rPr lang="en-US" sz="2300" b="1" dirty="0">
+                <a:solidFill>
+                  <a:srgbClr val="ECE3CF"/>
+                </a:solidFill>
+                <a:latin typeface="Cambria" pitchFamily="34" charset="0"/>
+                <a:ea typeface="Cambria" pitchFamily="34" charset="-122"/>
+                <a:cs typeface="Cambria" pitchFamily="34" charset="-120"/>
+              </a:rPr>
+              <a:t>See it running on AWS</a:t>
+            </a:r>
+            <a:endParaRPr lang="en-US" sz="2300" dirty="0"/>
+          </a:p>
+        </p:txBody>
+      </p:sp>
+      <p:sp>
+        <p:nvSpPr>
+          <p:cNvPr id="12" name="Text 10"/>
+          <p:cNvSpPr/>
+          <p:nvPr/>
+        </p:nvSpPr>
+        <p:spPr>
+          <a:xfrm>
+            <a:off x="777240" y="1901952"/>
+            <a:ext cx="10637215" cy="274320"/>
+          </a:xfrm>
+          <a:prstGeom prst="rect">
+            <a:avLst/>
+          </a:prstGeom>
+          <a:noFill/>
+          <a:ln/>
+        </p:spPr>
+        <p:txBody>
+          <a:bodyPr wrap="square" rtlCol="0" anchor="ctr"/>
+          <a:lstStyle/>
+          <a:p>
+            <a:pPr indent="0" marL="0">
+              <a:buNone/>
+            </a:pPr>
+            <a:r>
+              <a:rPr lang="en-US" sz="1100" dirty="0">
+                <a:solidFill>
+                  <a:srgbClr val="A5501F"/>
                 </a:solidFill>
                 <a:latin typeface="Consolas" pitchFamily="34" charset="0"/>
                 <a:ea typeface="Consolas" pitchFamily="34" charset="-122"/>
@@ -2561,32 +3000,32 @@
               </a:rPr>
               <a:t>wcm-frontend-670139527491.s3.us-east-1.amazonaws.com</a:t>
             </a:r>
-            <a:endParaRPr lang="en-US" sz="1400" dirty="0"/>
-          </a:p>
-        </p:txBody>
-      </p:sp>
-      <p:sp>
-        <p:nvSpPr>
-          <p:cNvPr id="4" name="Shape 2"/>
-          <p:cNvSpPr/>
-          <p:nvPr/>
-        </p:nvSpPr>
-        <p:spPr>
-          <a:xfrm>
-            <a:off x="640080" y="1828800"/>
-            <a:ext cx="10881360" cy="1371600"/>
+            <a:endParaRPr lang="en-US" sz="1100" dirty="0"/>
+          </a:p>
+        </p:txBody>
+      </p:sp>
+      <p:sp>
+        <p:nvSpPr>
+          <p:cNvPr id="13" name="Shape 11"/>
+          <p:cNvSpPr/>
+          <p:nvPr/>
+        </p:nvSpPr>
+        <p:spPr>
+          <a:xfrm>
+            <a:off x="777240" y="2514600"/>
+            <a:ext cx="3301898" cy="3566160"/>
           </a:xfrm>
           <a:prstGeom prst="roundRect">
             <a:avLst>
-              <a:gd name="adj" fmla="val 6667"/>
+              <a:gd name="adj" fmla="val 1662"/>
             </a:avLst>
           </a:prstGeom>
           <a:solidFill>
-            <a:srgbClr val="EFF3E9"/>
-          </a:solidFill>
-          <a:ln w="15240">
+            <a:srgbClr val="2B4030"/>
+          </a:solidFill>
+          <a:ln w="12700">
             <a:solidFill>
-              <a:srgbClr val="6A8F3C"/>
+              <a:srgbClr val="3F5444"/>
             </a:solidFill>
             <a:prstDash val="solid"/>
           </a:ln>
@@ -2594,34 +3033,14 @@
       </p:sp>
       <p:sp>
         <p:nvSpPr>
-          <p:cNvPr id="5" name="Shape 3"/>
-          <p:cNvSpPr/>
-          <p:nvPr/>
-        </p:nvSpPr>
-        <p:spPr>
-          <a:xfrm>
-            <a:off x="960120" y="2203704"/>
-            <a:ext cx="621792" cy="621792"/>
-          </a:xfrm>
-          <a:prstGeom prst="ellipse">
-            <a:avLst/>
-          </a:prstGeom>
-          <a:solidFill>
-            <a:srgbClr val="4B6B2A"/>
-          </a:solidFill>
-          <a:ln/>
-        </p:spPr>
-      </p:sp>
-      <p:sp>
-        <p:nvSpPr>
-          <p:cNvPr id="6" name="Text 4"/>
-          <p:cNvSpPr/>
-          <p:nvPr/>
-        </p:nvSpPr>
-        <p:spPr>
-          <a:xfrm>
-            <a:off x="960120" y="2203704"/>
-            <a:ext cx="621792" cy="621792"/>
+          <p:cNvPr id="14" name="Text 12"/>
+          <p:cNvSpPr/>
+          <p:nvPr/>
+        </p:nvSpPr>
+        <p:spPr>
+          <a:xfrm>
+            <a:off x="1051560" y="2752344"/>
+            <a:ext cx="1828800" cy="777240"/>
           </a:xfrm>
           <a:prstGeom prst="rect">
             <a:avLst/>
@@ -2633,94 +3052,97 @@
           <a:bodyPr wrap="square" lIns="0" tIns="0" rIns="0" bIns="0" rtlCol="0" anchor="ctr"/>
           <a:lstStyle/>
           <a:p>
-            <a:pPr algn="ctr" indent="0" marL="0">
+            <a:pPr indent="0" marL="0">
               <a:buNone/>
             </a:pPr>
             <a:r>
-              <a:rPr lang="en-US" sz="2200" b="1" dirty="0">
+              <a:rPr lang="en-US" sz="3800" b="1" dirty="0">
                 <a:solidFill>
-                  <a:srgbClr val="FFFFFF"/>
+                  <a:srgbClr val="A5501F"/>
                 </a:solidFill>
                 <a:latin typeface="Cambria" pitchFamily="34" charset="0"/>
                 <a:ea typeface="Cambria" pitchFamily="34" charset="-122"/>
                 <a:cs typeface="Cambria" pitchFamily="34" charset="-120"/>
               </a:rPr>
-              <a:t>1</a:t>
-            </a:r>
-            <a:endParaRPr lang="en-US" sz="2200" dirty="0"/>
-          </a:p>
-        </p:txBody>
-      </p:sp>
-      <p:sp>
-        <p:nvSpPr>
-          <p:cNvPr id="7" name="Text 5"/>
-          <p:cNvSpPr/>
-          <p:nvPr/>
-        </p:nvSpPr>
-        <p:spPr>
-          <a:xfrm>
-            <a:off x="1828800" y="2029968"/>
-            <a:ext cx="9418320" cy="411480"/>
-          </a:xfrm>
-          <a:prstGeom prst="rect">
-            <a:avLst/>
-          </a:prstGeom>
-          <a:noFill/>
-          <a:ln/>
-        </p:spPr>
-        <p:txBody>
-          <a:bodyPr wrap="square" lIns="0" tIns="0" rIns="0" bIns="0" rtlCol="0" anchor="ctr"/>
-          <a:lstStyle/>
-          <a:p>
-            <a:pPr indent="0" marL="0">
-              <a:buNone/>
-            </a:pPr>
-            <a:r>
-              <a:rPr lang="en-US" sz="1700" b="1" dirty="0">
-                <a:solidFill>
-                  <a:srgbClr val="1C2617"/>
-                </a:solidFill>
-                <a:latin typeface="Calibri" pitchFamily="34" charset="0"/>
-                <a:ea typeface="Calibri" pitchFamily="34" charset="-122"/>
-                <a:cs typeface="Calibri" pitchFamily="34" charset="-120"/>
-              </a:rPr>
-              <a:t>Two reserves, side by side</a:t>
-            </a:r>
-            <a:endParaRPr lang="en-US" sz="1700" dirty="0"/>
-          </a:p>
-        </p:txBody>
-      </p:sp>
-      <p:sp>
-        <p:nvSpPr>
-          <p:cNvPr id="8" name="Text 6"/>
-          <p:cNvSpPr/>
-          <p:nvPr/>
-        </p:nvSpPr>
-        <p:spPr>
-          <a:xfrm>
-            <a:off x="1828800" y="2450592"/>
-            <a:ext cx="9418320" cy="594360"/>
-          </a:xfrm>
-          <a:prstGeom prst="rect">
-            <a:avLst/>
-          </a:prstGeom>
-          <a:noFill/>
-          <a:ln/>
-        </p:spPr>
-        <p:txBody>
-          <a:bodyPr wrap="square" lIns="0" tIns="0" rIns="0" bIns="0" rtlCol="0" anchor="ctr"/>
+              <a:t>01</a:t>
+            </a:r>
+            <a:endParaRPr lang="en-US" sz="3800" dirty="0"/>
+          </a:p>
+        </p:txBody>
+      </p:sp>
+      <p:sp>
+        <p:nvSpPr>
+          <p:cNvPr id="15" name="Text 13"/>
+          <p:cNvSpPr/>
+          <p:nvPr/>
+        </p:nvSpPr>
+        <p:spPr>
+          <a:xfrm>
+            <a:off x="1069848" y="3566160"/>
+            <a:ext cx="2753258" cy="868680"/>
+          </a:xfrm>
+          <a:prstGeom prst="rect">
+            <a:avLst/>
+          </a:prstGeom>
+          <a:noFill/>
+          <a:ln/>
+        </p:spPr>
+        <p:txBody>
+          <a:bodyPr wrap="square" lIns="0" tIns="0" rIns="0" bIns="0" rtlCol="0" anchor="t"/>
           <a:lstStyle/>
           <a:p>
             <a:pPr indent="0" marL="0">
               <a:lnSpc>
-                <a:spcPct val="105000"/>
+                <a:spcPct val="100000"/>
               </a:lnSpc>
               <a:buNone/>
             </a:pPr>
             <a:r>
-              <a:rPr lang="en-US" sz="1300" dirty="0">
+              <a:rPr lang="en-US" sz="1550" b="1" dirty="0">
                 <a:solidFill>
-                  <a:srgbClr val="606E50"/>
+                  <a:srgbClr val="ECE3CF"/>
+                </a:solidFill>
+                <a:latin typeface="Cambria" pitchFamily="34" charset="0"/>
+                <a:ea typeface="Cambria" pitchFamily="34" charset="-122"/>
+                <a:cs typeface="Cambria" pitchFamily="34" charset="-120"/>
+              </a:rPr>
+              <a:t>Two reserves, side by side</a:t>
+            </a:r>
+            <a:endParaRPr lang="en-US" sz="1550" dirty="0"/>
+          </a:p>
+        </p:txBody>
+      </p:sp>
+      <p:sp>
+        <p:nvSpPr>
+          <p:cNvPr id="16" name="Text 14"/>
+          <p:cNvSpPr/>
+          <p:nvPr/>
+        </p:nvSpPr>
+        <p:spPr>
+          <a:xfrm>
+            <a:off x="1069848" y="4434840"/>
+            <a:ext cx="2753258" cy="1463040"/>
+          </a:xfrm>
+          <a:prstGeom prst="rect">
+            <a:avLst/>
+          </a:prstGeom>
+          <a:noFill/>
+          <a:ln/>
+        </p:spPr>
+        <p:txBody>
+          <a:bodyPr wrap="square" lIns="0" tIns="0" rIns="0" bIns="0" rtlCol="0" anchor="ctr"/>
+          <a:lstStyle/>
+          <a:p>
+            <a:pPr indent="0" marL="0">
+              <a:lnSpc>
+                <a:spcPct val="120000"/>
+              </a:lnSpc>
+              <a:buNone/>
+            </a:pPr>
+            <a:r>
+              <a:rPr lang="en-US" sz="1200" dirty="0">
+                <a:solidFill>
+                  <a:srgbClr val="8B98A6"/>
                 </a:solidFill>
                 <a:latin typeface="Calibri" pitchFamily="34" charset="0"/>
                 <a:ea typeface="Calibri" pitchFamily="34" charset="-122"/>
@@ -2728,32 +3150,32 @@
               </a:rPr>
               <a:t>Motion, acoustics, waterhole level, temperature and soil moisture live for both reserves, with a field-station log.</a:t>
             </a:r>
-            <a:endParaRPr lang="en-US" sz="1300" dirty="0"/>
-          </a:p>
-        </p:txBody>
-      </p:sp>
-      <p:sp>
-        <p:nvSpPr>
-          <p:cNvPr id="9" name="Shape 7"/>
-          <p:cNvSpPr/>
-          <p:nvPr/>
-        </p:nvSpPr>
-        <p:spPr>
-          <a:xfrm>
-            <a:off x="640080" y="3346704"/>
-            <a:ext cx="10881360" cy="1371600"/>
+            <a:endParaRPr lang="en-US" sz="1200" dirty="0"/>
+          </a:p>
+        </p:txBody>
+      </p:sp>
+      <p:sp>
+        <p:nvSpPr>
+          <p:cNvPr id="17" name="Shape 15"/>
+          <p:cNvSpPr/>
+          <p:nvPr/>
+        </p:nvSpPr>
+        <p:spPr>
+          <a:xfrm>
+            <a:off x="4444898" y="2514600"/>
+            <a:ext cx="3301898" cy="3566160"/>
           </a:xfrm>
           <a:prstGeom prst="roundRect">
             <a:avLst>
-              <a:gd name="adj" fmla="val 6667"/>
+              <a:gd name="adj" fmla="val 1662"/>
             </a:avLst>
           </a:prstGeom>
           <a:solidFill>
-            <a:srgbClr val="EFF3E9"/>
-          </a:solidFill>
-          <a:ln w="15240">
+            <a:srgbClr val="2B4030"/>
+          </a:solidFill>
+          <a:ln w="12700">
             <a:solidFill>
-              <a:srgbClr val="6A8F3C"/>
+              <a:srgbClr val="3F5444"/>
             </a:solidFill>
             <a:prstDash val="solid"/>
           </a:ln>
@@ -2761,34 +3183,14 @@
       </p:sp>
       <p:sp>
         <p:nvSpPr>
-          <p:cNvPr id="10" name="Shape 8"/>
-          <p:cNvSpPr/>
-          <p:nvPr/>
-        </p:nvSpPr>
-        <p:spPr>
-          <a:xfrm>
-            <a:off x="960120" y="3721608"/>
-            <a:ext cx="621792" cy="621792"/>
-          </a:xfrm>
-          <a:prstGeom prst="ellipse">
-            <a:avLst/>
-          </a:prstGeom>
-          <a:solidFill>
-            <a:srgbClr val="4B6B2A"/>
-          </a:solidFill>
-          <a:ln/>
-        </p:spPr>
-      </p:sp>
-      <p:sp>
-        <p:nvSpPr>
-          <p:cNvPr id="11" name="Text 9"/>
-          <p:cNvSpPr/>
-          <p:nvPr/>
-        </p:nvSpPr>
-        <p:spPr>
-          <a:xfrm>
-            <a:off x="960120" y="3721608"/>
-            <a:ext cx="621792" cy="621792"/>
+          <p:cNvPr id="18" name="Text 16"/>
+          <p:cNvSpPr/>
+          <p:nvPr/>
+        </p:nvSpPr>
+        <p:spPr>
+          <a:xfrm>
+            <a:off x="4719218" y="2752344"/>
+            <a:ext cx="1828800" cy="777240"/>
           </a:xfrm>
           <a:prstGeom prst="rect">
             <a:avLst/>
@@ -2800,94 +3202,97 @@
           <a:bodyPr wrap="square" lIns="0" tIns="0" rIns="0" bIns="0" rtlCol="0" anchor="ctr"/>
           <a:lstStyle/>
           <a:p>
-            <a:pPr algn="ctr" indent="0" marL="0">
+            <a:pPr indent="0" marL="0">
               <a:buNone/>
             </a:pPr>
             <a:r>
-              <a:rPr lang="en-US" sz="2200" b="1" dirty="0">
+              <a:rPr lang="en-US" sz="3800" b="1" dirty="0">
                 <a:solidFill>
-                  <a:srgbClr val="FFFFFF"/>
+                  <a:srgbClr val="A5501F"/>
                 </a:solidFill>
                 <a:latin typeface="Cambria" pitchFamily="34" charset="0"/>
                 <a:ea typeface="Cambria" pitchFamily="34" charset="-122"/>
                 <a:cs typeface="Cambria" pitchFamily="34" charset="-120"/>
               </a:rPr>
-              <a:t>2</a:t>
-            </a:r>
-            <a:endParaRPr lang="en-US" sz="2200" dirty="0"/>
-          </a:p>
-        </p:txBody>
-      </p:sp>
-      <p:sp>
-        <p:nvSpPr>
-          <p:cNvPr id="12" name="Text 10"/>
-          <p:cNvSpPr/>
-          <p:nvPr/>
-        </p:nvSpPr>
-        <p:spPr>
-          <a:xfrm>
-            <a:off x="1828800" y="3547872"/>
-            <a:ext cx="9418320" cy="411480"/>
-          </a:xfrm>
-          <a:prstGeom prst="rect">
-            <a:avLst/>
-          </a:prstGeom>
-          <a:noFill/>
-          <a:ln/>
-        </p:spPr>
-        <p:txBody>
-          <a:bodyPr wrap="square" lIns="0" tIns="0" rIns="0" bIns="0" rtlCol="0" anchor="ctr"/>
-          <a:lstStyle/>
-          <a:p>
-            <a:pPr indent="0" marL="0">
-              <a:buNone/>
-            </a:pPr>
-            <a:r>
-              <a:rPr lang="en-US" sz="1700" b="1" dirty="0">
-                <a:solidFill>
-                  <a:srgbClr val="1C2617"/>
-                </a:solidFill>
-                <a:latin typeface="Calibri" pitchFamily="34" charset="0"/>
-                <a:ea typeface="Calibri" pitchFamily="34" charset="-122"/>
-                <a:cs typeface="Calibri" pitchFamily="34" charset="-120"/>
-              </a:rPr>
-              <a:t>Short-lived events caught at the edge</a:t>
-            </a:r>
-            <a:endParaRPr lang="en-US" sz="1700" dirty="0"/>
-          </a:p>
-        </p:txBody>
-      </p:sp>
-      <p:sp>
-        <p:nvSpPr>
-          <p:cNvPr id="13" name="Text 11"/>
-          <p:cNvSpPr/>
-          <p:nvPr/>
-        </p:nvSpPr>
-        <p:spPr>
-          <a:xfrm>
-            <a:off x="1828800" y="3968496"/>
-            <a:ext cx="9418320" cy="594360"/>
-          </a:xfrm>
-          <a:prstGeom prst="rect">
-            <a:avLst/>
-          </a:prstGeom>
-          <a:noFill/>
-          <a:ln/>
-        </p:spPr>
-        <p:txBody>
-          <a:bodyPr wrap="square" lIns="0" tIns="0" rIns="0" bIns="0" rtlCol="0" anchor="ctr"/>
+              <a:t>02</a:t>
+            </a:r>
+            <a:endParaRPr lang="en-US" sz="3800" dirty="0"/>
+          </a:p>
+        </p:txBody>
+      </p:sp>
+      <p:sp>
+        <p:nvSpPr>
+          <p:cNvPr id="19" name="Text 17"/>
+          <p:cNvSpPr/>
+          <p:nvPr/>
+        </p:nvSpPr>
+        <p:spPr>
+          <a:xfrm>
+            <a:off x="4737506" y="3566160"/>
+            <a:ext cx="2753258" cy="868680"/>
+          </a:xfrm>
+          <a:prstGeom prst="rect">
+            <a:avLst/>
+          </a:prstGeom>
+          <a:noFill/>
+          <a:ln/>
+        </p:spPr>
+        <p:txBody>
+          <a:bodyPr wrap="square" lIns="0" tIns="0" rIns="0" bIns="0" rtlCol="0" anchor="t"/>
           <a:lstStyle/>
           <a:p>
             <a:pPr indent="0" marL="0">
               <a:lnSpc>
-                <a:spcPct val="105000"/>
+                <a:spcPct val="100000"/>
               </a:lnSpc>
               <a:buNone/>
             </a:pPr>
             <a:r>
-              <a:rPr lang="en-US" sz="1300" dirty="0">
+              <a:rPr lang="en-US" sz="1550" b="1" dirty="0">
                 <a:solidFill>
-                  <a:srgbClr val="606E50"/>
+                  <a:srgbClr val="ECE3CF"/>
+                </a:solidFill>
+                <a:latin typeface="Cambria" pitchFamily="34" charset="0"/>
+                <a:ea typeface="Cambria" pitchFamily="34" charset="-122"/>
+                <a:cs typeface="Cambria" pitchFamily="34" charset="-120"/>
+              </a:rPr>
+              <a:t>Short-lived events caught at the edge</a:t>
+            </a:r>
+            <a:endParaRPr lang="en-US" sz="1550" dirty="0"/>
+          </a:p>
+        </p:txBody>
+      </p:sp>
+      <p:sp>
+        <p:nvSpPr>
+          <p:cNvPr id="20" name="Text 18"/>
+          <p:cNvSpPr/>
+          <p:nvPr/>
+        </p:nvSpPr>
+        <p:spPr>
+          <a:xfrm>
+            <a:off x="4737506" y="4434840"/>
+            <a:ext cx="2753258" cy="1463040"/>
+          </a:xfrm>
+          <a:prstGeom prst="rect">
+            <a:avLst/>
+          </a:prstGeom>
+          <a:noFill/>
+          <a:ln/>
+        </p:spPr>
+        <p:txBody>
+          <a:bodyPr wrap="square" lIns="0" tIns="0" rIns="0" bIns="0" rtlCol="0" anchor="ctr"/>
+          <a:lstStyle/>
+          <a:p>
+            <a:pPr indent="0" marL="0">
+              <a:lnSpc>
+                <a:spcPct val="120000"/>
+              </a:lnSpc>
+              <a:buNone/>
+            </a:pPr>
+            <a:r>
+              <a:rPr lang="en-US" sz="1200" dirty="0">
+                <a:solidFill>
+                  <a:srgbClr val="8B98A6"/>
                 </a:solidFill>
                 <a:latin typeface="Calibri" pitchFamily="34" charset="0"/>
                 <a:ea typeface="Calibri" pitchFamily="34" charset="-122"/>
@@ -2895,32 +3300,32 @@
               </a:rPr>
               <a:t>A gunshot-like acoustic spike over 75 dB or a waterhole below 20 cm raises as the window closes, while a ranger can still respond.</a:t>
             </a:r>
-            <a:endParaRPr lang="en-US" sz="1300" dirty="0"/>
-          </a:p>
-        </p:txBody>
-      </p:sp>
-      <p:sp>
-        <p:nvSpPr>
-          <p:cNvPr id="14" name="Shape 12"/>
-          <p:cNvSpPr/>
-          <p:nvPr/>
-        </p:nvSpPr>
-        <p:spPr>
-          <a:xfrm>
-            <a:off x="640080" y="4864608"/>
-            <a:ext cx="10881360" cy="1371600"/>
+            <a:endParaRPr lang="en-US" sz="1200" dirty="0"/>
+          </a:p>
+        </p:txBody>
+      </p:sp>
+      <p:sp>
+        <p:nvSpPr>
+          <p:cNvPr id="21" name="Shape 19"/>
+          <p:cNvSpPr/>
+          <p:nvPr/>
+        </p:nvSpPr>
+        <p:spPr>
+          <a:xfrm>
+            <a:off x="8112557" y="2514600"/>
+            <a:ext cx="3301898" cy="3566160"/>
           </a:xfrm>
           <a:prstGeom prst="roundRect">
             <a:avLst>
-              <a:gd name="adj" fmla="val 6667"/>
+              <a:gd name="adj" fmla="val 1662"/>
             </a:avLst>
           </a:prstGeom>
           <a:solidFill>
-            <a:srgbClr val="EFF3E9"/>
-          </a:solidFill>
-          <a:ln w="15240">
+            <a:srgbClr val="2B4030"/>
+          </a:solidFill>
+          <a:ln w="12700">
             <a:solidFill>
-              <a:srgbClr val="6A8F3C"/>
+              <a:srgbClr val="3F5444"/>
             </a:solidFill>
             <a:prstDash val="solid"/>
           </a:ln>
@@ -2928,34 +3333,14 @@
       </p:sp>
       <p:sp>
         <p:nvSpPr>
-          <p:cNvPr id="15" name="Shape 13"/>
-          <p:cNvSpPr/>
-          <p:nvPr/>
-        </p:nvSpPr>
-        <p:spPr>
-          <a:xfrm>
-            <a:off x="960120" y="5239512"/>
-            <a:ext cx="621792" cy="621792"/>
-          </a:xfrm>
-          <a:prstGeom prst="ellipse">
-            <a:avLst/>
-          </a:prstGeom>
-          <a:solidFill>
-            <a:srgbClr val="4B6B2A"/>
-          </a:solidFill>
-          <a:ln/>
-        </p:spPr>
-      </p:sp>
-      <p:sp>
-        <p:nvSpPr>
-          <p:cNvPr id="16" name="Text 14"/>
-          <p:cNvSpPr/>
-          <p:nvPr/>
-        </p:nvSpPr>
-        <p:spPr>
-          <a:xfrm>
-            <a:off x="960120" y="5239512"/>
-            <a:ext cx="621792" cy="621792"/>
+          <p:cNvPr id="22" name="Text 20"/>
+          <p:cNvSpPr/>
+          <p:nvPr/>
+        </p:nvSpPr>
+        <p:spPr>
+          <a:xfrm>
+            <a:off x="8386877" y="2752344"/>
+            <a:ext cx="1828800" cy="777240"/>
           </a:xfrm>
           <a:prstGeom prst="rect">
             <a:avLst/>
@@ -2967,94 +3352,97 @@
           <a:bodyPr wrap="square" lIns="0" tIns="0" rIns="0" bIns="0" rtlCol="0" anchor="ctr"/>
           <a:lstStyle/>
           <a:p>
-            <a:pPr algn="ctr" indent="0" marL="0">
+            <a:pPr indent="0" marL="0">
               <a:buNone/>
             </a:pPr>
             <a:r>
-              <a:rPr lang="en-US" sz="2200" b="1" dirty="0">
+              <a:rPr lang="en-US" sz="3800" b="1" dirty="0">
                 <a:solidFill>
-                  <a:srgbClr val="FFFFFF"/>
+                  <a:srgbClr val="A5501F"/>
                 </a:solidFill>
                 <a:latin typeface="Cambria" pitchFamily="34" charset="0"/>
                 <a:ea typeface="Cambria" pitchFamily="34" charset="-122"/>
                 <a:cs typeface="Cambria" pitchFamily="34" charset="-120"/>
               </a:rPr>
-              <a:t>3</a:t>
-            </a:r>
-            <a:endParaRPr lang="en-US" sz="2200" dirty="0"/>
-          </a:p>
-        </p:txBody>
-      </p:sp>
-      <p:sp>
-        <p:nvSpPr>
-          <p:cNvPr id="17" name="Text 15"/>
-          <p:cNvSpPr/>
-          <p:nvPr/>
-        </p:nvSpPr>
-        <p:spPr>
-          <a:xfrm>
-            <a:off x="1828800" y="5065776"/>
-            <a:ext cx="9418320" cy="411480"/>
-          </a:xfrm>
-          <a:prstGeom prst="rect">
-            <a:avLst/>
-          </a:prstGeom>
-          <a:noFill/>
-          <a:ln/>
-        </p:spPr>
-        <p:txBody>
-          <a:bodyPr wrap="square" lIns="0" tIns="0" rIns="0" bIns="0" rtlCol="0" anchor="ctr"/>
-          <a:lstStyle/>
-          <a:p>
-            <a:pPr indent="0" marL="0">
-              <a:buNone/>
-            </a:pPr>
-            <a:r>
-              <a:rPr lang="en-US" sz="1700" b="1" dirty="0">
-                <a:solidFill>
-                  <a:srgbClr val="1C2617"/>
-                </a:solidFill>
-                <a:latin typeface="Calibri" pitchFamily="34" charset="0"/>
-                <a:ea typeface="Calibri" pitchFamily="34" charset="-122"/>
-                <a:cs typeface="Calibri" pitchFamily="34" charset="-120"/>
-              </a:rPr>
-              <a:t>Alert flags on real thresholds</a:t>
-            </a:r>
-            <a:endParaRPr lang="en-US" sz="1700" dirty="0"/>
-          </a:p>
-        </p:txBody>
-      </p:sp>
-      <p:sp>
-        <p:nvSpPr>
-          <p:cNvPr id="18" name="Text 16"/>
-          <p:cNvSpPr/>
-          <p:nvPr/>
-        </p:nvSpPr>
-        <p:spPr>
-          <a:xfrm>
-            <a:off x="1828800" y="5486400"/>
-            <a:ext cx="9418320" cy="594360"/>
-          </a:xfrm>
-          <a:prstGeom prst="rect">
-            <a:avLst/>
-          </a:prstGeom>
-          <a:noFill/>
-          <a:ln/>
-        </p:spPr>
-        <p:txBody>
-          <a:bodyPr wrap="square" lIns="0" tIns="0" rIns="0" bIns="0" rtlCol="0" anchor="ctr"/>
+              <a:t>03</a:t>
+            </a:r>
+            <a:endParaRPr lang="en-US" sz="3800" dirty="0"/>
+          </a:p>
+        </p:txBody>
+      </p:sp>
+      <p:sp>
+        <p:nvSpPr>
+          <p:cNvPr id="23" name="Text 21"/>
+          <p:cNvSpPr/>
+          <p:nvPr/>
+        </p:nvSpPr>
+        <p:spPr>
+          <a:xfrm>
+            <a:off x="8405165" y="3566160"/>
+            <a:ext cx="2753258" cy="868680"/>
+          </a:xfrm>
+          <a:prstGeom prst="rect">
+            <a:avLst/>
+          </a:prstGeom>
+          <a:noFill/>
+          <a:ln/>
+        </p:spPr>
+        <p:txBody>
+          <a:bodyPr wrap="square" lIns="0" tIns="0" rIns="0" bIns="0" rtlCol="0" anchor="t"/>
           <a:lstStyle/>
           <a:p>
             <a:pPr indent="0" marL="0">
               <a:lnSpc>
-                <a:spcPct val="105000"/>
+                <a:spcPct val="100000"/>
               </a:lnSpc>
               <a:buNone/>
             </a:pPr>
             <a:r>
-              <a:rPr lang="en-US" sz="1300" dirty="0">
+              <a:rPr lang="en-US" sz="1550" b="1" dirty="0">
                 <a:solidFill>
-                  <a:srgbClr val="606E50"/>
+                  <a:srgbClr val="ECE3CF"/>
+                </a:solidFill>
+                <a:latin typeface="Cambria" pitchFamily="34" charset="0"/>
+                <a:ea typeface="Cambria" pitchFamily="34" charset="-122"/>
+                <a:cs typeface="Cambria" pitchFamily="34" charset="-120"/>
+              </a:rPr>
+              <a:t>Alert flags on real thresholds</a:t>
+            </a:r>
+            <a:endParaRPr lang="en-US" sz="1550" dirty="0"/>
+          </a:p>
+        </p:txBody>
+      </p:sp>
+      <p:sp>
+        <p:nvSpPr>
+          <p:cNvPr id="24" name="Text 22"/>
+          <p:cNvSpPr/>
+          <p:nvPr/>
+        </p:nvSpPr>
+        <p:spPr>
+          <a:xfrm>
+            <a:off x="8405165" y="4434840"/>
+            <a:ext cx="2753258" cy="1463040"/>
+          </a:xfrm>
+          <a:prstGeom prst="rect">
+            <a:avLst/>
+          </a:prstGeom>
+          <a:noFill/>
+          <a:ln/>
+        </p:spPr>
+        <p:txBody>
+          <a:bodyPr wrap="square" lIns="0" tIns="0" rIns="0" bIns="0" rtlCol="0" anchor="ctr"/>
+          <a:lstStyle/>
+          <a:p>
+            <a:pPr indent="0" marL="0">
+              <a:lnSpc>
+                <a:spcPct val="120000"/>
+              </a:lnSpc>
+              <a:buNone/>
+            </a:pPr>
+            <a:r>
+              <a:rPr lang="en-US" sz="1200" dirty="0">
+                <a:solidFill>
+                  <a:srgbClr val="8B98A6"/>
                 </a:solidFill>
                 <a:latin typeface="Calibri" pitchFamily="34" charset="0"/>
                 <a:ea typeface="Calibri" pitchFamily="34" charset="-122"/>
@@ -3062,7 +3450,7 @@
               </a:rPr>
               <a:t>The flags trip on genuine breaches, and the stored count climbs 362 to 378 in fifteen seconds during the check.</a:t>
             </a:r>
-            <a:endParaRPr lang="en-US" sz="1300" dirty="0"/>
+            <a:endParaRPr lang="en-US" sz="1200" dirty="0"/>
           </a:p>
         </p:txBody>
       </p:sp>
@@ -3080,7 +3468,7 @@
     <p:bg>
       <p:bgPr>
         <a:solidFill>
-          <a:srgbClr val="FFFFFF"/>
+          <a:srgbClr val="203127"/>
         </a:solidFill>
       </p:bgPr>
     </p:bg>
@@ -3100,80 +3488,193 @@
       </p:grpSpPr>
       <p:sp>
         <p:nvSpPr>
-          <p:cNvPr id="2" name="Text 0"/>
-          <p:cNvSpPr/>
-          <p:nvPr/>
-        </p:nvSpPr>
-        <p:spPr>
-          <a:xfrm>
-            <a:off x="640080" y="502920"/>
-            <a:ext cx="10972800" cy="822960"/>
-          </a:xfrm>
-          <a:prstGeom prst="rect">
-            <a:avLst/>
-          </a:prstGeom>
-          <a:noFill/>
-          <a:ln/>
-        </p:spPr>
-        <p:txBody>
-          <a:bodyPr wrap="square" rtlCol="0" anchor="t"/>
+          <p:cNvPr id="2" name="Shape 0"/>
+          <p:cNvSpPr/>
+          <p:nvPr/>
+        </p:nvSpPr>
+        <p:spPr>
+          <a:xfrm>
+            <a:off x="10881360" y="640080"/>
+            <a:ext cx="91440" cy="91440"/>
+          </a:xfrm>
+          <a:prstGeom prst="ellipse">
+            <a:avLst/>
+          </a:prstGeom>
+          <a:solidFill>
+            <a:srgbClr val="A5501F"/>
+          </a:solidFill>
+          <a:ln/>
+        </p:spPr>
+      </p:sp>
+      <p:sp>
+        <p:nvSpPr>
+          <p:cNvPr id="3" name="Shape 1"/>
+          <p:cNvSpPr/>
+          <p:nvPr/>
+        </p:nvSpPr>
+        <p:spPr>
+          <a:xfrm>
+            <a:off x="11521440" y="1280160"/>
+            <a:ext cx="128016" cy="128016"/>
+          </a:xfrm>
+          <a:prstGeom prst="ellipse">
+            <a:avLst/>
+          </a:prstGeom>
+          <a:solidFill>
+            <a:srgbClr val="A5501F"/>
+          </a:solidFill>
+          <a:ln/>
+        </p:spPr>
+      </p:sp>
+      <p:sp>
+        <p:nvSpPr>
+          <p:cNvPr id="4" name="Shape 2"/>
+          <p:cNvSpPr/>
+          <p:nvPr/>
+        </p:nvSpPr>
+        <p:spPr>
+          <a:xfrm>
+            <a:off x="10424160" y="1463040"/>
+            <a:ext cx="164592" cy="164592"/>
+          </a:xfrm>
+          <a:prstGeom prst="ellipse">
+            <a:avLst/>
+          </a:prstGeom>
+          <a:solidFill>
+            <a:srgbClr val="A5501F"/>
+          </a:solidFill>
+          <a:ln/>
+        </p:spPr>
+      </p:sp>
+      <p:sp>
+        <p:nvSpPr>
+          <p:cNvPr id="5" name="Shape 3"/>
+          <p:cNvSpPr/>
+          <p:nvPr/>
+        </p:nvSpPr>
+        <p:spPr>
+          <a:xfrm>
+            <a:off x="11155680" y="2103120"/>
+            <a:ext cx="91440" cy="91440"/>
+          </a:xfrm>
+          <a:prstGeom prst="ellipse">
+            <a:avLst/>
+          </a:prstGeom>
+          <a:solidFill>
+            <a:srgbClr val="A5501F"/>
+          </a:solidFill>
+          <a:ln/>
+        </p:spPr>
+      </p:sp>
+      <p:sp>
+        <p:nvSpPr>
+          <p:cNvPr id="6" name="Shape 4"/>
+          <p:cNvSpPr/>
+          <p:nvPr/>
+        </p:nvSpPr>
+        <p:spPr>
+          <a:xfrm>
+            <a:off x="9966960" y="914400"/>
+            <a:ext cx="128016" cy="128016"/>
+          </a:xfrm>
+          <a:prstGeom prst="ellipse">
+            <a:avLst/>
+          </a:prstGeom>
+          <a:solidFill>
+            <a:srgbClr val="A5501F"/>
+          </a:solidFill>
+          <a:ln/>
+        </p:spPr>
+      </p:sp>
+      <p:sp>
+        <p:nvSpPr>
+          <p:cNvPr id="7" name="Shape 5"/>
+          <p:cNvSpPr/>
+          <p:nvPr/>
+        </p:nvSpPr>
+        <p:spPr>
+          <a:xfrm>
+            <a:off x="11704320" y="2651760"/>
+            <a:ext cx="164592" cy="164592"/>
+          </a:xfrm>
+          <a:prstGeom prst="ellipse">
+            <a:avLst/>
+          </a:prstGeom>
+          <a:solidFill>
+            <a:srgbClr val="A5501F"/>
+          </a:solidFill>
+          <a:ln/>
+        </p:spPr>
+      </p:sp>
+      <p:sp>
+        <p:nvSpPr>
+          <p:cNvPr id="8" name="Shape 6"/>
+          <p:cNvSpPr/>
+          <p:nvPr/>
+        </p:nvSpPr>
+        <p:spPr>
+          <a:xfrm>
+            <a:off x="10698480" y="2468880"/>
+            <a:ext cx="91440" cy="91440"/>
+          </a:xfrm>
+          <a:prstGeom prst="ellipse">
+            <a:avLst/>
+          </a:prstGeom>
+          <a:solidFill>
+            <a:srgbClr val="A5501F"/>
+          </a:solidFill>
+          <a:ln/>
+        </p:spPr>
+      </p:sp>
+      <p:sp>
+        <p:nvSpPr>
+          <p:cNvPr id="9" name="Text 7"/>
+          <p:cNvSpPr/>
+          <p:nvPr/>
+        </p:nvSpPr>
+        <p:spPr>
+          <a:xfrm>
+            <a:off x="777240" y="731520"/>
+            <a:ext cx="914400" cy="640080"/>
+          </a:xfrm>
+          <a:prstGeom prst="rect">
+            <a:avLst/>
+          </a:prstGeom>
+          <a:noFill/>
+          <a:ln/>
+        </p:spPr>
+        <p:txBody>
+          <a:bodyPr wrap="square" lIns="0" tIns="0" rIns="0" bIns="0" rtlCol="0" anchor="ctr"/>
           <a:lstStyle/>
           <a:p>
             <a:pPr indent="0" marL="0">
               <a:buNone/>
             </a:pPr>
             <a:r>
-              <a:rPr lang="en-US" sz="2800" b="1" dirty="0">
+              <a:rPr lang="en-US" sz="3000" b="1" dirty="0">
                 <a:solidFill>
-                  <a:srgbClr val="1C2617"/>
+                  <a:srgbClr val="A5501F"/>
                 </a:solidFill>
                 <a:latin typeface="Cambria" pitchFamily="34" charset="0"/>
                 <a:ea typeface="Cambria" pitchFamily="34" charset="-122"/>
                 <a:cs typeface="Cambria" pitchFamily="34" charset="-120"/>
               </a:rPr>
-              <a:t>Hardest Part — a silent DynamoDB undercount</a:t>
-            </a:r>
-            <a:endParaRPr lang="en-US" sz="2800" dirty="0"/>
-          </a:p>
-        </p:txBody>
-      </p:sp>
-      <p:sp>
-        <p:nvSpPr>
-          <p:cNvPr id="3" name="Shape 1"/>
-          <p:cNvSpPr/>
-          <p:nvPr/>
-        </p:nvSpPr>
-        <p:spPr>
-          <a:xfrm>
-            <a:off x="640080" y="1874520"/>
-            <a:ext cx="4937760" cy="4160520"/>
-          </a:xfrm>
-          <a:prstGeom prst="roundRect">
-            <a:avLst>
-              <a:gd name="adj" fmla="val 2198"/>
-            </a:avLst>
-          </a:prstGeom>
-          <a:solidFill>
-            <a:srgbClr val="EFF3E9"/>
-          </a:solidFill>
-          <a:ln w="19050">
-            <a:solidFill>
-              <a:srgbClr val="D9A62E"/>
-            </a:solidFill>
-            <a:prstDash val="solid"/>
-          </a:ln>
-        </p:spPr>
-      </p:sp>
-      <p:sp>
-        <p:nvSpPr>
-          <p:cNvPr id="4" name="Text 2"/>
-          <p:cNvSpPr/>
-          <p:nvPr/>
-        </p:nvSpPr>
-        <p:spPr>
-          <a:xfrm>
-            <a:off x="960120" y="2103120"/>
-            <a:ext cx="3657600" cy="457200"/>
+              <a:t>03</a:t>
+            </a:r>
+            <a:endParaRPr lang="en-US" sz="3000" dirty="0"/>
+          </a:p>
+        </p:txBody>
+      </p:sp>
+      <p:sp>
+        <p:nvSpPr>
+          <p:cNvPr id="10" name="Text 8"/>
+          <p:cNvSpPr/>
+          <p:nvPr/>
+        </p:nvSpPr>
+        <p:spPr>
+          <a:xfrm>
+            <a:off x="1645920" y="905256"/>
+            <a:ext cx="9768535" cy="274320"/>
           </a:xfrm>
           <a:prstGeom prst="rect">
             <a:avLst/>
@@ -3189,30 +3690,96 @@
               <a:buNone/>
             </a:pPr>
             <a:r>
-              <a:rPr lang="en-US" sz="1900" b="1" dirty="0">
+              <a:rPr lang="en-US" sz="1100" b="1" spc="200" kern="0" dirty="0">
                 <a:solidFill>
-                  <a:srgbClr val="D9A62E"/>
+                  <a:srgbClr val="8B98A6"/>
+                </a:solidFill>
+                <a:latin typeface="Calibri" pitchFamily="34" charset="0"/>
+                <a:ea typeface="Calibri" pitchFamily="34" charset="-122"/>
+                <a:cs typeface="Calibri" pitchFamily="34" charset="-120"/>
+              </a:rPr>
+              <a:t>CHALLENGE</a:t>
+            </a:r>
+            <a:endParaRPr lang="en-US" sz="1100" dirty="0"/>
+          </a:p>
+        </p:txBody>
+      </p:sp>
+      <p:sp>
+        <p:nvSpPr>
+          <p:cNvPr id="11" name="Text 9"/>
+          <p:cNvSpPr/>
+          <p:nvPr/>
+        </p:nvSpPr>
+        <p:spPr>
+          <a:xfrm>
+            <a:off x="777240" y="1380744"/>
+            <a:ext cx="10637215" cy="640080"/>
+          </a:xfrm>
+          <a:prstGeom prst="rect">
+            <a:avLst/>
+          </a:prstGeom>
+          <a:noFill/>
+          <a:ln/>
+        </p:spPr>
+        <p:txBody>
+          <a:bodyPr wrap="square" lIns="0" tIns="0" rIns="0" bIns="0" rtlCol="0" anchor="ctr"/>
+          <a:lstStyle/>
+          <a:p>
+            <a:pPr indent="0" marL="0">
+              <a:buNone/>
+            </a:pPr>
+            <a:r>
+              <a:rPr lang="en-US" sz="2300" b="1" dirty="0">
+                <a:solidFill>
+                  <a:srgbClr val="ECE3CF"/>
                 </a:solidFill>
                 <a:latin typeface="Cambria" pitchFamily="34" charset="0"/>
                 <a:ea typeface="Cambria" pitchFamily="34" charset="-122"/>
                 <a:cs typeface="Cambria" pitchFamily="34" charset="-120"/>
               </a:rPr>
-              <a:t>Problem</a:t>
-            </a:r>
-            <a:endParaRPr lang="en-US" sz="1900" dirty="0"/>
-          </a:p>
-        </p:txBody>
-      </p:sp>
-      <p:sp>
-        <p:nvSpPr>
-          <p:cNvPr id="5" name="Text 3"/>
-          <p:cNvSpPr/>
-          <p:nvPr/>
-        </p:nvSpPr>
-        <p:spPr>
-          <a:xfrm>
-            <a:off x="960120" y="2651760"/>
-            <a:ext cx="4343400" cy="3200400"/>
+              <a:t>a silent undercount at scale</a:t>
+            </a:r>
+            <a:endParaRPr lang="en-US" sz="2300" dirty="0"/>
+          </a:p>
+        </p:txBody>
+      </p:sp>
+      <p:sp>
+        <p:nvSpPr>
+          <p:cNvPr id="12" name="Shape 10"/>
+          <p:cNvSpPr/>
+          <p:nvPr/>
+        </p:nvSpPr>
+        <p:spPr>
+          <a:xfrm>
+            <a:off x="777240" y="2423160"/>
+            <a:ext cx="5090008" cy="3657600"/>
+          </a:xfrm>
+          <a:prstGeom prst="roundRect">
+            <a:avLst>
+              <a:gd name="adj" fmla="val 1500"/>
+            </a:avLst>
+          </a:prstGeom>
+          <a:solidFill>
+            <a:srgbClr val="2B4030"/>
+          </a:solidFill>
+          <a:ln w="12700">
+            <a:solidFill>
+              <a:srgbClr val="3F5444"/>
+            </a:solidFill>
+            <a:prstDash val="solid"/>
+          </a:ln>
+        </p:spPr>
+      </p:sp>
+      <p:sp>
+        <p:nvSpPr>
+          <p:cNvPr id="13" name="Text 11"/>
+          <p:cNvSpPr/>
+          <p:nvPr/>
+        </p:nvSpPr>
+        <p:spPr>
+          <a:xfrm>
+            <a:off x="1097280" y="2697480"/>
+            <a:ext cx="4449928" cy="320040"/>
           </a:xfrm>
           <a:prstGeom prst="rect">
             <a:avLst/>
@@ -3225,48 +3792,41 @@
           <a:lstStyle/>
           <a:p>
             <a:pPr indent="0" marL="0">
-              <a:lnSpc>
-                <a:spcPct val="112000"/>
-              </a:lnSpc>
               <a:buNone/>
             </a:pPr>
             <a:r>
-              <a:rPr lang="en-US" sz="1350" dirty="0">
+              <a:rPr lang="en-US" sz="1200" b="1" spc="200" kern="0" dirty="0">
                 <a:solidFill>
-                  <a:srgbClr val="1C2617"/>
+                  <a:srgbClr val="D1584E"/>
                 </a:solidFill>
                 <a:latin typeface="Calibri" pitchFamily="34" charset="0"/>
                 <a:ea typeface="Calibri" pitchFamily="34" charset="-122"/>
                 <a:cs typeface="Calibri" pitchFamily="34" charset="-120"/>
               </a:rPr>
-              <a:t>The dashboard's stored-readings count came from a single DynamoDB scan. One scan call returns only about 1 MB of data and hands back a cursor for the rest, so the count silently stops short, and no error is raised anywhere. All 82 local tests and a full emulator run stayed green — a small local table fits in one page, so nothing could expose the missing pages.</a:t>
-            </a:r>
-            <a:endParaRPr lang="en-US" sz="1350" dirty="0"/>
-          </a:p>
-        </p:txBody>
-      </p:sp>
-      <p:sp>
-        <p:nvSpPr>
-          <p:cNvPr id="6" name="Shape 4"/>
-          <p:cNvSpPr/>
-          <p:nvPr/>
-        </p:nvSpPr>
-        <p:spPr>
-          <a:xfrm>
-            <a:off x="6611112" y="1874520"/>
-            <a:ext cx="4937760" cy="4160520"/>
-          </a:xfrm>
-          <a:prstGeom prst="roundRect">
-            <a:avLst>
-              <a:gd name="adj" fmla="val 2198"/>
-            </a:avLst>
-          </a:prstGeom>
-          <a:solidFill>
-            <a:srgbClr val="EFF3E9"/>
-          </a:solidFill>
+              <a:t>PROBLEM</a:t>
+            </a:r>
+            <a:endParaRPr lang="en-US" sz="1200" dirty="0"/>
+          </a:p>
+        </p:txBody>
+      </p:sp>
+      <p:sp>
+        <p:nvSpPr>
+          <p:cNvPr id="14" name="Shape 12"/>
+          <p:cNvSpPr/>
+          <p:nvPr/>
+        </p:nvSpPr>
+        <p:spPr>
+          <a:xfrm>
+            <a:off x="1097280" y="3081528"/>
+            <a:ext cx="4449928" cy="0"/>
+          </a:xfrm>
+          <a:prstGeom prst="line">
+            <a:avLst/>
+          </a:prstGeom>
+          <a:noFill/>
           <a:ln w="19050">
             <a:solidFill>
-              <a:srgbClr val="6A8F3C"/>
+              <a:srgbClr val="D1584E"/>
             </a:solidFill>
             <a:prstDash val="solid"/>
           </a:ln>
@@ -3274,80 +3834,41 @@
       </p:sp>
       <p:sp>
         <p:nvSpPr>
-          <p:cNvPr id="7" name="Text 5"/>
-          <p:cNvSpPr/>
-          <p:nvPr/>
-        </p:nvSpPr>
-        <p:spPr>
-          <a:xfrm>
-            <a:off x="6931152" y="2103120"/>
-            <a:ext cx="3657600" cy="457200"/>
-          </a:xfrm>
-          <a:prstGeom prst="rect">
-            <a:avLst/>
-          </a:prstGeom>
-          <a:noFill/>
-          <a:ln/>
-        </p:spPr>
-        <p:txBody>
-          <a:bodyPr wrap="square" lIns="0" tIns="0" rIns="0" bIns="0" rtlCol="0" anchor="ctr"/>
-          <a:lstStyle/>
-          <a:p>
-            <a:pPr indent="0" marL="0">
-              <a:buNone/>
-            </a:pPr>
-            <a:r>
-              <a:rPr lang="en-US" sz="1900" b="1" dirty="0">
-                <a:solidFill>
-                  <a:srgbClr val="6A8F3C"/>
-                </a:solidFill>
-                <a:latin typeface="Cambria" pitchFamily="34" charset="0"/>
-                <a:ea typeface="Cambria" pitchFamily="34" charset="-122"/>
-                <a:cs typeface="Cambria" pitchFamily="34" charset="-120"/>
-              </a:rPr>
-              <a:t>Solution</a:t>
-            </a:r>
-            <a:endParaRPr lang="en-US" sz="1900" dirty="0"/>
-          </a:p>
-        </p:txBody>
-      </p:sp>
-      <p:sp>
-        <p:nvSpPr>
-          <p:cNvPr id="8" name="Text 6"/>
-          <p:cNvSpPr/>
-          <p:nvPr/>
-        </p:nvSpPr>
-        <p:spPr>
-          <a:xfrm>
-            <a:off x="6931152" y="2651760"/>
-            <a:ext cx="4343400" cy="3200400"/>
-          </a:xfrm>
-          <a:prstGeom prst="rect">
-            <a:avLst/>
-          </a:prstGeom>
-          <a:noFill/>
-          <a:ln/>
-        </p:spPr>
-        <p:txBody>
-          <a:bodyPr wrap="square" lIns="0" tIns="0" rIns="0" bIns="0" rtlCol="0" anchor="ctr"/>
+          <p:cNvPr id="15" name="Text 13"/>
+          <p:cNvSpPr/>
+          <p:nvPr/>
+        </p:nvSpPr>
+        <p:spPr>
+          <a:xfrm>
+            <a:off x="1097280" y="3246120"/>
+            <a:ext cx="4449928" cy="2651760"/>
+          </a:xfrm>
+          <a:prstGeom prst="rect">
+            <a:avLst/>
+          </a:prstGeom>
+          <a:noFill/>
+          <a:ln/>
+        </p:spPr>
+        <p:txBody>
+          <a:bodyPr wrap="square" lIns="0" tIns="0" rIns="0" bIns="0" rtlCol="0" anchor="t"/>
           <a:lstStyle/>
           <a:p>
             <a:pPr indent="0" marL="0">
               <a:lnSpc>
-                <a:spcPct val="112000"/>
+                <a:spcPct val="128000"/>
               </a:lnSpc>
               <a:buNone/>
             </a:pPr>
             <a:r>
               <a:rPr lang="en-US" sz="1350" dirty="0">
                 <a:solidFill>
-                  <a:srgbClr val="1C2617"/>
+                  <a:srgbClr val="ECE3CF"/>
                 </a:solidFill>
                 <a:latin typeface="Calibri" pitchFamily="34" charset="0"/>
                 <a:ea typeface="Calibri" pitchFamily="34" charset="-122"/>
                 <a:cs typeface="Calibri" pitchFamily="34" charset="-120"/>
               </a:rPr>
-              <a:t>The count now follows the cursor page by page with the SDK's own paginator, locked in by a four-page regression test that sums 1,287 items across four pages, and re-verified against the live account. The same audit also caught unbatched SQS sends, now grouped ten per call.</a:t>
+              <a:t>The reserve's reading store grows without bound, and a naive query returns only the first page the database hands back. On real AWS that page is capped at roughly a megabyte, so once enough readings accumulate the dashboard quietly undercounts — every local test still passes because the test store is small enough to fit in one page.</a:t>
             </a:r>
             <a:endParaRPr lang="en-US" sz="1350" dirty="0"/>
           </a:p>
@@ -3355,23 +3876,134 @@
       </p:sp>
       <p:sp>
         <p:nvSpPr>
-          <p:cNvPr id="9" name="Shape 7"/>
-          <p:cNvSpPr/>
-          <p:nvPr/>
-        </p:nvSpPr>
-        <p:spPr>
-          <a:xfrm>
-            <a:off x="5669280" y="3703320"/>
-            <a:ext cx="841248" cy="512064"/>
-          </a:xfrm>
-          <a:prstGeom prst="rightArrow">
-            <a:avLst/>
-          </a:prstGeom>
-          <a:solidFill>
-            <a:srgbClr val="4B6B2A"/>
-          </a:solidFill>
-          <a:ln/>
-        </p:spPr>
+          <p:cNvPr id="16" name="Shape 14"/>
+          <p:cNvSpPr/>
+          <p:nvPr/>
+        </p:nvSpPr>
+        <p:spPr>
+          <a:xfrm>
+            <a:off x="6324448" y="2423160"/>
+            <a:ext cx="5090008" cy="3657600"/>
+          </a:xfrm>
+          <a:prstGeom prst="roundRect">
+            <a:avLst>
+              <a:gd name="adj" fmla="val 1500"/>
+            </a:avLst>
+          </a:prstGeom>
+          <a:solidFill>
+            <a:srgbClr val="2B4030"/>
+          </a:solidFill>
+          <a:ln w="12700">
+            <a:solidFill>
+              <a:srgbClr val="3F5444"/>
+            </a:solidFill>
+            <a:prstDash val="solid"/>
+          </a:ln>
+        </p:spPr>
+      </p:sp>
+      <p:sp>
+        <p:nvSpPr>
+          <p:cNvPr id="17" name="Text 15"/>
+          <p:cNvSpPr/>
+          <p:nvPr/>
+        </p:nvSpPr>
+        <p:spPr>
+          <a:xfrm>
+            <a:off x="6644488" y="2697480"/>
+            <a:ext cx="4449928" cy="320040"/>
+          </a:xfrm>
+          <a:prstGeom prst="rect">
+            <a:avLst/>
+          </a:prstGeom>
+          <a:noFill/>
+          <a:ln/>
+        </p:spPr>
+        <p:txBody>
+          <a:bodyPr wrap="square" lIns="0" tIns="0" rIns="0" bIns="0" rtlCol="0" anchor="ctr"/>
+          <a:lstStyle/>
+          <a:p>
+            <a:pPr indent="0" marL="0">
+              <a:buNone/>
+            </a:pPr>
+            <a:r>
+              <a:rPr lang="en-US" sz="1200" b="1" spc="200" kern="0" dirty="0">
+                <a:solidFill>
+                  <a:srgbClr val="3F7D4A"/>
+                </a:solidFill>
+                <a:latin typeface="Calibri" pitchFamily="34" charset="0"/>
+                <a:ea typeface="Calibri" pitchFamily="34" charset="-122"/>
+                <a:cs typeface="Calibri" pitchFamily="34" charset="-120"/>
+              </a:rPr>
+              <a:t>SOLUTION</a:t>
+            </a:r>
+            <a:endParaRPr lang="en-US" sz="1200" dirty="0"/>
+          </a:p>
+        </p:txBody>
+      </p:sp>
+      <p:sp>
+        <p:nvSpPr>
+          <p:cNvPr id="18" name="Shape 16"/>
+          <p:cNvSpPr/>
+          <p:nvPr/>
+        </p:nvSpPr>
+        <p:spPr>
+          <a:xfrm>
+            <a:off x="6644488" y="3081528"/>
+            <a:ext cx="4449928" cy="0"/>
+          </a:xfrm>
+          <a:prstGeom prst="line">
+            <a:avLst/>
+          </a:prstGeom>
+          <a:noFill/>
+          <a:ln w="19050">
+            <a:solidFill>
+              <a:srgbClr val="3F7D4A"/>
+            </a:solidFill>
+            <a:prstDash val="solid"/>
+          </a:ln>
+        </p:spPr>
+      </p:sp>
+      <p:sp>
+        <p:nvSpPr>
+          <p:cNvPr id="19" name="Text 17"/>
+          <p:cNvSpPr/>
+          <p:nvPr/>
+        </p:nvSpPr>
+        <p:spPr>
+          <a:xfrm>
+            <a:off x="6644488" y="3246120"/>
+            <a:ext cx="4449928" cy="2651760"/>
+          </a:xfrm>
+          <a:prstGeom prst="rect">
+            <a:avLst/>
+          </a:prstGeom>
+          <a:noFill/>
+          <a:ln/>
+        </p:spPr>
+        <p:txBody>
+          <a:bodyPr wrap="square" lIns="0" tIns="0" rIns="0" bIns="0" rtlCol="0" anchor="t"/>
+          <a:lstStyle/>
+          <a:p>
+            <a:pPr indent="0" marL="0">
+              <a:lnSpc>
+                <a:spcPct val="128000"/>
+              </a:lnSpc>
+              <a:buNone/>
+            </a:pPr>
+            <a:r>
+              <a:rPr lang="en-US" sz="1350" dirty="0">
+                <a:solidFill>
+                  <a:srgbClr val="ECE3CF"/>
+                </a:solidFill>
+                <a:latin typeface="Calibri" pitchFamily="34" charset="0"/>
+                <a:ea typeface="Calibri" pitchFamily="34" charset="-122"/>
+                <a:cs typeface="Calibri" pitchFamily="34" charset="-120"/>
+              </a:rPr>
+              <a:t>The dashboard's query follows the store's pagination cursor page by page until the scan is genuinely exhausted, and a switch-based dispatch keeps the function handler a thin router over the same query methods the local server uses. A regression test now pins the multi-page behaviour, and the fix also caught unbatched writes on the ingestion side.</a:t>
+            </a:r>
+            <a:endParaRPr lang="en-US" sz="1350" dirty="0"/>
+          </a:p>
+        </p:txBody>
       </p:sp>
     </p:spTree>
   </p:cSld>
